--- a/课件/C2/C2-A-01/C2-A-01.pptx
+++ b/课件/C2/C2-A-01/C2-A-01.pptx
@@ -21,10 +21,9 @@
     <p:sldId id="269" r:id="rId15"/>
     <p:sldId id="270" r:id="rId16"/>
     <p:sldId id="271" r:id="rId17"/>
-    <p:sldId id="272" r:id="rId18"/>
   </p:sldIdLst>
   <p:notesMasterIdLst>
-    <p:notesMasterId r:id="rId19"/>
+    <p:notesMasterId r:id="rId18"/>
   </p:notesMasterIdLst>
   <p:sldSz cx="12191695" cy="6858000"/>
   <p:notesSz cx="6858000" cy="12191695"/>
@@ -1158,94 +1157,6 @@
             <a:fld id="{F7021451-1387-4CA6-816F-3879F97B5CBC}" type="slidenum">
               <a:rPr lang="en-US"/>
               <a:t>16</a:t>
-            </a:fld>
-            <a:endParaRPr lang="en-US"/>
-          </a:p>
-        </p:txBody>
-      </p:sp>
-    </p:spTree>
-    <p:extLst>
-      <p:ext uri="{BB962C8B-B14F-4D97-AF65-F5344CB8AC3E}">
-        <p14:creationId xmlns:p14="http://schemas.microsoft.com/office/powerpoint/2010/main" val="1024086991"/>
-      </p:ext>
-    </p:extLst>
-  </p:cSld>
-  <p:clrMapOvr>
-    <a:masterClrMapping/>
-  </p:clrMapOvr>
-</p:notes>
-</file>
-
-<file path=ppt/notesSlides/notesSlide17.xml><?xml version="1.0" encoding="utf-8"?>
-<p:notes xmlns:a="http://schemas.openxmlformats.org/drawingml/2006/main" xmlns:r="http://schemas.openxmlformats.org/officeDocument/2006/relationships" xmlns:p="http://schemas.openxmlformats.org/presentationml/2006/main">
-  <p:cSld>
-    <p:spTree>
-      <p:nvGrpSpPr>
-        <p:cNvPr id="1" name=""/>
-        <p:cNvGrpSpPr/>
-        <p:nvPr/>
-      </p:nvGrpSpPr>
-      <p:grpSpPr>
-        <a:xfrm>
-          <a:off x="0" y="0"/>
-          <a:ext cx="0" cy="0"/>
-          <a:chOff x="0" y="0"/>
-          <a:chExt cx="0" cy="0"/>
-        </a:xfrm>
-      </p:grpSpPr>
-      <p:sp>
-        <p:nvSpPr>
-          <p:cNvPr id="2" name="Slide Image Placeholder 1"/>
-          <p:cNvSpPr>
-            <a:spLocks noGrp="1" noRot="1" noChangeAspect="1"/>
-          </p:cNvSpPr>
-          <p:nvPr>
-            <p:ph type="sldImg"/>
-          </p:nvPr>
-        </p:nvSpPr>
-        <p:spPr/>
-      </p:sp>
-      <p:sp>
-        <p:nvSpPr>
-          <p:cNvPr id="3" name="Notes Placeholder 2"/>
-          <p:cNvSpPr>
-            <a:spLocks noGrp="1"/>
-          </p:cNvSpPr>
-          <p:nvPr>
-            <p:ph type="body" idx="1"/>
-          </p:nvPr>
-        </p:nvSpPr>
-        <p:spPr/>
-        <p:txBody>
-          <a:bodyPr/>
-          <a:lstStyle/>
-          <a:p>
-            <a:r>
-              <a:rPr lang="en-US" dirty="0"/>
-              <a:t/>
-            </a:r>
-            <a:endParaRPr lang="en-US" dirty="0"/>
-          </a:p>
-        </p:txBody>
-      </p:sp>
-      <p:sp>
-        <p:nvSpPr>
-          <p:cNvPr id="4" name="Slide Number Placeholder 3"/>
-          <p:cNvSpPr>
-            <a:spLocks noGrp="1"/>
-          </p:cNvSpPr>
-          <p:nvPr>
-            <p:ph type="sldNum" sz="quarter" idx="10"/>
-          </p:nvPr>
-        </p:nvSpPr>
-        <p:spPr/>
-        <p:txBody>
-          <a:bodyPr/>
-          <a:lstStyle/>
-          <a:p>
-            <a:fld id="{F7021451-1387-4CA6-816F-3879F97B5CBC}" type="slidenum">
-              <a:rPr lang="en-US"/>
-              <a:t>17</a:t>
             </a:fld>
             <a:endParaRPr lang="en-US"/>
           </a:p>
@@ -2339,7 +2250,7 @@
                 <a:ea typeface="微软雅黑" pitchFamily="34" charset="-122"/>
                 <a:cs typeface="微软雅黑" pitchFamily="34" charset="-120"/>
               </a:rPr>
-              <a:t>1 / 17</a:t>
+              <a:t>1 / 16</a:t>
             </a:r>
             <a:endParaRPr lang="en-US" sz="1000" dirty="0"/>
           </a:p>
@@ -2456,7 +2367,7 @@
                 <a:ea typeface="微软雅黑" pitchFamily="34" charset="-122"/>
                 <a:cs typeface="微软雅黑" pitchFamily="34" charset="-120"/>
               </a:rPr>
-              <a:t>第1节 伪代码约定与复杂度分析</a:t>
+              <a:t>第1节 答题格式与复杂度分析</a:t>
             </a:r>
             <a:endParaRPr lang="en-US" sz="2000" dirty="0"/>
           </a:p>
@@ -2573,7 +2484,7 @@
                 <a:ea typeface="微软雅黑" pitchFamily="34" charset="-122"/>
                 <a:cs typeface="微软雅黑" pitchFamily="34" charset="-120"/>
               </a:rPr>
-              <a:t>10 / 17</a:t>
+              <a:t>10 / 16</a:t>
             </a:r>
             <a:endParaRPr lang="en-US" sz="1000" dirty="0"/>
           </a:p>
@@ -2651,7 +2562,7 @@
                 <a:ea typeface="微软雅黑" pitchFamily="34" charset="-122"/>
                 <a:cs typeface="微软雅黑" pitchFamily="34" charset="-120"/>
               </a:rPr>
-              <a:t>时间复杂度怎么数</a:t>
+              <a:t>内层次数跟着外层变，要先求和</a:t>
             </a:r>
             <a:endParaRPr lang="en-US" sz="2800" dirty="0"/>
           </a:p>
@@ -2735,7 +2646,7 @@
               </a:rPr>
               <a:t>for(int i = 0; i &lt; n; i++)
     for(int j = i; j &lt; n; j++)
-        x++;                 // 基本操作，数它的执行次数
+        x++;               // 数它跑了几次
 </a:t>
             </a:r>
             <a:endParaRPr lang="en-US" sz="1400" dirty="0"/>
@@ -2751,7 +2662,7 @@
         <p:spPr>
           <a:xfrm>
             <a:off x="896112" y="3867912"/>
-            <a:ext cx="10454335" cy="397764"/>
+            <a:ext cx="10454335" cy="740664"/>
           </a:xfrm>
           <a:prstGeom prst="rect">
             <a:avLst/>
@@ -2792,7 +2703,7 @@
                   <a:srgbClr val="000000"/>
                 </a:solidFill>
               </a:rPr>
-              <a:t>数基本操作的执行次数，只保留最高阶，去掉系数</a:t>
+              <a:t>i=0 时内层跑 n 次，i=1 时跑 n-1 次，一直到 i=n-1 时只跑 1 次</a:t>
             </a:r>
             <a:endParaRPr lang="en-US" sz="1800" dirty="0"/>
           </a:p>
@@ -2806,8 +2717,8 @@
         </p:nvSpPr>
         <p:spPr>
           <a:xfrm>
-            <a:off x="896112" y="4338828"/>
-            <a:ext cx="10454335" cy="740664"/>
+            <a:off x="896112" y="4681728"/>
+            <a:ext cx="10454335" cy="397764"/>
           </a:xfrm>
           <a:prstGeom prst="rect">
             <a:avLst/>
@@ -2848,7 +2759,7 @@
                   <a:srgbClr val="000000"/>
                 </a:solidFill>
               </a:rPr>
-              <a:t>内层依赖外层时先求和：i 固定内层跑 n-i 次，总和 n+(n-1)+…+1 = n(n+1)/2</a:t>
+              <a:t>总次数是 n+(n-1)+…+1，等差求和等于 n(n+1)/2</a:t>
             </a:r>
             <a:endParaRPr lang="en-US" sz="1800" dirty="0"/>
           </a:p>
@@ -2904,7 +2815,7 @@
                   <a:srgbClr val="000000"/>
                 </a:solidFill>
               </a:rPr>
-              <a:t>n(n+1)/2 去掉系数与低阶项，就是 O(n²)</a:t>
+              <a:t>去掉系数和低阶，最高阶是 n²，所以是 O(n²)</a:t>
             </a:r>
             <a:endParaRPr lang="en-US" sz="1800" dirty="0"/>
           </a:p>
@@ -2943,7 +2854,7 @@
                 <a:ea typeface="微软雅黑" pitchFamily="34" charset="-122"/>
                 <a:cs typeface="微软雅黑" pitchFamily="34" charset="-120"/>
               </a:rPr>
-              <a:t>三层循环不一定是 O(n³)：若最内层只执行常数次，总体可能仍是 O(n)</a:t>
+              <a:t>看到两层循环别急着写 O(n²)：要是内层只跑固定几次，结果可能是 O(n)</a:t>
             </a:r>
             <a:endParaRPr lang="en-US" sz="1500" dirty="0"/>
           </a:p>
@@ -3021,7 +2932,7 @@
                 <a:ea typeface="微软雅黑" pitchFamily="34" charset="-122"/>
                 <a:cs typeface="微软雅黑" pitchFamily="34" charset="-120"/>
               </a:rPr>
-              <a:t>11 / 17</a:t>
+              <a:t>11 / 16</a:t>
             </a:r>
             <a:endParaRPr lang="en-US" sz="1000" dirty="0"/>
           </a:p>
@@ -3099,7 +3010,7 @@
                 <a:ea typeface="微软雅黑" pitchFamily="34" charset="-122"/>
                 <a:cs typeface="微软雅黑" pitchFamily="34" charset="-120"/>
               </a:rPr>
-              <a:t>递归式怎么展开：逐层累加</a:t>
+              <a:t>递归式怎么算：画递归树逐层累加（拿纸跟着画）</a:t>
             </a:r>
             <a:endParaRPr lang="en-US" sz="2800" dirty="0"/>
           </a:p>
@@ -3114,7 +3025,7 @@
         <p:spPr>
           <a:xfrm>
             <a:off x="822960" y="2395728"/>
-            <a:ext cx="10545775" cy="416052"/>
+            <a:ext cx="10545775" cy="758952"/>
           </a:xfrm>
           <a:prstGeom prst="rect">
             <a:avLst/>
@@ -3135,7 +3046,7 @@
                   <a:srgbClr val="000000"/>
                 </a:solidFill>
               </a:rPr>
-              <a:t>以 T(n) = 2T(n/2) + O(n) 为例，一层一层把代价加起来</a:t>
+              <a:t>以 T(n)=2T(n/2)+O(n) 为例：处理规模 n 的问题，先做 O(n) 的活，再拆成两个 n/2 的子问题</a:t>
             </a:r>
             <a:endParaRPr lang="en-US" dirty="0"/>
           </a:p>
@@ -3149,7 +3060,7 @@
         </p:nvSpPr>
         <p:spPr>
           <a:xfrm>
-            <a:off x="896112" y="2939796"/>
+            <a:off x="896112" y="3282696"/>
             <a:ext cx="10454335" cy="397764"/>
           </a:xfrm>
           <a:prstGeom prst="rect">
@@ -3191,7 +3102,7 @@
                   <a:srgbClr val="000000"/>
                 </a:solidFill>
               </a:rPr>
-              <a:t>第0层：1个问题，规模 n，代价 O(n)</a:t>
+              <a:t>① 第0层：1个问题，规模 n，这层做的活是 O(n)</a:t>
             </a:r>
             <a:endParaRPr lang="en-US" sz="1800" dirty="0"/>
           </a:p>
@@ -3205,8 +3116,8 @@
         </p:nvSpPr>
         <p:spPr>
           <a:xfrm>
-            <a:off x="896112" y="3410712"/>
-            <a:ext cx="10454335" cy="397764"/>
+            <a:off x="896112" y="3753612"/>
+            <a:ext cx="10454335" cy="740664"/>
           </a:xfrm>
           <a:prstGeom prst="rect">
             <a:avLst/>
@@ -3247,7 +3158,7 @@
                   <a:srgbClr val="000000"/>
                 </a:solidFill>
               </a:rPr>
-              <a:t>第1层：2个问题，规模各 n/2，代价合计还是 O(n)</a:t>
+              <a:t>② 第1层：拆成2个，每个规模 n/2，合起来 2 乘 O(n/2)，还是 O(n)</a:t>
             </a:r>
             <a:endParaRPr lang="en-US" sz="1800" dirty="0"/>
           </a:p>
@@ -3261,7 +3172,7 @@
         </p:nvSpPr>
         <p:spPr>
           <a:xfrm>
-            <a:off x="896112" y="3881628"/>
+            <a:off x="896112" y="4567428"/>
             <a:ext cx="10454335" cy="397764"/>
           </a:xfrm>
           <a:prstGeom prst="rect">
@@ -3303,7 +3214,7 @@
                   <a:srgbClr val="000000"/>
                 </a:solidFill>
               </a:rPr>
-              <a:t>每往下一层，问题数翻倍、规模减半，每层代价都是 O(n)</a:t>
+              <a:t>③ 每往下一层，问题数翻倍、规模减半，一乘一除抵消，每层都是 O(n)</a:t>
             </a:r>
             <a:endParaRPr lang="en-US" sz="1800" dirty="0"/>
           </a:p>
@@ -3317,8 +3228,8 @@
         </p:nvSpPr>
         <p:spPr>
           <a:xfrm>
-            <a:off x="896112" y="4352544"/>
-            <a:ext cx="10454335" cy="397764"/>
+            <a:off x="896112" y="5038344"/>
+            <a:ext cx="10454335" cy="740664"/>
           </a:xfrm>
           <a:prstGeom prst="rect">
             <a:avLst/>
@@ -3359,7 +3270,7 @@
                   <a:srgbClr val="000000"/>
                 </a:solidFill>
               </a:rPr>
-              <a:t>规模减半到1，共 logn 层；每层 O(n)，合计 O(nlogn)</a:t>
+              <a:t>④ 规模减半到1要 logn 次，所以共 logn 层；每层 O(n)，合计 O(nlogn)</a:t>
             </a:r>
             <a:endParaRPr lang="en-US" sz="1800" dirty="0"/>
           </a:p>
@@ -3373,7 +3284,7 @@
         </p:nvSpPr>
         <p:spPr>
           <a:xfrm>
-            <a:off x="822960" y="4914900"/>
+            <a:off x="822960" y="5943600"/>
             <a:ext cx="10545775" cy="358902"/>
           </a:xfrm>
           <a:prstGeom prst="rect">
@@ -3398,7 +3309,7 @@
                 <a:ea typeface="微软雅黑" pitchFamily="34" charset="-122"/>
                 <a:cs typeface="微软雅黑" pitchFamily="34" charset="-120"/>
               </a:rPr>
-              <a:t>这个展开方式，强化阶段讲归并排序与快速排序时各用一次</a:t>
+              <a:t>记住这个算法：每层代价乘层数；归并排序、快速排序的复杂度就是这么来的</a:t>
             </a:r>
             <a:endParaRPr lang="en-US" sz="1500" dirty="0"/>
           </a:p>
@@ -3476,7 +3387,7 @@
                 <a:ea typeface="微软雅黑" pitchFamily="34" charset="-122"/>
                 <a:cs typeface="微软雅黑" pitchFamily="34" charset="-120"/>
               </a:rPr>
-              <a:t>12 / 17</a:t>
+              <a:t>12 / 16</a:t>
             </a:r>
             <a:endParaRPr lang="en-US" sz="1000" dirty="0"/>
           </a:p>
@@ -3554,7 +3465,7 @@
                 <a:ea typeface="微软雅黑" pitchFamily="34" charset="-122"/>
                 <a:cs typeface="微软雅黑" pitchFamily="34" charset="-120"/>
               </a:rPr>
-              <a:t>空间复杂度：算额外开的辅助空间</a:t>
+              <a:t>空间复杂度数额外开的辅助空间</a:t>
             </a:r>
             <a:endParaRPr lang="en-US" sz="2800" dirty="0"/>
           </a:p>
@@ -3610,7 +3521,7 @@
                   <a:srgbClr val="000000"/>
                 </a:solidFill>
               </a:rPr>
-              <a:t>空间复杂度数的是额外开的辅助空间：辅助数组的大小，加递归栈的最大深度</a:t>
+              <a:t>额外空间来自两处：你开的辅助数组，和递归调用压的栈</a:t>
             </a:r>
             <a:endParaRPr lang="en-US" sz="1800" dirty="0"/>
           </a:p>
@@ -3666,7 +3577,7 @@
                   <a:srgbClr val="000000"/>
                 </a:solidFill>
               </a:rPr>
-              <a:t>原地算法的 O(1)：只用了固定几个变量，不随 n 增长，不是指一点都不占内存</a:t>
+              <a:t>开了大小 n 的数组就是 O(n)；只用固定几个变量就是 O(1)</a:t>
             </a:r>
             <a:endParaRPr lang="en-US" sz="1800" dirty="0"/>
           </a:p>
@@ -3722,7 +3633,7 @@
                   <a:srgbClr val="000000"/>
                 </a:solidFill>
               </a:rPr>
-              <a:t>递归的空间不是 O(1)：即使没开数组，栈深度也要算，树的递归遍历是 O(树高)</a:t>
+              <a:t>原地算法的 O(1) 是不额外占、不随 n 长，不是一点内存都不用</a:t>
             </a:r>
             <a:endParaRPr lang="en-US" sz="1800" dirty="0"/>
           </a:p>
@@ -3778,7 +3689,7 @@
                   <a:srgbClr val="000000"/>
                 </a:solidFill>
               </a:rPr>
-              <a:t>单支树退化成一条链，递归遍历的空间最坏是 O(n)</a:t>
+              <a:t>递归的空间最容易漏：没开数组也要算栈深度，树的递归遍历是 O(树高)</a:t>
             </a:r>
             <a:endParaRPr lang="en-US" sz="1800" dirty="0"/>
           </a:p>
@@ -3817,7 +3728,7 @@
                 <a:ea typeface="微软雅黑" pitchFamily="34" charset="-122"/>
                 <a:cs typeface="微软雅黑" pitchFamily="34" charset="-120"/>
               </a:rPr>
-              <a:t>答题时时间与空间都要给，各配一句理由</a:t>
+              <a:t>答题时时间和空间都要给，各配一句理由</a:t>
             </a:r>
             <a:endParaRPr lang="en-US" sz="1500" dirty="0"/>
           </a:p>
@@ -3895,7 +3806,7 @@
                 <a:ea typeface="微软雅黑" pitchFamily="34" charset="-122"/>
                 <a:cs typeface="微软雅黑" pitchFamily="34" charset="-120"/>
               </a:rPr>
-              <a:t>13 / 17</a:t>
+              <a:t>13 / 16</a:t>
             </a:r>
             <a:endParaRPr lang="en-US" sz="1000" dirty="0"/>
           </a:p>
@@ -3934,7 +3845,7 @@
                 <a:ea typeface="微软雅黑" pitchFamily="34" charset="-122"/>
                 <a:cs typeface="微软雅黑" pitchFamily="34" charset="-120"/>
               </a:rPr>
-              <a:t>答题格式</a:t>
+              <a:t>本节小结</a:t>
             </a:r>
             <a:endParaRPr lang="en-US" sz="1400" dirty="0"/>
           </a:p>
@@ -3973,7 +3884,7 @@
                 <a:ea typeface="微软雅黑" pitchFamily="34" charset="-122"/>
                 <a:cs typeface="微软雅黑" pitchFamily="34" charset="-120"/>
               </a:rPr>
-              <a:t>答题三件套：思想、代码、复杂度</a:t>
+              <a:t>小结</a:t>
             </a:r>
             <a:endParaRPr lang="en-US" sz="2800" dirty="0"/>
           </a:p>
@@ -3981,54 +3892,14 @@
       </p:sp>
       <p:sp>
         <p:nvSpPr>
-          <p:cNvPr id="5" name="Shape 3"/>
-          <p:cNvSpPr/>
-          <p:nvPr/>
-        </p:nvSpPr>
-        <p:spPr>
-          <a:xfrm>
-            <a:off x="822960" y="2395728"/>
-            <a:ext cx="10545775" cy="2935224"/>
-          </a:xfrm>
-          <a:prstGeom prst="rect">
-            <a:avLst/>
-          </a:prstGeom>
-          <a:solidFill>
-            <a:srgbClr val="F7F9FC"/>
-          </a:solidFill>
-          <a:ln/>
-        </p:spPr>
-      </p:sp>
-      <p:sp>
-        <p:nvSpPr>
-          <p:cNvPr id="6" name="Shape 4"/>
-          <p:cNvSpPr/>
-          <p:nvPr/>
-        </p:nvSpPr>
-        <p:spPr>
-          <a:xfrm>
-            <a:off x="822960" y="2395728"/>
-            <a:ext cx="50292" cy="2935224"/>
-          </a:xfrm>
-          <a:prstGeom prst="rect">
-            <a:avLst/>
-          </a:prstGeom>
-          <a:solidFill>
-            <a:srgbClr val="1F4E9C"/>
-          </a:solidFill>
-          <a:ln/>
-        </p:spPr>
-      </p:sp>
-      <p:sp>
-        <p:nvSpPr>
-          <p:cNvPr id="7" name="Text 5"/>
-          <p:cNvSpPr/>
-          <p:nvPr/>
-        </p:nvSpPr>
-        <p:spPr>
-          <a:xfrm>
-            <a:off x="1078992" y="2505456"/>
-            <a:ext cx="10033711" cy="2715768"/>
+          <p:cNvPr id="5" name="Text 3"/>
+          <p:cNvSpPr/>
+          <p:nvPr/>
+        </p:nvSpPr>
+        <p:spPr>
+          <a:xfrm>
+            <a:off x="896112" y="2395728"/>
+            <a:ext cx="10454335" cy="397764"/>
           </a:xfrm>
           <a:prstGeom prst="rect">
             <a:avLst/>
@@ -4042,69 +3913,241 @@
           <a:p>
             <a:pPr algn="l" indent="0" marL="0">
               <a:lnSpc>
-                <a:spcPct val="125000"/>
+                <a:spcPct val="115000"/>
               </a:lnSpc>
               <a:buNone/>
             </a:pPr>
             <a:r>
-              <a:rPr lang="en-US" sz="1400" dirty="0">
-                <a:solidFill>
-                  <a:srgbClr val="1F2329"/>
-                </a:solidFill>
-                <a:latin typeface="Consolas" pitchFamily="34" charset="0"/>
-                <a:ea typeface="Consolas" pitchFamily="34" charset="-122"/>
-                <a:cs typeface="Consolas" pitchFamily="34" charset="-120"/>
-              </a:rPr>
-              <a:t>// ① 思想：把头结点后每个结点摘下，用头插法接回，走一遍即逆置
-void Reverse(LinkList &amp;L){              // ② 代码
-    LNode *p = L-&gt;next, *r;
-    L-&gt;next = NULL;
-    while(p != NULL){
-        r = p-&gt;next;                  // 先存后继
-        p-&gt;next = L-&gt;next;  L-&gt;next = p;   // 头插到 L 之后
-        p = r;
-    }
-}
-</a:t>
-            </a:r>
-            <a:endParaRPr lang="en-US" sz="1400" dirty="0"/>
-          </a:p>
-        </p:txBody>
-      </p:sp>
-      <p:sp>
-        <p:nvSpPr>
-          <p:cNvPr id="8" name="Text 6"/>
-          <p:cNvSpPr/>
-          <p:nvPr/>
-        </p:nvSpPr>
-        <p:spPr>
-          <a:xfrm>
-            <a:off x="822960" y="5532120"/>
-            <a:ext cx="10545775" cy="358902"/>
-          </a:xfrm>
-          <a:prstGeom prst="rect">
-            <a:avLst/>
-          </a:prstGeom>
-          <a:noFill/>
-          <a:ln/>
-        </p:spPr>
-        <p:txBody>
-          <a:bodyPr wrap="square" rtlCol="0" anchor="t"/>
-          <a:lstStyle/>
-          <a:p>
-            <a:pPr algn="l" indent="0" marL="0">
-              <a:buNone/>
-            </a:pPr>
-            <a:r>
-              <a:rPr lang="en-US" sz="1500" dirty="0">
-                <a:solidFill>
-                  <a:srgbClr val="8A9099"/>
+              <a:rPr lang="en-US" sz="1800" b="1" dirty="0">
+                <a:solidFill>
+                  <a:srgbClr val="1F4E9C"/>
                 </a:solidFill>
                 <a:latin typeface="微软雅黑" pitchFamily="34" charset="0"/>
                 <a:ea typeface="微软雅黑" pitchFamily="34" charset="-122"/>
                 <a:cs typeface="微软雅黑" pitchFamily="34" charset="-120"/>
               </a:rPr>
-              <a:t>③ 复杂度：时间 O(n)，空间 O(1) 只用两个指针；单链表下一节正式讲，这里只看三件套格式</a:t>
+              <a:t>•  </a:t>
+            </a:r>
+            <a:pPr algn="l" indent="0" marL="0">
+              <a:lnSpc>
+                <a:spcPct val="115000"/>
+              </a:lnSpc>
+              <a:buNone/>
+            </a:pPr>
+            <a:r>
+              <a:rPr lang="en-US" sz="1800" dirty="0">
+                <a:solidFill>
+                  <a:srgbClr val="000000"/>
+                </a:solidFill>
+              </a:rPr>
+              <a:t>802 写伪代码：省头文件和 main，但结构体定义、函数签名、边界判断要完整</a:t>
+            </a:r>
+            <a:endParaRPr lang="en-US" sz="1800" dirty="0"/>
+          </a:p>
+        </p:txBody>
+      </p:sp>
+      <p:sp>
+        <p:nvSpPr>
+          <p:cNvPr id="6" name="Text 4"/>
+          <p:cNvSpPr/>
+          <p:nvPr/>
+        </p:nvSpPr>
+        <p:spPr>
+          <a:xfrm>
+            <a:off x="896112" y="2866644"/>
+            <a:ext cx="10454335" cy="397764"/>
+          </a:xfrm>
+          <a:prstGeom prst="rect">
+            <a:avLst/>
+          </a:prstGeom>
+          <a:noFill/>
+          <a:ln/>
+        </p:spPr>
+        <p:txBody>
+          <a:bodyPr wrap="square" rtlCol="0" anchor="t"/>
+          <a:lstStyle/>
+          <a:p>
+            <a:pPr algn="l" indent="0" marL="0">
+              <a:lnSpc>
+                <a:spcPct val="115000"/>
+              </a:lnSpc>
+              <a:buNone/>
+            </a:pPr>
+            <a:r>
+              <a:rPr lang="en-US" sz="1800" b="1" dirty="0">
+                <a:solidFill>
+                  <a:srgbClr val="1F4E9C"/>
+                </a:solidFill>
+                <a:latin typeface="微软雅黑" pitchFamily="34" charset="0"/>
+                <a:ea typeface="微软雅黑" pitchFamily="34" charset="-122"/>
+                <a:cs typeface="微软雅黑" pitchFamily="34" charset="-120"/>
+              </a:rPr>
+              <a:t>•  </a:t>
+            </a:r>
+            <a:pPr algn="l" indent="0" marL="0">
+              <a:lnSpc>
+                <a:spcPct val="115000"/>
+              </a:lnSpc>
+              <a:buNone/>
+            </a:pPr>
+            <a:r>
+              <a:rPr lang="en-US" sz="1800" dirty="0">
+                <a:solidFill>
+                  <a:srgbClr val="000000"/>
+                </a:solidFill>
+              </a:rPr>
+              <a:t>答案分三件：思想、代码、复杂度，缺一件扣一件的分</a:t>
+            </a:r>
+            <a:endParaRPr lang="en-US" sz="1800" dirty="0"/>
+          </a:p>
+        </p:txBody>
+      </p:sp>
+      <p:sp>
+        <p:nvSpPr>
+          <p:cNvPr id="7" name="Text 5"/>
+          <p:cNvSpPr/>
+          <p:nvPr/>
+        </p:nvSpPr>
+        <p:spPr>
+          <a:xfrm>
+            <a:off x="896112" y="3337560"/>
+            <a:ext cx="10454335" cy="397764"/>
+          </a:xfrm>
+          <a:prstGeom prst="rect">
+            <a:avLst/>
+          </a:prstGeom>
+          <a:noFill/>
+          <a:ln/>
+        </p:spPr>
+        <p:txBody>
+          <a:bodyPr wrap="square" rtlCol="0" anchor="t"/>
+          <a:lstStyle/>
+          <a:p>
+            <a:pPr algn="l" indent="0" marL="0">
+              <a:lnSpc>
+                <a:spcPct val="115000"/>
+              </a:lnSpc>
+              <a:buNone/>
+            </a:pPr>
+            <a:r>
+              <a:rPr lang="en-US" sz="1800" b="1" dirty="0">
+                <a:solidFill>
+                  <a:srgbClr val="1F4E9C"/>
+                </a:solidFill>
+                <a:latin typeface="微软雅黑" pitchFamily="34" charset="0"/>
+                <a:ea typeface="微软雅黑" pitchFamily="34" charset="-122"/>
+                <a:cs typeface="微软雅黑" pitchFamily="34" charset="-120"/>
+              </a:rPr>
+              <a:t>•  </a:t>
+            </a:r>
+            <a:pPr algn="l" indent="0" marL="0">
+              <a:lnSpc>
+                <a:spcPct val="115000"/>
+              </a:lnSpc>
+              <a:buNone/>
+            </a:pPr>
+            <a:r>
+              <a:rPr lang="en-US" sz="1800" dirty="0">
+                <a:solidFill>
+                  <a:srgbClr val="000000"/>
+                </a:solidFill>
+              </a:rPr>
+              <a:t>时间复杂度数基本操作的次数，内层跟着外层变就先求和；递归式画递归树逐层累加</a:t>
+            </a:r>
+            <a:endParaRPr lang="en-US" sz="1800" dirty="0"/>
+          </a:p>
+        </p:txBody>
+      </p:sp>
+      <p:sp>
+        <p:nvSpPr>
+          <p:cNvPr id="8" name="Text 6"/>
+          <p:cNvSpPr/>
+          <p:nvPr/>
+        </p:nvSpPr>
+        <p:spPr>
+          <a:xfrm>
+            <a:off x="896112" y="3808476"/>
+            <a:ext cx="10454335" cy="397764"/>
+          </a:xfrm>
+          <a:prstGeom prst="rect">
+            <a:avLst/>
+          </a:prstGeom>
+          <a:noFill/>
+          <a:ln/>
+        </p:spPr>
+        <p:txBody>
+          <a:bodyPr wrap="square" rtlCol="0" anchor="t"/>
+          <a:lstStyle/>
+          <a:p>
+            <a:pPr algn="l" indent="0" marL="0">
+              <a:lnSpc>
+                <a:spcPct val="115000"/>
+              </a:lnSpc>
+              <a:buNone/>
+            </a:pPr>
+            <a:r>
+              <a:rPr lang="en-US" sz="1800" b="1" dirty="0">
+                <a:solidFill>
+                  <a:srgbClr val="1F4E9C"/>
+                </a:solidFill>
+                <a:latin typeface="微软雅黑" pitchFamily="34" charset="0"/>
+                <a:ea typeface="微软雅黑" pitchFamily="34" charset="-122"/>
+                <a:cs typeface="微软雅黑" pitchFamily="34" charset="-120"/>
+              </a:rPr>
+              <a:t>•  </a:t>
+            </a:r>
+            <a:pPr algn="l" indent="0" marL="0">
+              <a:lnSpc>
+                <a:spcPct val="115000"/>
+              </a:lnSpc>
+              <a:buNone/>
+            </a:pPr>
+            <a:r>
+              <a:rPr lang="en-US" sz="1800" dirty="0">
+                <a:solidFill>
+                  <a:srgbClr val="000000"/>
+                </a:solidFill>
+              </a:rPr>
+              <a:t>空间复杂度数额外的辅助数组和递归栈深度，递归的空间不是 O(1)</a:t>
+            </a:r>
+            <a:endParaRPr lang="en-US" sz="1800" dirty="0"/>
+          </a:p>
+        </p:txBody>
+      </p:sp>
+      <p:sp>
+        <p:nvSpPr>
+          <p:cNvPr id="9" name="Text 7"/>
+          <p:cNvSpPr/>
+          <p:nvPr/>
+        </p:nvSpPr>
+        <p:spPr>
+          <a:xfrm>
+            <a:off x="822960" y="4370832"/>
+            <a:ext cx="10545775" cy="358902"/>
+          </a:xfrm>
+          <a:prstGeom prst="rect">
+            <a:avLst/>
+          </a:prstGeom>
+          <a:noFill/>
+          <a:ln/>
+        </p:spPr>
+        <p:txBody>
+          <a:bodyPr wrap="square" rtlCol="0" anchor="t"/>
+          <a:lstStyle/>
+          <a:p>
+            <a:pPr algn="l" indent="0" marL="0">
+              <a:buNone/>
+            </a:pPr>
+            <a:r>
+              <a:rPr lang="en-US" sz="1500" dirty="0">
+                <a:solidFill>
+                  <a:srgbClr val="8A9099"/>
+                </a:solidFill>
+                <a:latin typeface="微软雅黑" pitchFamily="34" charset="0"/>
+                <a:ea typeface="微软雅黑" pitchFamily="34" charset="-122"/>
+                <a:cs typeface="微软雅黑" pitchFamily="34" charset="-120"/>
+              </a:rPr>
+              <a:t>这几样是后面每道算法题都要用的；至于每个结构具体怎么定义、书写上有哪些约定，讲到那个结构时再说</a:t>
             </a:r>
             <a:endParaRPr lang="en-US" sz="1500" dirty="0"/>
           </a:p>
@@ -4182,7 +4225,7 @@
                 <a:ea typeface="微软雅黑" pitchFamily="34" charset="-122"/>
                 <a:cs typeface="微软雅黑" pitchFamily="34" charset="-120"/>
               </a:rPr>
-              <a:t>14 / 17</a:t>
+              <a:t>14 / 16</a:t>
             </a:r>
             <a:endParaRPr lang="en-US" sz="1000" dirty="0"/>
           </a:p>
@@ -4221,7 +4264,7 @@
                 <a:ea typeface="微软雅黑" pitchFamily="34" charset="-122"/>
                 <a:cs typeface="微软雅黑" pitchFamily="34" charset="-120"/>
               </a:rPr>
-              <a:t>本节小结</a:t>
+              <a:t>课后任务</a:t>
             </a:r>
             <a:endParaRPr lang="en-US" sz="1400" dirty="0"/>
           </a:p>
@@ -4260,7 +4303,7 @@
                 <a:ea typeface="微软雅黑" pitchFamily="34" charset="-122"/>
                 <a:cs typeface="微软雅黑" pitchFamily="34" charset="-120"/>
               </a:rPr>
-              <a:t>小结</a:t>
+              <a:t>1道跟练 ＋ 1道模仿</a:t>
             </a:r>
             <a:endParaRPr lang="en-US" sz="2800" dirty="0"/>
           </a:p>
@@ -4311,38 +4354,13 @@
               <a:buNone/>
             </a:pPr>
             <a:r>
-              <a:rPr lang="en-US" sz="1800" dirty="0">
+              <a:rPr lang="en-US" sz="1800" b="1" dirty="0">
                 <a:solidFill>
                   <a:srgbClr val="000000"/>
                 </a:solidFill>
               </a:rPr>
-              <a:t>六条约定：两套下标基准、带头结点、top=-1与牺牲一单元、元素类型按需替换、={0}简写而{INF}要循环、引用 &amp;</a:t>
-            </a:r>
-            <a:endParaRPr lang="en-US" sz="1800" dirty="0"/>
-          </a:p>
-        </p:txBody>
-      </p:sp>
-      <p:sp>
-        <p:nvSpPr>
-          <p:cNvPr id="6" name="Text 4"/>
-          <p:cNvSpPr/>
-          <p:nvPr/>
-        </p:nvSpPr>
-        <p:spPr>
-          <a:xfrm>
-            <a:off x="896112" y="3209544"/>
-            <a:ext cx="10454335" cy="397764"/>
-          </a:xfrm>
-          <a:prstGeom prst="rect">
-            <a:avLst/>
-          </a:prstGeom>
-          <a:noFill/>
-          <a:ln/>
-        </p:spPr>
-        <p:txBody>
-          <a:bodyPr wrap="square" rtlCol="0" anchor="t"/>
-          <a:lstStyle/>
-          <a:p>
+              <a:t>跟练题</a:t>
+            </a:r>
             <a:pPr algn="l" indent="0" marL="0">
               <a:lnSpc>
                 <a:spcPct val="115000"/>
@@ -4350,6 +4368,45 @@
               <a:buNone/>
             </a:pPr>
             <a:r>
+              <a:rPr lang="en-US" sz="1800" dirty="0">
+                <a:solidFill>
+                  <a:srgbClr val="000000"/>
+                </a:solidFill>
+              </a:rPr>
+              <a:t>：用三件套格式作答——写一个函数统计数组里能被3整除的元素个数，给出思想、代码、复杂度</a:t>
+            </a:r>
+            <a:endParaRPr lang="en-US" sz="1800" dirty="0"/>
+          </a:p>
+        </p:txBody>
+      </p:sp>
+      <p:sp>
+        <p:nvSpPr>
+          <p:cNvPr id="6" name="Text 4"/>
+          <p:cNvSpPr/>
+          <p:nvPr/>
+        </p:nvSpPr>
+        <p:spPr>
+          <a:xfrm>
+            <a:off x="896112" y="3209544"/>
+            <a:ext cx="10454335" cy="397764"/>
+          </a:xfrm>
+          <a:prstGeom prst="rect">
+            <a:avLst/>
+          </a:prstGeom>
+          <a:noFill/>
+          <a:ln/>
+        </p:spPr>
+        <p:txBody>
+          <a:bodyPr wrap="square" rtlCol="0" anchor="t"/>
+          <a:lstStyle/>
+          <a:p>
+            <a:pPr algn="l" indent="0" marL="0">
+              <a:lnSpc>
+                <a:spcPct val="115000"/>
+              </a:lnSpc>
+              <a:buNone/>
+            </a:pPr>
+            <a:r>
               <a:rPr lang="en-US" sz="1800" b="1" dirty="0">
                 <a:solidFill>
                   <a:srgbClr val="1F4E9C"/>
@@ -4367,38 +4424,13 @@
               <a:buNone/>
             </a:pPr>
             <a:r>
-              <a:rPr lang="en-US" sz="1800" dirty="0">
+              <a:rPr lang="en-US" sz="1800" b="1" dirty="0">
                 <a:solidFill>
                   <a:srgbClr val="000000"/>
                 </a:solidFill>
               </a:rPr>
-              <a:t>这六条在后面每节课的代码里都会出现，尤其是第1条两套下标基准</a:t>
-            </a:r>
-            <a:endParaRPr lang="en-US" sz="1800" dirty="0"/>
-          </a:p>
-        </p:txBody>
-      </p:sp>
-      <p:sp>
-        <p:nvSpPr>
-          <p:cNvPr id="7" name="Text 5"/>
-          <p:cNvSpPr/>
-          <p:nvPr/>
-        </p:nvSpPr>
-        <p:spPr>
-          <a:xfrm>
-            <a:off x="896112" y="3680460"/>
-            <a:ext cx="10454335" cy="397764"/>
-          </a:xfrm>
-          <a:prstGeom prst="rect">
-            <a:avLst/>
-          </a:prstGeom>
-          <a:noFill/>
-          <a:ln/>
-        </p:spPr>
-        <p:txBody>
-          <a:bodyPr wrap="square" rtlCol="0" anchor="t"/>
-          <a:lstStyle/>
-          <a:p>
+              <a:t>模仿题</a:t>
+            </a:r>
             <a:pPr algn="l" indent="0" marL="0">
               <a:lnSpc>
                 <a:spcPct val="115000"/>
@@ -4406,68 +4438,137 @@
               <a:buNone/>
             </a:pPr>
             <a:r>
-              <a:rPr lang="en-US" sz="1800" b="1" dirty="0">
-                <a:solidFill>
-                  <a:srgbClr val="1F4E9C"/>
+              <a:rPr lang="en-US" sz="1800" dirty="0">
+                <a:solidFill>
+                  <a:srgbClr val="000000"/>
+                </a:solidFill>
+              </a:rPr>
+              <a:t>：算下面三段程序的时间复杂度，每段写一句理由（题集绪论章）</a:t>
+            </a:r>
+            <a:endParaRPr lang="en-US" sz="1800" dirty="0"/>
+          </a:p>
+        </p:txBody>
+      </p:sp>
+      <p:sp>
+        <p:nvSpPr>
+          <p:cNvPr id="7" name="Shape 5"/>
+          <p:cNvSpPr/>
+          <p:nvPr/>
+        </p:nvSpPr>
+        <p:spPr>
+          <a:xfrm>
+            <a:off x="822960" y="3771900"/>
+            <a:ext cx="10545775" cy="1508760"/>
+          </a:xfrm>
+          <a:prstGeom prst="rect">
+            <a:avLst/>
+          </a:prstGeom>
+          <a:solidFill>
+            <a:srgbClr val="F7F9FC"/>
+          </a:solidFill>
+          <a:ln/>
+        </p:spPr>
+      </p:sp>
+      <p:sp>
+        <p:nvSpPr>
+          <p:cNvPr id="8" name="Shape 6"/>
+          <p:cNvSpPr/>
+          <p:nvPr/>
+        </p:nvSpPr>
+        <p:spPr>
+          <a:xfrm>
+            <a:off x="822960" y="3771900"/>
+            <a:ext cx="50292" cy="1508760"/>
+          </a:xfrm>
+          <a:prstGeom prst="rect">
+            <a:avLst/>
+          </a:prstGeom>
+          <a:solidFill>
+            <a:srgbClr val="1F4E9C"/>
+          </a:solidFill>
+          <a:ln/>
+        </p:spPr>
+      </p:sp>
+      <p:sp>
+        <p:nvSpPr>
+          <p:cNvPr id="9" name="Text 7"/>
+          <p:cNvSpPr/>
+          <p:nvPr/>
+        </p:nvSpPr>
+        <p:spPr>
+          <a:xfrm>
+            <a:off x="1078992" y="3881628"/>
+            <a:ext cx="10033711" cy="1289304"/>
+          </a:xfrm>
+          <a:prstGeom prst="rect">
+            <a:avLst/>
+          </a:prstGeom>
+          <a:noFill/>
+          <a:ln/>
+        </p:spPr>
+        <p:txBody>
+          <a:bodyPr wrap="square" rtlCol="0" anchor="t"/>
+          <a:lstStyle/>
+          <a:p>
+            <a:pPr algn="l" indent="0" marL="0">
+              <a:lnSpc>
+                <a:spcPct val="125000"/>
+              </a:lnSpc>
+              <a:buNone/>
+            </a:pPr>
+            <a:r>
+              <a:rPr lang="en-US" sz="1400" dirty="0">
+                <a:solidFill>
+                  <a:srgbClr val="1F2329"/>
+                </a:solidFill>
+                <a:latin typeface="Consolas" pitchFamily="34" charset="0"/>
+                <a:ea typeface="Consolas" pitchFamily="34" charset="-122"/>
+                <a:cs typeface="Consolas" pitchFamily="34" charset="-120"/>
+              </a:rPr>
+              <a:t>for(i=0;i&lt;n;i++) for(j=i;j&lt;n;j++) x++;    // (1)
+int i=0,x=1; while(x&lt;n){ x*=2; i++; }      // (2)
+void f(int n){ if(n&lt;=1) return;            // (3)
+    for(i=1;i&lt;=3;i++) f(n/3); }
+</a:t>
+            </a:r>
+            <a:endParaRPr lang="en-US" sz="1400" dirty="0"/>
+          </a:p>
+        </p:txBody>
+      </p:sp>
+      <p:sp>
+        <p:nvSpPr>
+          <p:cNvPr id="10" name="Text 8"/>
+          <p:cNvSpPr/>
+          <p:nvPr/>
+        </p:nvSpPr>
+        <p:spPr>
+          <a:xfrm>
+            <a:off x="822960" y="5481828"/>
+            <a:ext cx="10545775" cy="358902"/>
+          </a:xfrm>
+          <a:prstGeom prst="rect">
+            <a:avLst/>
+          </a:prstGeom>
+          <a:noFill/>
+          <a:ln/>
+        </p:spPr>
+        <p:txBody>
+          <a:bodyPr wrap="square" rtlCol="0" anchor="t"/>
+          <a:lstStyle/>
+          <a:p>
+            <a:pPr algn="l" indent="0" marL="0">
+              <a:buNone/>
+            </a:pPr>
+            <a:r>
+              <a:rPr lang="en-US" sz="1500" dirty="0">
+                <a:solidFill>
+                  <a:srgbClr val="8A9099"/>
                 </a:solidFill>
                 <a:latin typeface="微软雅黑" pitchFamily="34" charset="0"/>
                 <a:ea typeface="微软雅黑" pitchFamily="34" charset="-122"/>
                 <a:cs typeface="微软雅黑" pitchFamily="34" charset="-120"/>
               </a:rPr>
-              <a:t>•  </a:t>
-            </a:r>
-            <a:pPr algn="l" indent="0" marL="0">
-              <a:lnSpc>
-                <a:spcPct val="115000"/>
-              </a:lnSpc>
-              <a:buNone/>
-            </a:pPr>
-            <a:r>
-              <a:rPr lang="en-US" sz="1800" dirty="0">
-                <a:solidFill>
-                  <a:srgbClr val="000000"/>
-                </a:solidFill>
-              </a:rPr>
-              <a:t>复杂度答题：一句结论加一句理由，时间与空间都要给，只写结论不给理由会扣分</a:t>
-            </a:r>
-            <a:endParaRPr lang="en-US" sz="1800" dirty="0"/>
-          </a:p>
-        </p:txBody>
-      </p:sp>
-      <p:sp>
-        <p:nvSpPr>
-          <p:cNvPr id="8" name="Text 6"/>
-          <p:cNvSpPr/>
-          <p:nvPr/>
-        </p:nvSpPr>
-        <p:spPr>
-          <a:xfrm>
-            <a:off x="822960" y="4242816"/>
-            <a:ext cx="10545775" cy="358902"/>
-          </a:xfrm>
-          <a:prstGeom prst="rect">
-            <a:avLst/>
-          </a:prstGeom>
-          <a:noFill/>
-          <a:ln/>
-        </p:spPr>
-        <p:txBody>
-          <a:bodyPr wrap="square" rtlCol="0" anchor="t"/>
-          <a:lstStyle/>
-          <a:p>
-            <a:pPr algn="l" indent="0" marL="0">
-              <a:buNone/>
-            </a:pPr>
-            <a:r>
-              <a:rPr lang="en-US" sz="1500" dirty="0">
-                <a:solidFill>
-                  <a:srgbClr val="8A9099"/>
-                </a:solidFill>
-                <a:latin typeface="微软雅黑" pitchFamily="34" charset="0"/>
-                <a:ea typeface="微软雅黑" pitchFamily="34" charset="-122"/>
-                <a:cs typeface="微软雅黑" pitchFamily="34" charset="-120"/>
-              </a:rPr>
-              <a:t>递归的空间要算栈深度，不是 O(1)</a:t>
+              <a:t>默写要求：合上资料能说清三件套是哪三件、复杂度怎么数；参考答案在本PPT最后两页，课后自行对照</a:t>
             </a:r>
             <a:endParaRPr lang="en-US" sz="1500" dirty="0"/>
           </a:p>
@@ -4545,7 +4646,7 @@
                 <a:ea typeface="微软雅黑" pitchFamily="34" charset="-122"/>
                 <a:cs typeface="微软雅黑" pitchFamily="34" charset="-120"/>
               </a:rPr>
-              <a:t>15 / 17</a:t>
+              <a:t>15 / 16</a:t>
             </a:r>
             <a:endParaRPr lang="en-US" sz="1000" dirty="0"/>
           </a:p>
@@ -4584,7 +4685,7 @@
                 <a:ea typeface="微软雅黑" pitchFamily="34" charset="-122"/>
                 <a:cs typeface="微软雅黑" pitchFamily="34" charset="-120"/>
               </a:rPr>
-              <a:t>课后任务</a:t>
+              <a:t>参考答案 · 跟练题</a:t>
             </a:r>
             <a:endParaRPr lang="en-US" sz="1400" dirty="0"/>
           </a:p>
@@ -4623,7 +4724,7 @@
                 <a:ea typeface="微软雅黑" pitchFamily="34" charset="-122"/>
                 <a:cs typeface="微软雅黑" pitchFamily="34" charset="-120"/>
               </a:rPr>
-              <a:t>1道跟练 ＋ 1道模仿</a:t>
+              <a:t>跟练题参考答案（自行对照）</a:t>
             </a:r>
             <a:endParaRPr lang="en-US" sz="2800" dirty="0"/>
           </a:p>
@@ -4631,14 +4732,103 @@
       </p:sp>
       <p:sp>
         <p:nvSpPr>
-          <p:cNvPr id="5" name="Text 3"/>
-          <p:cNvSpPr/>
-          <p:nvPr/>
-        </p:nvSpPr>
-        <p:spPr>
-          <a:xfrm>
-            <a:off x="896112" y="2395728"/>
-            <a:ext cx="10454335" cy="397764"/>
+          <p:cNvPr id="5" name="Shape 3"/>
+          <p:cNvSpPr/>
+          <p:nvPr/>
+        </p:nvSpPr>
+        <p:spPr>
+          <a:xfrm>
+            <a:off x="822960" y="2395728"/>
+            <a:ext cx="10545775" cy="2190006"/>
+          </a:xfrm>
+          <a:prstGeom prst="rect">
+            <a:avLst/>
+          </a:prstGeom>
+          <a:solidFill>
+            <a:srgbClr val="F7F9FC"/>
+          </a:solidFill>
+          <a:ln/>
+        </p:spPr>
+      </p:sp>
+      <p:sp>
+        <p:nvSpPr>
+          <p:cNvPr id="6" name="Shape 4"/>
+          <p:cNvSpPr/>
+          <p:nvPr/>
+        </p:nvSpPr>
+        <p:spPr>
+          <a:xfrm>
+            <a:off x="822960" y="2395728"/>
+            <a:ext cx="50292" cy="2190006"/>
+          </a:xfrm>
+          <a:prstGeom prst="rect">
+            <a:avLst/>
+          </a:prstGeom>
+          <a:solidFill>
+            <a:srgbClr val="1F4E9C"/>
+          </a:solidFill>
+          <a:ln/>
+        </p:spPr>
+      </p:sp>
+      <p:sp>
+        <p:nvSpPr>
+          <p:cNvPr id="7" name="Text 5"/>
+          <p:cNvSpPr/>
+          <p:nvPr/>
+        </p:nvSpPr>
+        <p:spPr>
+          <a:xfrm>
+            <a:off x="1078992" y="2505456"/>
+            <a:ext cx="10033711" cy="1970550"/>
+          </a:xfrm>
+          <a:prstGeom prst="rect">
+            <a:avLst/>
+          </a:prstGeom>
+          <a:noFill/>
+          <a:ln/>
+        </p:spPr>
+        <p:txBody>
+          <a:bodyPr wrap="square" rtlCol="0" anchor="t"/>
+          <a:lstStyle/>
+          <a:p>
+            <a:pPr algn="l" indent="0" marL="0">
+              <a:lnSpc>
+                <a:spcPct val="125000"/>
+              </a:lnSpc>
+              <a:buNone/>
+            </a:pPr>
+            <a:r>
+              <a:rPr lang="en-US" sz="1300" dirty="0">
+                <a:solidFill>
+                  <a:srgbClr val="1F2329"/>
+                </a:solidFill>
+                <a:latin typeface="Consolas" pitchFamily="34" charset="0"/>
+                <a:ea typeface="Consolas" pitchFamily="34" charset="-122"/>
+                <a:cs typeface="Consolas" pitchFamily="34" charset="-120"/>
+              </a:rPr>
+              <a:t>// 思想：遍历数组，每个元素对3取余，余数为0就把计数加一
+int count3(int a[], int n){
+    int cnt = 0;
+    for(int i = 0; i &lt; n; i++)
+        if(a[i] % 3 == 0) cnt++;
+    return cnt;
+}
+</a:t>
+            </a:r>
+            <a:endParaRPr lang="en-US" sz="1300" dirty="0"/>
+          </a:p>
+        </p:txBody>
+      </p:sp>
+      <p:sp>
+        <p:nvSpPr>
+          <p:cNvPr id="8" name="Text 6"/>
+          <p:cNvSpPr/>
+          <p:nvPr/>
+        </p:nvSpPr>
+        <p:spPr>
+          <a:xfrm>
+            <a:off x="896112" y="4786902"/>
+            <a:ext cx="10454335" cy="740664"/>
           </a:xfrm>
           <a:prstGeom prst="rect">
             <a:avLst/>
@@ -4674,13 +4864,38 @@
               <a:buNone/>
             </a:pPr>
             <a:r>
-              <a:rPr lang="en-US" sz="1800" b="1" dirty="0">
+              <a:rPr lang="en-US" sz="1800" dirty="0">
                 <a:solidFill>
                   <a:srgbClr val="000000"/>
                 </a:solidFill>
               </a:rPr>
-              <a:t>跟练题</a:t>
-            </a:r>
+              <a:t>复杂度：时间 O(n) 每个元素取余比较一次；空间 O(1) 只用了 cnt 一个变量</a:t>
+            </a:r>
+            <a:endParaRPr lang="en-US" sz="1800" dirty="0"/>
+          </a:p>
+        </p:txBody>
+      </p:sp>
+      <p:sp>
+        <p:nvSpPr>
+          <p:cNvPr id="9" name="Text 7"/>
+          <p:cNvSpPr/>
+          <p:nvPr/>
+        </p:nvSpPr>
+        <p:spPr>
+          <a:xfrm>
+            <a:off x="896112" y="5600718"/>
+            <a:ext cx="10454335" cy="397764"/>
+          </a:xfrm>
+          <a:prstGeom prst="rect">
+            <a:avLst/>
+          </a:prstGeom>
+          <a:noFill/>
+          <a:ln/>
+        </p:spPr>
+        <p:txBody>
+          <a:bodyPr wrap="square" rtlCol="0" anchor="t"/>
+          <a:lstStyle/>
+          <a:p>
             <a:pPr algn="l" indent="0" marL="0">
               <a:lnSpc>
                 <a:spcPct val="115000"/>
@@ -4688,38 +4903,16 @@
               <a:buNone/>
             </a:pPr>
             <a:r>
-              <a:rPr lang="en-US" sz="1800" dirty="0">
-                <a:solidFill>
-                  <a:srgbClr val="000000"/>
-                </a:solidFill>
-              </a:rPr>
-              <a:t>：把六条约定各写一句话解释它解决什么问题；再给约定5写一个错误示例与正确写法</a:t>
-            </a:r>
-            <a:endParaRPr lang="en-US" sz="1800" dirty="0"/>
-          </a:p>
-        </p:txBody>
-      </p:sp>
-      <p:sp>
-        <p:nvSpPr>
-          <p:cNvPr id="6" name="Text 4"/>
-          <p:cNvSpPr/>
-          <p:nvPr/>
-        </p:nvSpPr>
-        <p:spPr>
-          <a:xfrm>
-            <a:off x="896112" y="2866644"/>
-            <a:ext cx="10454335" cy="397764"/>
-          </a:xfrm>
-          <a:prstGeom prst="rect">
-            <a:avLst/>
-          </a:prstGeom>
-          <a:noFill/>
-          <a:ln/>
-        </p:spPr>
-        <p:txBody>
-          <a:bodyPr wrap="square" rtlCol="0" anchor="t"/>
-          <a:lstStyle/>
-          <a:p>
+              <a:rPr lang="en-US" sz="1800" b="1" dirty="0">
+                <a:solidFill>
+                  <a:srgbClr val="1F4E9C"/>
+                </a:solidFill>
+                <a:latin typeface="微软雅黑" pitchFamily="34" charset="0"/>
+                <a:ea typeface="微软雅黑" pitchFamily="34" charset="-122"/>
+                <a:cs typeface="微软雅黑" pitchFamily="34" charset="-120"/>
+              </a:rPr>
+              <a:t>•  </a:t>
+            </a:r>
             <a:pPr algn="l" indent="0" marL="0">
               <a:lnSpc>
                 <a:spcPct val="115000"/>
@@ -4727,170 +4920,14 @@
               <a:buNone/>
             </a:pPr>
             <a:r>
-              <a:rPr lang="en-US" sz="1800" b="1" dirty="0">
-                <a:solidFill>
-                  <a:srgbClr val="1F4E9C"/>
-                </a:solidFill>
-                <a:latin typeface="微软雅黑" pitchFamily="34" charset="0"/>
-                <a:ea typeface="微软雅黑" pitchFamily="34" charset="-122"/>
-                <a:cs typeface="微软雅黑" pitchFamily="34" charset="-120"/>
-              </a:rPr>
-              <a:t>•  </a:t>
-            </a:r>
-            <a:pPr algn="l" indent="0" marL="0">
-              <a:lnSpc>
-                <a:spcPct val="115000"/>
-              </a:lnSpc>
-              <a:buNone/>
-            </a:pPr>
-            <a:r>
-              <a:rPr lang="en-US" sz="1800" b="1" dirty="0">
+              <a:rPr lang="en-US" sz="1800" dirty="0">
                 <a:solidFill>
                   <a:srgbClr val="000000"/>
                 </a:solidFill>
               </a:rPr>
-              <a:t>模仿题</a:t>
-            </a:r>
-            <a:pPr algn="l" indent="0" marL="0">
-              <a:lnSpc>
-                <a:spcPct val="115000"/>
-              </a:lnSpc>
-              <a:buNone/>
-            </a:pPr>
-            <a:r>
-              <a:rPr lang="en-US" sz="1800" dirty="0">
-                <a:solidFill>
-                  <a:srgbClr val="000000"/>
-                </a:solidFill>
-              </a:rPr>
-              <a:t>：算下面三段程序的时间复杂度，每段写一句理由（题集绪论章）</a:t>
+              <a:t>三件齐了才满分：只写代码、不写思想和复杂度，要扣分</a:t>
             </a:r>
             <a:endParaRPr lang="en-US" sz="1800" dirty="0"/>
-          </a:p>
-        </p:txBody>
-      </p:sp>
-      <p:sp>
-        <p:nvSpPr>
-          <p:cNvPr id="7" name="Shape 5"/>
-          <p:cNvSpPr/>
-          <p:nvPr/>
-        </p:nvSpPr>
-        <p:spPr>
-          <a:xfrm>
-            <a:off x="822960" y="3429000"/>
-            <a:ext cx="10545775" cy="1508760"/>
-          </a:xfrm>
-          <a:prstGeom prst="rect">
-            <a:avLst/>
-          </a:prstGeom>
-          <a:solidFill>
-            <a:srgbClr val="F7F9FC"/>
-          </a:solidFill>
-          <a:ln/>
-        </p:spPr>
-      </p:sp>
-      <p:sp>
-        <p:nvSpPr>
-          <p:cNvPr id="8" name="Shape 6"/>
-          <p:cNvSpPr/>
-          <p:nvPr/>
-        </p:nvSpPr>
-        <p:spPr>
-          <a:xfrm>
-            <a:off x="822960" y="3429000"/>
-            <a:ext cx="50292" cy="1508760"/>
-          </a:xfrm>
-          <a:prstGeom prst="rect">
-            <a:avLst/>
-          </a:prstGeom>
-          <a:solidFill>
-            <a:srgbClr val="1F4E9C"/>
-          </a:solidFill>
-          <a:ln/>
-        </p:spPr>
-      </p:sp>
-      <p:sp>
-        <p:nvSpPr>
-          <p:cNvPr id="9" name="Text 7"/>
-          <p:cNvSpPr/>
-          <p:nvPr/>
-        </p:nvSpPr>
-        <p:spPr>
-          <a:xfrm>
-            <a:off x="1078992" y="3538728"/>
-            <a:ext cx="10033711" cy="1289304"/>
-          </a:xfrm>
-          <a:prstGeom prst="rect">
-            <a:avLst/>
-          </a:prstGeom>
-          <a:noFill/>
-          <a:ln/>
-        </p:spPr>
-        <p:txBody>
-          <a:bodyPr wrap="square" rtlCol="0" anchor="t"/>
-          <a:lstStyle/>
-          <a:p>
-            <a:pPr algn="l" indent="0" marL="0">
-              <a:lnSpc>
-                <a:spcPct val="125000"/>
-              </a:lnSpc>
-              <a:buNone/>
-            </a:pPr>
-            <a:r>
-              <a:rPr lang="en-US" sz="1400" dirty="0">
-                <a:solidFill>
-                  <a:srgbClr val="1F2329"/>
-                </a:solidFill>
-                <a:latin typeface="Consolas" pitchFamily="34" charset="0"/>
-                <a:ea typeface="Consolas" pitchFamily="34" charset="-122"/>
-                <a:cs typeface="Consolas" pitchFamily="34" charset="-120"/>
-              </a:rPr>
-              <a:t>for(i=0;i&lt;n;i++) for(j=i;j&lt;n;j++) x++;    // (1)
-int i=0,x=1; while(x&lt;n){ x*=2; i++; }      // (2)
-void f(int n){ if(n&lt;=1) return;            // (3)
-    for(i=1;i&lt;=3;i++) f(n/3); }
-</a:t>
-            </a:r>
-            <a:endParaRPr lang="en-US" sz="1400" dirty="0"/>
-          </a:p>
-        </p:txBody>
-      </p:sp>
-      <p:sp>
-        <p:nvSpPr>
-          <p:cNvPr id="10" name="Text 8"/>
-          <p:cNvSpPr/>
-          <p:nvPr/>
-        </p:nvSpPr>
-        <p:spPr>
-          <a:xfrm>
-            <a:off x="822960" y="5138928"/>
-            <a:ext cx="10545775" cy="358902"/>
-          </a:xfrm>
-          <a:prstGeom prst="rect">
-            <a:avLst/>
-          </a:prstGeom>
-          <a:noFill/>
-          <a:ln/>
-        </p:spPr>
-        <p:txBody>
-          <a:bodyPr wrap="square" rtlCol="0" anchor="t"/>
-          <a:lstStyle/>
-          <a:p>
-            <a:pPr algn="l" indent="0" marL="0">
-              <a:buNone/>
-            </a:pPr>
-            <a:r>
-              <a:rPr lang="en-US" sz="1500" dirty="0">
-                <a:solidFill>
-                  <a:srgbClr val="8A9099"/>
-                </a:solidFill>
-                <a:latin typeface="微软雅黑" pitchFamily="34" charset="0"/>
-                <a:ea typeface="微软雅黑" pitchFamily="34" charset="-122"/>
-                <a:cs typeface="微软雅黑" pitchFamily="34" charset="-120"/>
-              </a:rPr>
-              <a:t>默写要求：合上资料能说清六条约定的作用，能按三件套格式作答；参考答案在本PPT最后两页，课后自行对照</a:t>
-            </a:r>
-            <a:endParaRPr lang="en-US" sz="1500" dirty="0"/>
           </a:p>
         </p:txBody>
       </p:sp>
@@ -4966,7 +5003,7 @@
                 <a:ea typeface="微软雅黑" pitchFamily="34" charset="-122"/>
                 <a:cs typeface="微软雅黑" pitchFamily="34" charset="-120"/>
               </a:rPr>
-              <a:t>16 / 17</a:t>
+              <a:t>16 / 16</a:t>
             </a:r>
             <a:endParaRPr lang="en-US" sz="1000" dirty="0"/>
           </a:p>
@@ -5005,7 +5042,7 @@
                 <a:ea typeface="微软雅黑" pitchFamily="34" charset="-122"/>
                 <a:cs typeface="微软雅黑" pitchFamily="34" charset="-120"/>
               </a:rPr>
-              <a:t>参考答案 · 跟练题</a:t>
+              <a:t>参考答案 · 模仿题</a:t>
             </a:r>
             <a:endParaRPr lang="en-US" sz="1400" dirty="0"/>
           </a:p>
@@ -5044,7 +5081,7 @@
                 <a:ea typeface="微软雅黑" pitchFamily="34" charset="-122"/>
                 <a:cs typeface="微软雅黑" pitchFamily="34" charset="-120"/>
               </a:rPr>
-              <a:t>跟练题参考答案（自行对照）</a:t>
+              <a:t>模仿题参考答案（自行对照）</a:t>
             </a:r>
             <a:endParaRPr lang="en-US" sz="2800" dirty="0"/>
           </a:p>
@@ -5059,7 +5096,7 @@
         <p:spPr>
           <a:xfrm>
             <a:off x="896112" y="2395728"/>
-            <a:ext cx="10454335" cy="397764"/>
+            <a:ext cx="10454335" cy="740664"/>
           </a:xfrm>
           <a:prstGeom prst="rect">
             <a:avLst/>
@@ -5100,7 +5137,7 @@
                   <a:srgbClr val="000000"/>
                 </a:solidFill>
               </a:rPr>
-              <a:t>约定1 两套下标基准：固定线性表与排序各自的下标写法，同题不混用</a:t>
+              <a:t>(1) O(n²)：内层 j 从 i 到 n-1 共 n-i 次，总和 n+(n-1)+…+1 = n(n+1)/2</a:t>
             </a:r>
             <a:endParaRPr lang="en-US" sz="1800" dirty="0"/>
           </a:p>
@@ -5114,7 +5151,7 @@
         </p:nvSpPr>
         <p:spPr>
           <a:xfrm>
-            <a:off x="896112" y="2866644"/>
+            <a:off x="896112" y="3209544"/>
             <a:ext cx="10454335" cy="397764"/>
           </a:xfrm>
           <a:prstGeom prst="rect">
@@ -5156,7 +5193,7 @@
                   <a:srgbClr val="000000"/>
                 </a:solidFill>
               </a:rPr>
-              <a:t>约定2 带头结点：第一个结点的插删与其他位置统一，空表判定也统一</a:t>
+              <a:t>(2) O(logn)：x 每次翻倍，到 x≥n 停，循环 logn 次</a:t>
             </a:r>
             <a:endParaRPr lang="en-US" sz="1800" dirty="0"/>
           </a:p>
@@ -5170,8 +5207,8 @@
         </p:nvSpPr>
         <p:spPr>
           <a:xfrm>
-            <a:off x="896112" y="3337560"/>
-            <a:ext cx="10454335" cy="397764"/>
+            <a:off x="896112" y="3680460"/>
+            <a:ext cx="10454335" cy="740664"/>
           </a:xfrm>
           <a:prstGeom prst="rect">
             <a:avLst/>
@@ -5212,7 +5249,7 @@
                   <a:srgbClr val="000000"/>
                 </a:solidFill>
               </a:rPr>
-              <a:t>约定3 top=-1与牺牲一单元：把栈与循环队列的判空判满式子定死</a:t>
+              <a:t>(3) O(n)：T(n)=3T(n/3)+O(1)，每层问题数乘3、规模除以3，共 logn 层，末层 n 个</a:t>
             </a:r>
             <a:endParaRPr lang="en-US" sz="1800" dirty="0"/>
           </a:p>
@@ -5226,8 +5263,8 @@
         </p:nvSpPr>
         <p:spPr>
           <a:xfrm>
-            <a:off x="896112" y="3808476"/>
-            <a:ext cx="10454335" cy="397764"/>
+            <a:off x="822960" y="4585716"/>
+            <a:ext cx="10545775" cy="358902"/>
           </a:xfrm>
           <a:prstGeom prst="rect">
             <a:avLst/>
@@ -5240,552 +5277,18 @@
           <a:lstStyle/>
           <a:p>
             <a:pPr algn="l" indent="0" marL="0">
-              <a:lnSpc>
-                <a:spcPct val="115000"/>
-              </a:lnSpc>
-              <a:buNone/>
-            </a:pPr>
-            <a:r>
-              <a:rPr lang="en-US" sz="1800" b="1" dirty="0">
-                <a:solidFill>
-                  <a:srgbClr val="1F4E9C"/>
+              <a:buNone/>
+            </a:pPr>
+            <a:r>
+              <a:rPr lang="en-US" sz="1500" dirty="0">
+                <a:solidFill>
+                  <a:srgbClr val="8A9099"/>
                 </a:solidFill>
                 <a:latin typeface="微软雅黑" pitchFamily="34" charset="0"/>
                 <a:ea typeface="微软雅黑" pitchFamily="34" charset="-122"/>
                 <a:cs typeface="微软雅黑" pitchFamily="34" charset="-120"/>
               </a:rPr>
-              <a:t>•  </a:t>
-            </a:r>
-            <a:pPr algn="l" indent="0" marL="0">
-              <a:lnSpc>
-                <a:spcPct val="115000"/>
-              </a:lnSpc>
-              <a:buNone/>
-            </a:pPr>
-            <a:r>
-              <a:rPr lang="en-US" sz="1800" dirty="0">
-                <a:solidFill>
-                  <a:srgbClr val="000000"/>
-                </a:solidFill>
-              </a:rPr>
-              <a:t>约定4 元素类型按需替换：工具栈队里可放结点指针或顶点编号</a:t>
-            </a:r>
-            <a:endParaRPr lang="en-US" sz="1800" dirty="0"/>
-          </a:p>
-        </p:txBody>
-      </p:sp>
-      <p:sp>
-        <p:nvSpPr>
-          <p:cNvPr id="9" name="Text 7"/>
-          <p:cNvSpPr/>
-          <p:nvPr/>
-        </p:nvSpPr>
-        <p:spPr>
-          <a:xfrm>
-            <a:off x="896112" y="4279392"/>
-            <a:ext cx="10454335" cy="740664"/>
-          </a:xfrm>
-          <a:prstGeom prst="rect">
-            <a:avLst/>
-          </a:prstGeom>
-          <a:noFill/>
-          <a:ln/>
-        </p:spPr>
-        <p:txBody>
-          <a:bodyPr wrap="square" rtlCol="0" anchor="t"/>
-          <a:lstStyle/>
-          <a:p>
-            <a:pPr algn="l" indent="0" marL="0">
-              <a:lnSpc>
-                <a:spcPct val="115000"/>
-              </a:lnSpc>
-              <a:buNone/>
-            </a:pPr>
-            <a:r>
-              <a:rPr lang="en-US" sz="1800" b="1" dirty="0">
-                <a:solidFill>
-                  <a:srgbClr val="1F4E9C"/>
-                </a:solidFill>
-                <a:latin typeface="微软雅黑" pitchFamily="34" charset="0"/>
-                <a:ea typeface="微软雅黑" pitchFamily="34" charset="-122"/>
-                <a:cs typeface="微软雅黑" pitchFamily="34" charset="-120"/>
-              </a:rPr>
-              <a:t>•  </a:t>
-            </a:r>
-            <a:pPr algn="l" indent="0" marL="0">
-              <a:lnSpc>
-                <a:spcPct val="115000"/>
-              </a:lnSpc>
-              <a:buNone/>
-            </a:pPr>
-            <a:r>
-              <a:rPr lang="en-US" sz="1800" dirty="0">
-                <a:solidFill>
-                  <a:srgbClr val="000000"/>
-                </a:solidFill>
-              </a:rPr>
-              <a:t>约定5 错误 int a[n]={INF} 只初始化 a[0]；正确写法 for 循环逐个赋 INF</a:t>
-            </a:r>
-            <a:endParaRPr lang="en-US" sz="1800" dirty="0"/>
-          </a:p>
-        </p:txBody>
-      </p:sp>
-      <p:sp>
-        <p:nvSpPr>
-          <p:cNvPr id="10" name="Text 8"/>
-          <p:cNvSpPr/>
-          <p:nvPr/>
-        </p:nvSpPr>
-        <p:spPr>
-          <a:xfrm>
-            <a:off x="896112" y="5093208"/>
-            <a:ext cx="10454335" cy="397764"/>
-          </a:xfrm>
-          <a:prstGeom prst="rect">
-            <a:avLst/>
-          </a:prstGeom>
-          <a:noFill/>
-          <a:ln/>
-        </p:spPr>
-        <p:txBody>
-          <a:bodyPr wrap="square" rtlCol="0" anchor="t"/>
-          <a:lstStyle/>
-          <a:p>
-            <a:pPr algn="l" indent="0" marL="0">
-              <a:lnSpc>
-                <a:spcPct val="115000"/>
-              </a:lnSpc>
-              <a:buNone/>
-            </a:pPr>
-            <a:r>
-              <a:rPr lang="en-US" sz="1800" b="1" dirty="0">
-                <a:solidFill>
-                  <a:srgbClr val="1F4E9C"/>
-                </a:solidFill>
-                <a:latin typeface="微软雅黑" pitchFamily="34" charset="0"/>
-                <a:ea typeface="微软雅黑" pitchFamily="34" charset="-122"/>
-                <a:cs typeface="微软雅黑" pitchFamily="34" charset="-120"/>
-              </a:rPr>
-              <a:t>•  </a:t>
-            </a:r>
-            <a:pPr algn="l" indent="0" marL="0">
-              <a:lnSpc>
-                <a:spcPct val="115000"/>
-              </a:lnSpc>
-              <a:buNone/>
-            </a:pPr>
-            <a:r>
-              <a:rPr lang="en-US" sz="1800" dirty="0">
-                <a:solidFill>
-                  <a:srgbClr val="000000"/>
-                </a:solidFill>
-              </a:rPr>
-              <a:t>约定6 引用 &amp;：让函数改得动调用处的变量</a:t>
-            </a:r>
-            <a:endParaRPr lang="en-US" sz="1800" dirty="0"/>
-          </a:p>
-        </p:txBody>
-      </p:sp>
-    </p:spTree>
-  </p:cSld>
-  <p:clrMapOvr>
-    <a:masterClrMapping/>
-  </p:clrMapOvr>
-</p:sld>
-</file>
-
-<file path=ppt/slides/slide17.xml><?xml version="1.0" encoding="utf-8"?>
-<p:sld xmlns:a="http://schemas.openxmlformats.org/drawingml/2006/main" xmlns:r="http://schemas.openxmlformats.org/officeDocument/2006/relationships" xmlns:p="http://schemas.openxmlformats.org/presentationml/2006/main">
-  <p:cSld name="Slide 17">
-    <p:bg>
-      <p:bgPr>
-        <a:blipFill dpi="0" rotWithShape="1">
-          <a:blip r:embed="rId1">
-            <a:lum/>
-          </a:blip>
-          <a:srcRect/>
-          <a:stretch>
-            <a:fillRect/>
-          </a:stretch>
-        </a:blipFill>
-        <a:effectLst/>
-      </p:bgPr>
-    </p:bg>
-    <p:spTree>
-      <p:nvGrpSpPr>
-        <p:cNvPr id="1" name=""/>
-        <p:cNvGrpSpPr/>
-        <p:nvPr/>
-      </p:nvGrpSpPr>
-      <p:grpSpPr>
-        <a:xfrm>
-          <a:off x="0" y="0"/>
-          <a:ext cx="0" cy="0"/>
-          <a:chOff x="0" y="0"/>
-          <a:chExt cx="0" cy="0"/>
-        </a:xfrm>
-      </p:grpSpPr>
-      <p:sp>
-        <p:nvSpPr>
-          <p:cNvPr id="2" name="Text 0"/>
-          <p:cNvSpPr/>
-          <p:nvPr/>
-        </p:nvSpPr>
-        <p:spPr>
-          <a:xfrm>
-            <a:off x="10362895" y="6016752"/>
-            <a:ext cx="1463040" cy="320040"/>
-          </a:xfrm>
-          <a:prstGeom prst="rect">
-            <a:avLst/>
-          </a:prstGeom>
-          <a:noFill/>
-          <a:ln/>
-        </p:spPr>
-        <p:txBody>
-          <a:bodyPr wrap="square" rtlCol="0" anchor="ctr"/>
-          <a:lstStyle/>
-          <a:p>
-            <a:pPr algn="r" indent="0" marL="0">
-              <a:buNone/>
-            </a:pPr>
-            <a:r>
-              <a:rPr lang="en-US" sz="1000" dirty="0">
-                <a:solidFill>
-                  <a:srgbClr val="8A9099"/>
-                </a:solidFill>
-                <a:latin typeface="微软雅黑" pitchFamily="34" charset="0"/>
-                <a:ea typeface="微软雅黑" pitchFamily="34" charset="-122"/>
-                <a:cs typeface="微软雅黑" pitchFamily="34" charset="-120"/>
-              </a:rPr>
-              <a:t>17 / 17</a:t>
-            </a:r>
-            <a:endParaRPr lang="en-US" sz="1000" dirty="0"/>
-          </a:p>
-        </p:txBody>
-      </p:sp>
-      <p:sp>
-        <p:nvSpPr>
-          <p:cNvPr id="3" name="Text 1"/>
-          <p:cNvSpPr/>
-          <p:nvPr/>
-        </p:nvSpPr>
-        <p:spPr>
-          <a:xfrm>
-            <a:off x="822960" y="960120"/>
-            <a:ext cx="10545775" cy="365760"/>
-          </a:xfrm>
-          <a:prstGeom prst="rect">
-            <a:avLst/>
-          </a:prstGeom>
-          <a:noFill/>
-          <a:ln/>
-        </p:spPr>
-        <p:txBody>
-          <a:bodyPr wrap="square" rtlCol="0" anchor="ctr"/>
-          <a:lstStyle/>
-          <a:p>
-            <a:pPr algn="l" indent="0" marL="0">
-              <a:buNone/>
-            </a:pPr>
-            <a:r>
-              <a:rPr lang="en-US" sz="1400" b="1" dirty="0">
-                <a:solidFill>
-                  <a:srgbClr val="1F4E9C"/>
-                </a:solidFill>
-                <a:latin typeface="微软雅黑" pitchFamily="34" charset="0"/>
-                <a:ea typeface="微软雅黑" pitchFamily="34" charset="-122"/>
-                <a:cs typeface="微软雅黑" pitchFamily="34" charset="-120"/>
-              </a:rPr>
-              <a:t>参考答案 · 模仿题</a:t>
-            </a:r>
-            <a:endParaRPr lang="en-US" sz="1400" dirty="0"/>
-          </a:p>
-        </p:txBody>
-      </p:sp>
-      <p:sp>
-        <p:nvSpPr>
-          <p:cNvPr id="4" name="Text 2"/>
-          <p:cNvSpPr/>
-          <p:nvPr/>
-        </p:nvSpPr>
-        <p:spPr>
-          <a:xfrm>
-            <a:off x="822960" y="1344168"/>
-            <a:ext cx="10545775" cy="731520"/>
-          </a:xfrm>
-          <a:prstGeom prst="rect">
-            <a:avLst/>
-          </a:prstGeom>
-          <a:noFill/>
-          <a:ln/>
-        </p:spPr>
-        <p:txBody>
-          <a:bodyPr wrap="square" rtlCol="0" anchor="ctr"/>
-          <a:lstStyle/>
-          <a:p>
-            <a:pPr algn="l" indent="0" marL="0">
-              <a:buNone/>
-            </a:pPr>
-            <a:r>
-              <a:rPr lang="en-US" sz="2800" b="1" dirty="0">
-                <a:solidFill>
-                  <a:srgbClr val="1F2329"/>
-                </a:solidFill>
-                <a:latin typeface="微软雅黑" pitchFamily="34" charset="0"/>
-                <a:ea typeface="微软雅黑" pitchFamily="34" charset="-122"/>
-                <a:cs typeface="微软雅黑" pitchFamily="34" charset="-120"/>
-              </a:rPr>
-              <a:t>模仿题参考答案（自行对照）</a:t>
-            </a:r>
-            <a:endParaRPr lang="en-US" sz="2800" dirty="0"/>
-          </a:p>
-        </p:txBody>
-      </p:sp>
-      <p:sp>
-        <p:nvSpPr>
-          <p:cNvPr id="5" name="Text 3"/>
-          <p:cNvSpPr/>
-          <p:nvPr/>
-        </p:nvSpPr>
-        <p:spPr>
-          <a:xfrm>
-            <a:off x="896112" y="2395728"/>
-            <a:ext cx="10454335" cy="740664"/>
-          </a:xfrm>
-          <a:prstGeom prst="rect">
-            <a:avLst/>
-          </a:prstGeom>
-          <a:noFill/>
-          <a:ln/>
-        </p:spPr>
-        <p:txBody>
-          <a:bodyPr wrap="square" rtlCol="0" anchor="t"/>
-          <a:lstStyle/>
-          <a:p>
-            <a:pPr algn="l" indent="0" marL="0">
-              <a:lnSpc>
-                <a:spcPct val="115000"/>
-              </a:lnSpc>
-              <a:buNone/>
-            </a:pPr>
-            <a:r>
-              <a:rPr lang="en-US" sz="1800" b="1" dirty="0">
-                <a:solidFill>
-                  <a:srgbClr val="1F4E9C"/>
-                </a:solidFill>
-                <a:latin typeface="微软雅黑" pitchFamily="34" charset="0"/>
-                <a:ea typeface="微软雅黑" pitchFamily="34" charset="-122"/>
-                <a:cs typeface="微软雅黑" pitchFamily="34" charset="-120"/>
-              </a:rPr>
-              <a:t>•  </a:t>
-            </a:r>
-            <a:pPr algn="l" indent="0" marL="0">
-              <a:lnSpc>
-                <a:spcPct val="115000"/>
-              </a:lnSpc>
-              <a:buNone/>
-            </a:pPr>
-            <a:r>
-              <a:rPr lang="en-US" sz="1800" dirty="0">
-                <a:solidFill>
-                  <a:srgbClr val="000000"/>
-                </a:solidFill>
-              </a:rPr>
-              <a:t>(1) 嵌套循环，内层 j 从 i 到 n-1 共 n-i 次；总和 n+(n-1)+…+1 = n(n+1)/2，即 </a:t>
-            </a:r>
-            <a:pPr algn="l" indent="0" marL="0">
-              <a:lnSpc>
-                <a:spcPct val="115000"/>
-              </a:lnSpc>
-              <a:buNone/>
-            </a:pPr>
-            <a:r>
-              <a:rPr lang="en-US" sz="1800" b="1" dirty="0">
-                <a:solidFill>
-                  <a:srgbClr val="000000"/>
-                </a:solidFill>
-              </a:rPr>
-              <a:t>O(n²)</a:t>
-            </a:r>
-            <a:endParaRPr lang="en-US" sz="1800" dirty="0"/>
-          </a:p>
-        </p:txBody>
-      </p:sp>
-      <p:sp>
-        <p:nvSpPr>
-          <p:cNvPr id="6" name="Text 4"/>
-          <p:cNvSpPr/>
-          <p:nvPr/>
-        </p:nvSpPr>
-        <p:spPr>
-          <a:xfrm>
-            <a:off x="896112" y="3209544"/>
-            <a:ext cx="10454335" cy="740664"/>
-          </a:xfrm>
-          <a:prstGeom prst="rect">
-            <a:avLst/>
-          </a:prstGeom>
-          <a:noFill/>
-          <a:ln/>
-        </p:spPr>
-        <p:txBody>
-          <a:bodyPr wrap="square" rtlCol="0" anchor="t"/>
-          <a:lstStyle/>
-          <a:p>
-            <a:pPr algn="l" indent="0" marL="0">
-              <a:lnSpc>
-                <a:spcPct val="115000"/>
-              </a:lnSpc>
-              <a:buNone/>
-            </a:pPr>
-            <a:r>
-              <a:rPr lang="en-US" sz="1800" b="1" dirty="0">
-                <a:solidFill>
-                  <a:srgbClr val="1F4E9C"/>
-                </a:solidFill>
-                <a:latin typeface="微软雅黑" pitchFamily="34" charset="0"/>
-                <a:ea typeface="微软雅黑" pitchFamily="34" charset="-122"/>
-                <a:cs typeface="微软雅黑" pitchFamily="34" charset="-120"/>
-              </a:rPr>
-              <a:t>•  </a:t>
-            </a:r>
-            <a:pPr algn="l" indent="0" marL="0">
-              <a:lnSpc>
-                <a:spcPct val="115000"/>
-              </a:lnSpc>
-              <a:buNone/>
-            </a:pPr>
-            <a:r>
-              <a:rPr lang="en-US" sz="1800" dirty="0">
-                <a:solidFill>
-                  <a:srgbClr val="000000"/>
-                </a:solidFill>
-              </a:rPr>
-              <a:t>(2) x 从1每次翻倍，到 x≥n 停，循环次数是 logn 级，即 </a:t>
-            </a:r>
-            <a:pPr algn="l" indent="0" marL="0">
-              <a:lnSpc>
-                <a:spcPct val="115000"/>
-              </a:lnSpc>
-              <a:buNone/>
-            </a:pPr>
-            <a:r>
-              <a:rPr lang="en-US" sz="1800" b="1" dirty="0">
-                <a:solidFill>
-                  <a:srgbClr val="000000"/>
-                </a:solidFill>
-              </a:rPr>
-              <a:t>O(logn)</a:t>
-            </a:r>
-            <a:endParaRPr lang="en-US" sz="1800" dirty="0"/>
-          </a:p>
-        </p:txBody>
-      </p:sp>
-      <p:sp>
-        <p:nvSpPr>
-          <p:cNvPr id="7" name="Text 5"/>
-          <p:cNvSpPr/>
-          <p:nvPr/>
-        </p:nvSpPr>
-        <p:spPr>
-          <a:xfrm>
-            <a:off x="896112" y="4023360"/>
-            <a:ext cx="10454335" cy="740664"/>
-          </a:xfrm>
-          <a:prstGeom prst="rect">
-            <a:avLst/>
-          </a:prstGeom>
-          <a:noFill/>
-          <a:ln/>
-        </p:spPr>
-        <p:txBody>
-          <a:bodyPr wrap="square" rtlCol="0" anchor="t"/>
-          <a:lstStyle/>
-          <a:p>
-            <a:pPr algn="l" indent="0" marL="0">
-              <a:lnSpc>
-                <a:spcPct val="115000"/>
-              </a:lnSpc>
-              <a:buNone/>
-            </a:pPr>
-            <a:r>
-              <a:rPr lang="en-US" sz="1800" b="1" dirty="0">
-                <a:solidFill>
-                  <a:srgbClr val="1F4E9C"/>
-                </a:solidFill>
-                <a:latin typeface="微软雅黑" pitchFamily="34" charset="0"/>
-                <a:ea typeface="微软雅黑" pitchFamily="34" charset="-122"/>
-                <a:cs typeface="微软雅黑" pitchFamily="34" charset="-120"/>
-              </a:rPr>
-              <a:t>•  </a:t>
-            </a:r>
-            <a:pPr algn="l" indent="0" marL="0">
-              <a:lnSpc>
-                <a:spcPct val="115000"/>
-              </a:lnSpc>
-              <a:buNone/>
-            </a:pPr>
-            <a:r>
-              <a:rPr lang="en-US" sz="1800" dirty="0">
-                <a:solidFill>
-                  <a:srgbClr val="000000"/>
-                </a:solidFill>
-              </a:rPr>
-              <a:t>(3) T(n)=3T(n/3)+O(1)；每层问题数乘3、规模除以3，共 logn 层，末层 n 个，即 </a:t>
-            </a:r>
-            <a:pPr algn="l" indent="0" marL="0">
-              <a:lnSpc>
-                <a:spcPct val="115000"/>
-              </a:lnSpc>
-              <a:buNone/>
-            </a:pPr>
-            <a:r>
-              <a:rPr lang="en-US" sz="1800" b="1" dirty="0">
-                <a:solidFill>
-                  <a:srgbClr val="000000"/>
-                </a:solidFill>
-              </a:rPr>
-              <a:t>O(n)</a:t>
-            </a:r>
-            <a:endParaRPr lang="en-US" sz="1800" dirty="0"/>
-          </a:p>
-        </p:txBody>
-      </p:sp>
-      <p:sp>
-        <p:nvSpPr>
-          <p:cNvPr id="8" name="Text 6"/>
-          <p:cNvSpPr/>
-          <p:nvPr/>
-        </p:nvSpPr>
-        <p:spPr>
-          <a:xfrm>
-            <a:off x="822960" y="4928616"/>
-            <a:ext cx="10545775" cy="358902"/>
-          </a:xfrm>
-          <a:prstGeom prst="rect">
-            <a:avLst/>
-          </a:prstGeom>
-          <a:noFill/>
-          <a:ln/>
-        </p:spPr>
-        <p:txBody>
-          <a:bodyPr wrap="square" rtlCol="0" anchor="t"/>
-          <a:lstStyle/>
-          <a:p>
-            <a:pPr algn="l" indent="0" marL="0">
-              <a:buNone/>
-            </a:pPr>
-            <a:r>
-              <a:rPr lang="en-US" sz="1500" dirty="0">
-                <a:solidFill>
-                  <a:srgbClr val="8A9099"/>
-                </a:solidFill>
-                <a:latin typeface="微软雅黑" pitchFamily="34" charset="0"/>
-                <a:ea typeface="微软雅黑" pitchFamily="34" charset="-122"/>
-                <a:cs typeface="微软雅黑" pitchFamily="34" charset="-120"/>
-              </a:rPr>
-              <a:t>三段分别练嵌套循环求和、循环变量翻倍、递归式展开；理由都要写，只给结论会扣分</a:t>
+              <a:t>三段分别练嵌套求和、翻倍取对数、递归树累加；理由都要写，只给结论会扣分</a:t>
             </a:r>
             <a:endParaRPr lang="en-US" sz="1500" dirty="0"/>
           </a:p>
@@ -5863,7 +5366,7 @@
                 <a:ea typeface="微软雅黑" pitchFamily="34" charset="-122"/>
                 <a:cs typeface="微软雅黑" pitchFamily="34" charset="-120"/>
               </a:rPr>
-              <a:t>2 / 17</a:t>
+              <a:t>2 / 16</a:t>
             </a:r>
             <a:endParaRPr lang="en-US" sz="1000" dirty="0"/>
           </a:p>
@@ -5902,7 +5405,7 @@
                 <a:ea typeface="微软雅黑" pitchFamily="34" charset="-122"/>
                 <a:cs typeface="微软雅黑" pitchFamily="34" charset="-120"/>
               </a:rPr>
-              <a:t>课段导学 · 本课段的定位</a:t>
+              <a:t>课段导学 · 本课段管什么</a:t>
             </a:r>
             <a:endParaRPr lang="en-US" sz="1400" dirty="0"/>
           </a:p>
@@ -5941,7 +5444,7 @@
                 <a:ea typeface="微软雅黑" pitchFamily="34" charset="-122"/>
                 <a:cs typeface="微软雅黑" pitchFamily="34" charset="-120"/>
               </a:rPr>
-              <a:t>802 代码题的知识地基</a:t>
+              <a:t>802 里哪些题要写代码</a:t>
             </a:r>
             <a:endParaRPr lang="en-US" sz="2800" dirty="0"/>
           </a:p>
@@ -5984,7 +5487,7 @@
                         <a:buNone/>
                       </a:pPr>
                       <a:r>
-                        <a:rPr lang="en-US" sz="1400" b="1" dirty="0">
+                        <a:rPr lang="en-US" sz="1500" b="1" dirty="0">
                           <a:solidFill>
                             <a:srgbClr val="1F4E9C"/>
                           </a:solidFill>
@@ -5994,7 +5497,7 @@
                         </a:rPr>
                         <a:t>题型</a:t>
                       </a:r>
-                      <a:endParaRPr lang="en-US" sz="1400" dirty="0">
+                      <a:endParaRPr lang="en-US" sz="1500" dirty="0">
                         <a:latin typeface="微软雅黑" charset="0"/>
                         <a:ea typeface="微软雅黑" charset="0"/>
                         <a:cs typeface="微软雅黑" charset="0"/>
@@ -6052,7 +5555,7 @@
                         <a:buNone/>
                       </a:pPr>
                       <a:r>
-                        <a:rPr lang="en-US" sz="1400" b="1" dirty="0">
+                        <a:rPr lang="en-US" sz="1500" b="1" dirty="0">
                           <a:solidFill>
                             <a:srgbClr val="1F4E9C"/>
                           </a:solidFill>
@@ -6062,7 +5565,7 @@
                         </a:rPr>
                         <a:t>分值</a:t>
                       </a:r>
-                      <a:endParaRPr lang="en-US" sz="1400" dirty="0">
+                      <a:endParaRPr lang="en-US" sz="1500" dirty="0">
                         <a:latin typeface="微软雅黑" charset="0"/>
                         <a:ea typeface="微软雅黑" charset="0"/>
                         <a:cs typeface="微软雅黑" charset="0"/>
@@ -6120,7 +5623,7 @@
                         <a:buNone/>
                       </a:pPr>
                       <a:r>
-                        <a:rPr lang="en-US" sz="1400" b="1" dirty="0">
+                        <a:rPr lang="en-US" sz="1500" b="1" dirty="0">
                           <a:solidFill>
                             <a:srgbClr val="1F4E9C"/>
                           </a:solidFill>
@@ -6128,9 +5631,9 @@
                           <a:ea typeface="微软雅黑" pitchFamily="34" charset="-122"/>
                           <a:cs typeface="微软雅黑" pitchFamily="34" charset="-120"/>
                         </a:rPr>
-                        <a:t>与本阶段的关系</a:t>
+                        <a:t>要你做什么</a:t>
                       </a:r>
-                      <a:endParaRPr lang="en-US" sz="1400" dirty="0">
+                      <a:endParaRPr lang="en-US" sz="1500" dirty="0">
                         <a:latin typeface="微软雅黑" charset="0"/>
                         <a:ea typeface="微软雅黑" charset="0"/>
                         <a:cs typeface="微软雅黑" charset="0"/>
@@ -6190,7 +5693,7 @@
                         <a:buNone/>
                       </a:pPr>
                       <a:r>
-                        <a:rPr lang="en-US" sz="1400" dirty="0">
+                        <a:rPr lang="en-US" sz="1500" dirty="0">
                           <a:solidFill>
                             <a:srgbClr val="1F2329"/>
                           </a:solidFill>
@@ -6200,7 +5703,7 @@
                         </a:rPr>
                         <a:t>算法分析题</a:t>
                       </a:r>
-                      <a:endParaRPr lang="en-US" sz="1400" dirty="0">
+                      <a:endParaRPr lang="en-US" sz="1500" dirty="0">
                         <a:latin typeface="微软雅黑" charset="0"/>
                         <a:ea typeface="微软雅黑" charset="0"/>
                         <a:cs typeface="微软雅黑" charset="0"/>
@@ -6258,7 +5761,7 @@
                         <a:buNone/>
                       </a:pPr>
                       <a:r>
-                        <a:rPr lang="en-US" sz="1400" dirty="0">
+                        <a:rPr lang="en-US" sz="1500" dirty="0">
                           <a:solidFill>
                             <a:srgbClr val="1F2329"/>
                           </a:solidFill>
@@ -6268,7 +5771,7 @@
                         </a:rPr>
                         <a:t>3题 30分</a:t>
                       </a:r>
-                      <a:endParaRPr lang="en-US" sz="1400" dirty="0">
+                      <a:endParaRPr lang="en-US" sz="1500" dirty="0">
                         <a:latin typeface="微软雅黑" charset="0"/>
                         <a:ea typeface="微软雅黑" charset="0"/>
                         <a:cs typeface="微软雅黑" charset="0"/>
@@ -6326,7 +5829,7 @@
                         <a:buNone/>
                       </a:pPr>
                       <a:r>
-                        <a:rPr lang="en-US" sz="1400" dirty="0">
+                        <a:rPr lang="en-US" sz="1500" dirty="0">
                           <a:solidFill>
                             <a:srgbClr val="1F2329"/>
                           </a:solidFill>
@@ -6334,9 +5837,9 @@
                           <a:ea typeface="微软雅黑" pitchFamily="34" charset="-122"/>
                           <a:cs typeface="微软雅黑" pitchFamily="34" charset="-120"/>
                         </a:rPr>
-                        <a:t>写得出结构定义、基本操作与算法</a:t>
+                        <a:t>写算法思想、写代码、给复杂度</a:t>
                       </a:r>
-                      <a:endParaRPr lang="en-US" sz="1400" dirty="0">
+                      <a:endParaRPr lang="en-US" sz="1500" dirty="0">
                         <a:latin typeface="微软雅黑" charset="0"/>
                         <a:ea typeface="微软雅黑" charset="0"/>
                         <a:cs typeface="微软雅黑" charset="0"/>
@@ -6396,7 +5899,7 @@
                         <a:buNone/>
                       </a:pPr>
                       <a:r>
-                        <a:rPr lang="en-US" sz="1400" dirty="0">
+                        <a:rPr lang="en-US" sz="1500" dirty="0">
                           <a:solidFill>
                             <a:srgbClr val="1F2329"/>
                           </a:solidFill>
@@ -6406,7 +5909,7 @@
                         </a:rPr>
                         <a:t>程序阅读题</a:t>
                       </a:r>
-                      <a:endParaRPr lang="en-US" sz="1400" dirty="0">
+                      <a:endParaRPr lang="en-US" sz="1500" dirty="0">
                         <a:latin typeface="微软雅黑" charset="0"/>
                         <a:ea typeface="微软雅黑" charset="0"/>
                         <a:cs typeface="微软雅黑" charset="0"/>
@@ -6464,7 +5967,7 @@
                         <a:buNone/>
                       </a:pPr>
                       <a:r>
-                        <a:rPr lang="en-US" sz="1400" dirty="0">
+                        <a:rPr lang="en-US" sz="1500" dirty="0">
                           <a:solidFill>
                             <a:srgbClr val="1F2329"/>
                           </a:solidFill>
@@ -6474,7 +5977,7 @@
                         </a:rPr>
                         <a:t>约20分</a:t>
                       </a:r>
-                      <a:endParaRPr lang="en-US" sz="1400" dirty="0">
+                      <a:endParaRPr lang="en-US" sz="1500" dirty="0">
                         <a:latin typeface="微软雅黑" charset="0"/>
                         <a:ea typeface="微软雅黑" charset="0"/>
                         <a:cs typeface="微软雅黑" charset="0"/>
@@ -6532,7 +6035,7 @@
                         <a:buNone/>
                       </a:pPr>
                       <a:r>
-                        <a:rPr lang="en-US" sz="1400" dirty="0">
+                        <a:rPr lang="en-US" sz="1500" dirty="0">
                           <a:solidFill>
                             <a:srgbClr val="1F2329"/>
                           </a:solidFill>
@@ -6540,9 +6043,9 @@
                           <a:ea typeface="微软雅黑" pitchFamily="34" charset="-122"/>
                           <a:cs typeface="微软雅黑" pitchFamily="34" charset="-120"/>
                         </a:rPr>
-                        <a:t>看得懂代码，会挖空补全与片段排序</a:t>
+                        <a:t>看懂代码，挖空补全或给片段排序</a:t>
                       </a:r>
-                      <a:endParaRPr lang="en-US" sz="1400" dirty="0">
+                      <a:endParaRPr lang="en-US" sz="1500" dirty="0">
                         <a:latin typeface="微软雅黑" charset="0"/>
                         <a:ea typeface="微软雅黑" charset="0"/>
                         <a:cs typeface="微软雅黑" charset="0"/>
@@ -6602,7 +6105,7 @@
                         <a:buNone/>
                       </a:pPr>
                       <a:r>
-                        <a:rPr lang="en-US" sz="1400" dirty="0">
+                        <a:rPr lang="en-US" sz="1500" dirty="0">
                           <a:solidFill>
                             <a:srgbClr val="1F2329"/>
                           </a:solidFill>
@@ -6612,7 +6115,7 @@
                         </a:rPr>
                         <a:t>填空题</a:t>
                       </a:r>
-                      <a:endParaRPr lang="en-US" sz="1400" dirty="0">
+                      <a:endParaRPr lang="en-US" sz="1500" dirty="0">
                         <a:latin typeface="微软雅黑" charset="0"/>
                         <a:ea typeface="微软雅黑" charset="0"/>
                         <a:cs typeface="微软雅黑" charset="0"/>
@@ -6670,7 +6173,7 @@
                         <a:buNone/>
                       </a:pPr>
                       <a:r>
-                        <a:rPr lang="en-US" sz="1400" dirty="0">
+                        <a:rPr lang="en-US" sz="1500" dirty="0">
                           <a:solidFill>
                             <a:srgbClr val="1F2329"/>
                           </a:solidFill>
@@ -6680,7 +6183,7 @@
                         </a:rPr>
                         <a:t>约30分</a:t>
                       </a:r>
-                      <a:endParaRPr lang="en-US" sz="1400" dirty="0">
+                      <a:endParaRPr lang="en-US" sz="1500" dirty="0">
                         <a:latin typeface="微软雅黑" charset="0"/>
                         <a:ea typeface="微软雅黑" charset="0"/>
                         <a:cs typeface="微软雅黑" charset="0"/>
@@ -6738,7 +6241,7 @@
                         <a:buNone/>
                       </a:pPr>
                       <a:r>
-                        <a:rPr lang="en-US" sz="1400" dirty="0">
+                        <a:rPr lang="en-US" sz="1500" dirty="0">
                           <a:solidFill>
                             <a:srgbClr val="1F2329"/>
                           </a:solidFill>
@@ -6746,9 +6249,9 @@
                           <a:ea typeface="微软雅黑" pitchFamily="34" charset="-122"/>
                           <a:cs typeface="微软雅黑" pitchFamily="34" charset="-120"/>
                         </a:rPr>
-                        <a:t>部分空要跟着代码过程手算</a:t>
+                        <a:t>一部分空要照着代码的执行过程手算</a:t>
                       </a:r>
-                      <a:endParaRPr lang="en-US" sz="1400" dirty="0">
+                      <a:endParaRPr lang="en-US" sz="1500" dirty="0">
                         <a:latin typeface="微软雅黑" charset="0"/>
                         <a:ea typeface="微软雅黑" charset="0"/>
                         <a:cs typeface="微软雅黑" charset="0"/>
@@ -6808,7 +6311,7 @@
                         <a:buNone/>
                       </a:pPr>
                       <a:r>
-                        <a:rPr lang="en-US" sz="1400" dirty="0">
+                        <a:rPr lang="en-US" sz="1500" dirty="0">
                           <a:solidFill>
                             <a:srgbClr val="1F2329"/>
                           </a:solidFill>
@@ -6818,7 +6321,7 @@
                         </a:rPr>
                         <a:t>综合应用题</a:t>
                       </a:r>
-                      <a:endParaRPr lang="en-US" sz="1400" dirty="0">
+                      <a:endParaRPr lang="en-US" sz="1500" dirty="0">
                         <a:latin typeface="微软雅黑" charset="0"/>
                         <a:ea typeface="微软雅黑" charset="0"/>
                         <a:cs typeface="微软雅黑" charset="0"/>
@@ -6876,7 +6379,7 @@
                         <a:buNone/>
                       </a:pPr>
                       <a:r>
-                        <a:rPr lang="en-US" sz="1400" dirty="0">
+                        <a:rPr lang="en-US" sz="1500" dirty="0">
                           <a:solidFill>
                             <a:srgbClr val="1F2329"/>
                           </a:solidFill>
@@ -6886,7 +6389,7 @@
                         </a:rPr>
                         <a:t>约70分</a:t>
                       </a:r>
-                      <a:endParaRPr lang="en-US" sz="1400" dirty="0">
+                      <a:endParaRPr lang="en-US" sz="1500" dirty="0">
                         <a:latin typeface="微软雅黑" charset="0"/>
                         <a:ea typeface="微软雅黑" charset="0"/>
                         <a:cs typeface="微软雅黑" charset="0"/>
@@ -6944,7 +6447,7 @@
                         <a:buNone/>
                       </a:pPr>
                       <a:r>
-                        <a:rPr lang="en-US" sz="1400" dirty="0">
+                        <a:rPr lang="en-US" sz="1500" dirty="0">
                           <a:solidFill>
                             <a:srgbClr val="1F2329"/>
                           </a:solidFill>
@@ -6952,9 +6455,9 @@
                           <a:ea typeface="微软雅黑" pitchFamily="34" charset="-122"/>
                           <a:cs typeface="微软雅黑" pitchFamily="34" charset="-120"/>
                         </a:rPr>
-                        <a:t>理解算法过程依赖代码思维</a:t>
+                        <a:t>手算大题，但读懂算法过程要靠代码</a:t>
                       </a:r>
-                      <a:endParaRPr lang="en-US" sz="1400" dirty="0">
+                      <a:endParaRPr lang="en-US" sz="1500" dirty="0">
                         <a:latin typeface="微软雅黑" charset="0"/>
                         <a:ea typeface="微软雅黑" charset="0"/>
                         <a:cs typeface="微软雅黑" charset="0"/>
@@ -7017,7 +6520,7 @@
         <p:spPr>
           <a:xfrm>
             <a:off x="822960" y="4727448"/>
-            <a:ext cx="10545775" cy="397002"/>
+            <a:ext cx="10545775" cy="416052"/>
           </a:xfrm>
           <a:prstGeom prst="rect">
             <a:avLst/>
@@ -7038,7 +6541,7 @@
                   <a:srgbClr val="000000"/>
                 </a:solidFill>
               </a:rPr>
-              <a:t>本阶段目标（9节 · 约6小时）：学完能在白纸上默写九个结构单元的全部类型定义与基本操作</a:t>
+              <a:t>这个阶段九节课、约六小时，学完你要能在白纸上默写出九个结构的类型定义和基本操作</a:t>
             </a:r>
             <a:endParaRPr lang="en-US" dirty="0"/>
           </a:p>
@@ -7052,8 +6555,8 @@
         </p:nvSpPr>
         <p:spPr>
           <a:xfrm>
-            <a:off x="822960" y="5252466"/>
-            <a:ext cx="10545775" cy="339852"/>
+            <a:off x="822960" y="5271516"/>
+            <a:ext cx="10545775" cy="358902"/>
           </a:xfrm>
           <a:prstGeom prst="rect">
             <a:avLst/>
@@ -7069,7 +6572,7 @@
               <a:buNone/>
             </a:pPr>
             <a:r>
-              <a:rPr lang="en-US" sz="1400" dirty="0">
+              <a:rPr lang="en-US" sz="1500" dirty="0">
                 <a:solidFill>
                   <a:srgbClr val="8A9099"/>
                 </a:solidFill>
@@ -7077,9 +6580,9 @@
                 <a:ea typeface="微软雅黑" pitchFamily="34" charset="-122"/>
                 <a:cs typeface="微软雅黑" pitchFamily="34" charset="-120"/>
               </a:rPr>
-              <a:t>基础阶段只讲定义与基本操作；每个结构的经典算法放到强化阶段展开</a:t>
-            </a:r>
-            <a:endParaRPr lang="en-US" sz="1400" dirty="0"/>
+              <a:t>基础阶段只管定义和基本操作；每个结构的经典算法放到强化阶段</a:t>
+            </a:r>
+            <a:endParaRPr lang="en-US" sz="1500" dirty="0"/>
           </a:p>
         </p:txBody>
       </p:sp>
@@ -7155,7 +6658,7 @@
                 <a:ea typeface="微软雅黑" pitchFamily="34" charset="-122"/>
                 <a:cs typeface="微软雅黑" pitchFamily="34" charset="-120"/>
               </a:rPr>
-              <a:t>3 / 17</a:t>
+              <a:t>3 / 16</a:t>
             </a:r>
             <a:endParaRPr lang="en-US" sz="1000" dirty="0"/>
           </a:p>
@@ -7233,7 +6736,7 @@
                 <a:ea typeface="微软雅黑" pitchFamily="34" charset="-122"/>
                 <a:cs typeface="微软雅黑" pitchFamily="34" charset="-120"/>
               </a:rPr>
-              <a:t>数据结构基础阶段目录</a:t>
+              <a:t>九节课怎么排</a:t>
             </a:r>
             <a:endParaRPr lang="en-US" sz="2800" dirty="0"/>
           </a:p>
@@ -7558,7 +7061,7 @@
                           <a:ea typeface="微软雅黑" pitchFamily="34" charset="-122"/>
                           <a:cs typeface="微软雅黑" pitchFamily="34" charset="-120"/>
                         </a:rPr>
-                        <a:t>六条伪代码约定 ＋ 复杂度分析</a:t>
+                        <a:t>答题格式 ＋ 复杂度分析</a:t>
                       </a:r>
                       <a:endParaRPr lang="en-US" sz="1400" dirty="0">
                         <a:latin typeface="微软雅黑" charset="0"/>
@@ -8176,7 +7679,7 @@
                           <a:ea typeface="微软雅黑" pitchFamily="34" charset="-122"/>
                           <a:cs typeface="微软雅黑" pitchFamily="34" charset="-120"/>
                         </a:rPr>
-                        <a:t>串、数组与广义表</a:t>
+                        <a:t>串、数组与广义表：以手算为主，代码只有串的匹配一小段</a:t>
                       </a:r>
                       <a:endParaRPr lang="en-US" sz="1400" dirty="0">
                         <a:latin typeface="微软雅黑" charset="0"/>
@@ -8745,7 +8248,7 @@
                 <a:ea typeface="微软雅黑" pitchFamily="34" charset="-122"/>
                 <a:cs typeface="微软雅黑" pitchFamily="34" charset="-120"/>
               </a:rPr>
-              <a:t>每节立一个默写单元；学完本阶段进入数据结构强化阶段，讲经典算法</a:t>
+              <a:t>每节课只讲一个结构，讲到你能合上资料默写出来；链表、树、图占的课时最多，因为真题里它们考得最重</a:t>
             </a:r>
             <a:endParaRPr lang="en-US" sz="1400" dirty="0"/>
           </a:p>
@@ -8823,7 +8326,7 @@
                 <a:ea typeface="微软雅黑" pitchFamily="34" charset="-122"/>
                 <a:cs typeface="微软雅黑" pitchFamily="34" charset="-120"/>
               </a:rPr>
-              <a:t>4 / 17</a:t>
+              <a:t>4 / 16</a:t>
             </a:r>
             <a:endParaRPr lang="en-US" sz="1000" dirty="0"/>
           </a:p>
@@ -8901,7 +8404,7 @@
                 <a:ea typeface="微软雅黑" pitchFamily="34" charset="-122"/>
                 <a:cs typeface="微软雅黑" pitchFamily="34" charset="-120"/>
               </a:rPr>
-              <a:t>按自己的情况选择</a:t>
+              <a:t>这个课段适合谁</a:t>
             </a:r>
             <a:endParaRPr lang="en-US" sz="2800" dirty="0"/>
           </a:p>
@@ -9089,7 +8592,7 @@
                           <a:ea typeface="微软雅黑" pitchFamily="34" charset="-122"/>
                           <a:cs typeface="微软雅黑" pitchFamily="34" charset="-120"/>
                         </a:rPr>
-                        <a:t>没学过数据结构，或跨考过来</a:t>
+                        <a:t>没学过数据结构，或者是跨考的</a:t>
                       </a:r>
                       <a:endParaRPr lang="en-US" sz="1500" dirty="0">
                         <a:latin typeface="微软雅黑" charset="0"/>
@@ -9157,7 +8660,7 @@
                           <a:ea typeface="微软雅黑" pitchFamily="34" charset="-122"/>
                           <a:cs typeface="微软雅黑" pitchFamily="34" charset="-120"/>
                         </a:rPr>
-                        <a:t>从第1节开始完整学习</a:t>
+                        <a:t>从第1节开始，一节不落跟到底</a:t>
                       </a:r>
                       <a:endParaRPr lang="en-US" sz="1500" dirty="0">
                         <a:latin typeface="微软雅黑" charset="0"/>
@@ -9227,7 +8730,7 @@
                           <a:ea typeface="微软雅黑" pitchFamily="34" charset="-122"/>
                           <a:cs typeface="微软雅黑" pitchFamily="34" charset="-120"/>
                         </a:rPr>
-                        <a:t>学过数据结构，定义与基本操作已生疏</a:t>
+                        <a:t>学过，但定义和基本操作忘得差不多了</a:t>
                       </a:r>
                       <a:endParaRPr lang="en-US" sz="1500" dirty="0">
                         <a:latin typeface="微软雅黑" charset="0"/>
@@ -9295,7 +8798,7 @@
                           <a:ea typeface="微软雅黑" pitchFamily="34" charset="-122"/>
                           <a:cs typeface="微软雅黑" pitchFamily="34" charset="-120"/>
                         </a:rPr>
-                        <a:t>按目录选听生疏的节</a:t>
+                        <a:t>翻目录，挑生疏的节补</a:t>
                       </a:r>
                       <a:endParaRPr lang="en-US" sz="1500" dirty="0">
                         <a:latin typeface="微软雅黑" charset="0"/>
@@ -9365,7 +8868,7 @@
                           <a:ea typeface="微软雅黑" pitchFamily="34" charset="-122"/>
                           <a:cs typeface="微软雅黑" pitchFamily="34" charset="-120"/>
                         </a:rPr>
-                        <a:t>能默写各结构的定义与基本操作</a:t>
+                        <a:t>合上书能默写各结构的定义和操作</a:t>
                       </a:r>
                       <a:endParaRPr lang="en-US" sz="1500" dirty="0">
                         <a:latin typeface="微软雅黑" charset="0"/>
@@ -9433,7 +8936,7 @@
                           <a:ea typeface="微软雅黑" pitchFamily="34" charset="-122"/>
                           <a:cs typeface="微软雅黑" pitchFamily="34" charset="-120"/>
                         </a:rPr>
-                        <a:t>跳过本阶段，直接进入强化阶段</a:t>
+                        <a:t>跳过本阶段，直接进强化阶段</a:t>
                       </a:r>
                       <a:endParaRPr lang="en-US" sz="1500" dirty="0">
                         <a:latin typeface="微软雅黑" charset="0"/>
@@ -9498,7 +9001,7 @@
         <p:spPr>
           <a:xfrm>
             <a:off x="822960" y="4306824"/>
-            <a:ext cx="10545775" cy="358902"/>
+            <a:ext cx="10545775" cy="644652"/>
           </a:xfrm>
           <a:prstGeom prst="rect">
             <a:avLst/>
@@ -9522,7 +9025,7 @@
                 <a:ea typeface="微软雅黑" pitchFamily="34" charset="-122"/>
                 <a:cs typeface="微软雅黑" pitchFamily="34" charset="-120"/>
               </a:rPr>
-              <a:t>本阶段默认你已经会用指针、结构体、动态内存和引用传参；这些在C语言强化阶段讲过，没学的先补那段</a:t>
+              <a:t>这是代码课，不细讲理论，默认你已经有专业课基础；也默认你会用指针、结构体、动态内存和引用传参，这几样在C语言强化阶段讲过</a:t>
             </a:r>
             <a:endParaRPr lang="en-US" sz="1500" dirty="0"/>
           </a:p>
@@ -9600,7 +9103,7 @@
                 <a:ea typeface="微软雅黑" pitchFamily="34" charset="-122"/>
                 <a:cs typeface="微软雅黑" pitchFamily="34" charset="-120"/>
               </a:rPr>
-              <a:t>5 / 17</a:t>
+              <a:t>5 / 16</a:t>
             </a:r>
             <a:endParaRPr lang="en-US" sz="1000" dirty="0"/>
           </a:p>
@@ -9678,7 +9181,7 @@
                 <a:ea typeface="微软雅黑" pitchFamily="34" charset="-122"/>
                 <a:cs typeface="微软雅黑" pitchFamily="34" charset="-120"/>
               </a:rPr>
-              <a:t>四条学习要求与默写标准</a:t>
+              <a:t>这个阶段怎么学</a:t>
             </a:r>
             <a:endParaRPr lang="en-US" sz="2800" dirty="0"/>
           </a:p>
@@ -9729,13 +9232,38 @@
               <a:buNone/>
             </a:pPr>
             <a:r>
-              <a:rPr lang="en-US" sz="1800" b="1" dirty="0">
+              <a:rPr lang="en-US" sz="1800" dirty="0">
                 <a:solidFill>
                   <a:srgbClr val="000000"/>
                 </a:solidFill>
               </a:rPr>
-              <a:t>跟练</a:t>
-            </a:r>
+              <a:t>跟练：视频里写一行定义，你跟着写一行，别只用眼睛看</a:t>
+            </a:r>
+            <a:endParaRPr lang="en-US" sz="1800" dirty="0"/>
+          </a:p>
+        </p:txBody>
+      </p:sp>
+      <p:sp>
+        <p:nvSpPr>
+          <p:cNvPr id="6" name="Text 4"/>
+          <p:cNvSpPr/>
+          <p:nvPr/>
+        </p:nvSpPr>
+        <p:spPr>
+          <a:xfrm>
+            <a:off x="896112" y="2866644"/>
+            <a:ext cx="10454335" cy="397764"/>
+          </a:xfrm>
+          <a:prstGeom prst="rect">
+            <a:avLst/>
+          </a:prstGeom>
+          <a:noFill/>
+          <a:ln/>
+        </p:spPr>
+        <p:txBody>
+          <a:bodyPr wrap="square" rtlCol="0" anchor="t"/>
+          <a:lstStyle/>
+          <a:p>
             <a:pPr algn="l" indent="0" marL="0">
               <a:lnSpc>
                 <a:spcPct val="115000"/>
@@ -9743,38 +9271,16 @@
               <a:buNone/>
             </a:pPr>
             <a:r>
-              <a:rPr lang="en-US" sz="1800" dirty="0">
-                <a:solidFill>
-                  <a:srgbClr val="000000"/>
-                </a:solidFill>
-              </a:rPr>
-              <a:t>：视频里写一行定义，你就跟着写一行</a:t>
-            </a:r>
-            <a:endParaRPr lang="en-US" sz="1800" dirty="0"/>
-          </a:p>
-        </p:txBody>
-      </p:sp>
-      <p:sp>
-        <p:nvSpPr>
-          <p:cNvPr id="6" name="Text 4"/>
-          <p:cNvSpPr/>
-          <p:nvPr/>
-        </p:nvSpPr>
-        <p:spPr>
-          <a:xfrm>
-            <a:off x="896112" y="2866644"/>
-            <a:ext cx="10454335" cy="397764"/>
-          </a:xfrm>
-          <a:prstGeom prst="rect">
-            <a:avLst/>
-          </a:prstGeom>
-          <a:noFill/>
-          <a:ln/>
-        </p:spPr>
-        <p:txBody>
-          <a:bodyPr wrap="square" rtlCol="0" anchor="t"/>
-          <a:lstStyle/>
-          <a:p>
+              <a:rPr lang="en-US" sz="1800" b="1" dirty="0">
+                <a:solidFill>
+                  <a:srgbClr val="1F4E9C"/>
+                </a:solidFill>
+                <a:latin typeface="微软雅黑" pitchFamily="34" charset="0"/>
+                <a:ea typeface="微软雅黑" pitchFamily="34" charset="-122"/>
+                <a:cs typeface="微软雅黑" pitchFamily="34" charset="-120"/>
+              </a:rPr>
+              <a:t>•  </a:t>
+            </a:r>
             <a:pPr algn="l" indent="0" marL="0">
               <a:lnSpc>
                 <a:spcPct val="115000"/>
@@ -9782,6 +9288,45 @@
               <a:buNone/>
             </a:pPr>
             <a:r>
+              <a:rPr lang="en-US" sz="1800" dirty="0">
+                <a:solidFill>
+                  <a:srgbClr val="000000"/>
+                </a:solidFill>
+              </a:rPr>
+              <a:t>手撕：课后合上资料，凭记忆把这节的类型定义和基本操作写一遍</a:t>
+            </a:r>
+            <a:endParaRPr lang="en-US" sz="1800" dirty="0"/>
+          </a:p>
+        </p:txBody>
+      </p:sp>
+      <p:sp>
+        <p:nvSpPr>
+          <p:cNvPr id="7" name="Text 5"/>
+          <p:cNvSpPr/>
+          <p:nvPr/>
+        </p:nvSpPr>
+        <p:spPr>
+          <a:xfrm>
+            <a:off x="896112" y="3337560"/>
+            <a:ext cx="10454335" cy="397764"/>
+          </a:xfrm>
+          <a:prstGeom prst="rect">
+            <a:avLst/>
+          </a:prstGeom>
+          <a:noFill/>
+          <a:ln/>
+        </p:spPr>
+        <p:txBody>
+          <a:bodyPr wrap="square" rtlCol="0" anchor="t"/>
+          <a:lstStyle/>
+          <a:p>
+            <a:pPr algn="l" indent="0" marL="0">
+              <a:lnSpc>
+                <a:spcPct val="115000"/>
+              </a:lnSpc>
+              <a:buNone/>
+            </a:pPr>
+            <a:r>
               <a:rPr lang="en-US" sz="1800" b="1" dirty="0">
                 <a:solidFill>
                   <a:srgbClr val="1F4E9C"/>
@@ -9799,13 +9344,38 @@
               <a:buNone/>
             </a:pPr>
             <a:r>
-              <a:rPr lang="en-US" sz="1800" b="1" dirty="0">
+              <a:rPr lang="en-US" sz="1800" dirty="0">
                 <a:solidFill>
                   <a:srgbClr val="000000"/>
                 </a:solidFill>
               </a:rPr>
-              <a:t>手撕</a:t>
-            </a:r>
+              <a:t>默写：每节就是一个默写单元，考场上要能直接把模板写出来</a:t>
+            </a:r>
+            <a:endParaRPr lang="en-US" sz="1800" dirty="0"/>
+          </a:p>
+        </p:txBody>
+      </p:sp>
+      <p:sp>
+        <p:nvSpPr>
+          <p:cNvPr id="8" name="Text 6"/>
+          <p:cNvSpPr/>
+          <p:nvPr/>
+        </p:nvSpPr>
+        <p:spPr>
+          <a:xfrm>
+            <a:off x="896112" y="3808476"/>
+            <a:ext cx="10454335" cy="397764"/>
+          </a:xfrm>
+          <a:prstGeom prst="rect">
+            <a:avLst/>
+          </a:prstGeom>
+          <a:noFill/>
+          <a:ln/>
+        </p:spPr>
+        <p:txBody>
+          <a:bodyPr wrap="square" rtlCol="0" anchor="t"/>
+          <a:lstStyle/>
+          <a:p>
             <a:pPr algn="l" indent="0" marL="0">
               <a:lnSpc>
                 <a:spcPct val="115000"/>
@@ -9813,38 +9383,16 @@
               <a:buNone/>
             </a:pPr>
             <a:r>
-              <a:rPr lang="en-US" sz="1800" dirty="0">
-                <a:solidFill>
-                  <a:srgbClr val="000000"/>
-                </a:solidFill>
-              </a:rPr>
-              <a:t>：课后合上资料，凭记忆把类型定义与基本操作写出来</a:t>
-            </a:r>
-            <a:endParaRPr lang="en-US" sz="1800" dirty="0"/>
-          </a:p>
-        </p:txBody>
-      </p:sp>
-      <p:sp>
-        <p:nvSpPr>
-          <p:cNvPr id="7" name="Text 5"/>
-          <p:cNvSpPr/>
-          <p:nvPr/>
-        </p:nvSpPr>
-        <p:spPr>
-          <a:xfrm>
-            <a:off x="896112" y="3337560"/>
-            <a:ext cx="10454335" cy="397764"/>
-          </a:xfrm>
-          <a:prstGeom prst="rect">
-            <a:avLst/>
-          </a:prstGeom>
-          <a:noFill/>
-          <a:ln/>
-        </p:spPr>
-        <p:txBody>
-          <a:bodyPr wrap="square" rtlCol="0" anchor="t"/>
-          <a:lstStyle/>
-          <a:p>
+              <a:rPr lang="en-US" sz="1800" b="1" dirty="0">
+                <a:solidFill>
+                  <a:srgbClr val="1F4E9C"/>
+                </a:solidFill>
+                <a:latin typeface="微软雅黑" pitchFamily="34" charset="0"/>
+                <a:ea typeface="微软雅黑" pitchFamily="34" charset="-122"/>
+                <a:cs typeface="微软雅黑" pitchFamily="34" charset="-120"/>
+              </a:rPr>
+              <a:t>•  </a:t>
+            </a:r>
             <a:pPr algn="l" indent="0" marL="0">
               <a:lnSpc>
                 <a:spcPct val="115000"/>
@@ -9852,149 +9400,48 @@
               <a:buNone/>
             </a:pPr>
             <a:r>
-              <a:rPr lang="en-US" sz="1800" b="1" dirty="0">
-                <a:solidFill>
-                  <a:srgbClr val="1F4E9C"/>
-                </a:solidFill>
-                <a:latin typeface="微软雅黑" pitchFamily="34" charset="0"/>
-                <a:ea typeface="微软雅黑" pitchFamily="34" charset="-122"/>
-                <a:cs typeface="微软雅黑" pitchFamily="34" charset="-120"/>
-              </a:rPr>
-              <a:t>•  </a:t>
-            </a:r>
-            <a:pPr algn="l" indent="0" marL="0">
-              <a:lnSpc>
-                <a:spcPct val="115000"/>
-              </a:lnSpc>
-              <a:buNone/>
-            </a:pPr>
-            <a:r>
-              <a:rPr lang="en-US" sz="1800" b="1" dirty="0">
+              <a:rPr lang="en-US" sz="1800" dirty="0">
                 <a:solidFill>
                   <a:srgbClr val="000000"/>
                 </a:solidFill>
               </a:rPr>
-              <a:t>默写</a:t>
-            </a:r>
-            <a:pPr algn="l" indent="0" marL="0">
-              <a:lnSpc>
-                <a:spcPct val="115000"/>
-              </a:lnSpc>
-              <a:buNone/>
-            </a:pPr>
-            <a:r>
-              <a:rPr lang="en-US" sz="1800" dirty="0">
+              <a:t>课后题：每节一道跟练题加一道模仿题，参考答案在PPT最后两页</a:t>
+            </a:r>
+            <a:endParaRPr lang="en-US" sz="1800" dirty="0"/>
+          </a:p>
+        </p:txBody>
+      </p:sp>
+      <p:sp>
+        <p:nvSpPr>
+          <p:cNvPr id="9" name="Text 7"/>
+          <p:cNvSpPr/>
+          <p:nvPr/>
+        </p:nvSpPr>
+        <p:spPr>
+          <a:xfrm>
+            <a:off x="822960" y="4370832"/>
+            <a:ext cx="10545775" cy="758952"/>
+          </a:xfrm>
+          <a:prstGeom prst="rect">
+            <a:avLst/>
+          </a:prstGeom>
+          <a:noFill/>
+          <a:ln/>
+        </p:spPr>
+        <p:txBody>
+          <a:bodyPr wrap="square" rtlCol="0" anchor="t"/>
+          <a:lstStyle/>
+          <a:p>
+            <a:pPr algn="l" indent="0" marL="0">
+              <a:buNone/>
+            </a:pPr>
+            <a:r>
+              <a:rPr lang="en-US" dirty="0">
                 <a:solidFill>
                   <a:srgbClr val="000000"/>
                 </a:solidFill>
               </a:rPr>
-              <a:t>：每节一个默写单元，考场上直接默出模板</a:t>
-            </a:r>
-            <a:endParaRPr lang="en-US" sz="1800" dirty="0"/>
-          </a:p>
-        </p:txBody>
-      </p:sp>
-      <p:sp>
-        <p:nvSpPr>
-          <p:cNvPr id="8" name="Text 6"/>
-          <p:cNvSpPr/>
-          <p:nvPr/>
-        </p:nvSpPr>
-        <p:spPr>
-          <a:xfrm>
-            <a:off x="896112" y="3808476"/>
-            <a:ext cx="10454335" cy="397764"/>
-          </a:xfrm>
-          <a:prstGeom prst="rect">
-            <a:avLst/>
-          </a:prstGeom>
-          <a:noFill/>
-          <a:ln/>
-        </p:spPr>
-        <p:txBody>
-          <a:bodyPr wrap="square" rtlCol="0" anchor="t"/>
-          <a:lstStyle/>
-          <a:p>
-            <a:pPr algn="l" indent="0" marL="0">
-              <a:lnSpc>
-                <a:spcPct val="115000"/>
-              </a:lnSpc>
-              <a:buNone/>
-            </a:pPr>
-            <a:r>
-              <a:rPr lang="en-US" sz="1800" b="1" dirty="0">
-                <a:solidFill>
-                  <a:srgbClr val="1F4E9C"/>
-                </a:solidFill>
-                <a:latin typeface="微软雅黑" pitchFamily="34" charset="0"/>
-                <a:ea typeface="微软雅黑" pitchFamily="34" charset="-122"/>
-                <a:cs typeface="微软雅黑" pitchFamily="34" charset="-120"/>
-              </a:rPr>
-              <a:t>•  </a:t>
-            </a:r>
-            <a:pPr algn="l" indent="0" marL="0">
-              <a:lnSpc>
-                <a:spcPct val="115000"/>
-              </a:lnSpc>
-              <a:buNone/>
-            </a:pPr>
-            <a:r>
-              <a:rPr lang="en-US" sz="1800" b="1" dirty="0">
-                <a:solidFill>
-                  <a:srgbClr val="000000"/>
-                </a:solidFill>
-              </a:rPr>
-              <a:t>课后题</a:t>
-            </a:r>
-            <a:pPr algn="l" indent="0" marL="0">
-              <a:lnSpc>
-                <a:spcPct val="115000"/>
-              </a:lnSpc>
-              <a:buNone/>
-            </a:pPr>
-            <a:r>
-              <a:rPr lang="en-US" sz="1800" dirty="0">
-                <a:solidFill>
-                  <a:srgbClr val="000000"/>
-                </a:solidFill>
-              </a:rPr>
-              <a:t>：每节1道跟练题＋1道模仿题，参考答案在PPT末尾两页</a:t>
-            </a:r>
-            <a:endParaRPr lang="en-US" sz="1800" dirty="0"/>
-          </a:p>
-        </p:txBody>
-      </p:sp>
-      <p:sp>
-        <p:nvSpPr>
-          <p:cNvPr id="9" name="Text 7"/>
-          <p:cNvSpPr/>
-          <p:nvPr/>
-        </p:nvSpPr>
-        <p:spPr>
-          <a:xfrm>
-            <a:off x="822960" y="4370832"/>
-            <a:ext cx="10545775" cy="416052"/>
-          </a:xfrm>
-          <a:prstGeom prst="rect">
-            <a:avLst/>
-          </a:prstGeom>
-          <a:noFill/>
-          <a:ln/>
-        </p:spPr>
-        <p:txBody>
-          <a:bodyPr wrap="square" rtlCol="0" anchor="t"/>
-          <a:lstStyle/>
-          <a:p>
-            <a:pPr algn="l" indent="0" marL="0">
-              <a:buNone/>
-            </a:pPr>
-            <a:r>
-              <a:rPr lang="en-US" dirty="0">
-                <a:solidFill>
-                  <a:srgbClr val="000000"/>
-                </a:solidFill>
-              </a:rPr>
-              <a:t>每节课后任务页会写清默写要求，措辞是“合上资料能写出……”；写不出来就回看该节</a:t>
+              <a:t>每节课后任务页会写清这节的默写要求，比如“合上资料能写出顺序表的插入和删除”，你拿这句话当验收标准</a:t>
             </a:r>
             <a:endParaRPr lang="en-US" dirty="0"/>
           </a:p>
@@ -10072,7 +9519,7 @@
                 <a:ea typeface="微软雅黑" pitchFamily="34" charset="-122"/>
                 <a:cs typeface="微软雅黑" pitchFamily="34" charset="-120"/>
               </a:rPr>
-              <a:t>6 / 17</a:t>
+              <a:t>6 / 16</a:t>
             </a:r>
             <a:endParaRPr lang="en-US" sz="1000" dirty="0"/>
           </a:p>
@@ -10177,7 +9624,7 @@
                 <a:ea typeface="微软雅黑" pitchFamily="34" charset="-122"/>
                 <a:cs typeface="微软雅黑" pitchFamily="34" charset="-120"/>
               </a:rPr>
-              <a:t>全局约定</a:t>
+              <a:t>802 代码题怎么写</a:t>
             </a:r>
             <a:endParaRPr lang="en-US" sz="1400" dirty="0"/>
           </a:p>
@@ -10216,1018 +9663,62 @@
                 <a:ea typeface="微软雅黑" pitchFamily="34" charset="-122"/>
                 <a:cs typeface="微软雅黑" pitchFamily="34" charset="-120"/>
               </a:rPr>
-              <a:t>六条伪代码约定：各自解决什么问题</a:t>
+              <a:t>考场上写的是伪代码，不是能编译的程序</a:t>
             </a:r>
             <a:endParaRPr lang="en-US" sz="2800" dirty="0"/>
           </a:p>
         </p:txBody>
       </p:sp>
-      <p:graphicFrame>
-        <p:nvGraphicFramePr>
-          <p:cNvPr id="7" name="Table 0"/>
-          <p:cNvGraphicFramePr>
-            <a:graphicFrameLocks noGrp="1"/>
-          </p:cNvGraphicFramePr>
-          <p:nvPr>
-            <p:extLst>
-              <p:ext uri="{D42A27DB-BD31-4B8C-83A1-F6EECF244321}">
-                <p14:modId xmlns:p14="http://schemas.microsoft.com/office/powerpoint/2010/main" val="1579011935"/>
-              </p:ext>
-            </p:extLst>
-          </p:nvPr>
-        </p:nvGraphicFramePr>
-        <p:xfrm>
-          <a:off x="822960" y="2395728"/>
-          <a:ext cx="10545775" cy="914400"/>
-        </p:xfrm>
-        <a:graphic>
-          <a:graphicData uri="http://schemas.openxmlformats.org/drawingml/2006/table">
-            <a:tbl>
-              <a:tblPr/>
-              <a:tblGrid>
-                <a:gridCol w="3840480"/>
-                <a:gridCol w="6675120"/>
-              </a:tblGrid>
-              <a:tr h="420624">
-                <a:tc>
-                  <a:txBody>
-                    <a:bodyPr/>
-                    <a:lstStyle/>
-                    <a:p>
-                      <a:pPr algn="ctr" indent="0" marL="0">
-                        <a:buNone/>
-                      </a:pPr>
-                      <a:r>
-                        <a:rPr lang="en-US" sz="1400" b="1" dirty="0">
-                          <a:solidFill>
-                            <a:srgbClr val="1F4E9C"/>
-                          </a:solidFill>
-                          <a:latin typeface="微软雅黑" pitchFamily="34" charset="0"/>
-                          <a:ea typeface="微软雅黑" pitchFamily="34" charset="-122"/>
-                          <a:cs typeface="微软雅黑" pitchFamily="34" charset="-120"/>
-                        </a:rPr>
-                        <a:t>约定</a:t>
-                      </a:r>
-                      <a:endParaRPr lang="en-US" sz="1400" dirty="0">
-                        <a:latin typeface="微软雅黑" charset="0"/>
-                        <a:ea typeface="微软雅黑" charset="0"/>
-                        <a:cs typeface="微软雅黑" charset="0"/>
-                      </a:endParaRPr>
-                    </a:p>
-                  </a:txBody>
-                  <a:tcPr marL="91440" marR="91440" marT="45720" marB="45720" anchor="ctr">
-                    <a:lnL w="9525" cap="flat" cmpd="sng" algn="ctr">
-                      <a:solidFill>
-                        <a:srgbClr val="D8DBE0"/>
-                      </a:solidFill>
-                      <a:prstDash val="solid"/>
-                      <a:round/>
-                      <a:headEnd type="none" w="med" len="med"/>
-                      <a:tailEnd type="none" w="med" len="med"/>
-                    </a:lnL>
-                    <a:lnR w="9525" cap="flat" cmpd="sng" algn="ctr">
-                      <a:solidFill>
-                        <a:srgbClr val="D8DBE0"/>
-                      </a:solidFill>
-                      <a:prstDash val="solid"/>
-                      <a:round/>
-                      <a:headEnd type="none" w="med" len="med"/>
-                      <a:tailEnd type="none" w="med" len="med"/>
-                    </a:lnR>
-                    <a:lnT w="9525" cap="flat" cmpd="sng" algn="ctr">
-                      <a:solidFill>
-                        <a:srgbClr val="D8DBE0"/>
-                      </a:solidFill>
-                      <a:prstDash val="solid"/>
-                      <a:round/>
-                      <a:headEnd type="none" w="med" len="med"/>
-                      <a:tailEnd type="none" w="med" len="med"/>
-                    </a:lnT>
-                    <a:lnB w="9525" cap="flat" cmpd="sng" algn="ctr">
-                      <a:solidFill>
-                        <a:srgbClr val="D8DBE0"/>
-                      </a:solidFill>
-                      <a:prstDash val="solid"/>
-                      <a:round/>
-                      <a:headEnd type="none" w="med" len="med"/>
-                      <a:tailEnd type="none" w="med" len="med"/>
-                    </a:lnB>
-                    <a:solidFill>
-                      <a:srgbClr val="F5F6F7"/>
-                    </a:solidFill>
-                  </a:tcPr>
-                </a:tc>
-                <a:tc>
-                  <a:txBody>
-                    <a:bodyPr/>
-                    <a:lstStyle/>
-                    <a:p>
-                      <a:pPr algn="ctr" indent="0" marL="0">
-                        <a:buNone/>
-                      </a:pPr>
-                      <a:r>
-                        <a:rPr lang="en-US" sz="1400" b="1" dirty="0">
-                          <a:solidFill>
-                            <a:srgbClr val="1F4E9C"/>
-                          </a:solidFill>
-                          <a:latin typeface="微软雅黑" pitchFamily="34" charset="0"/>
-                          <a:ea typeface="微软雅黑" pitchFamily="34" charset="-122"/>
-                          <a:cs typeface="微软雅黑" pitchFamily="34" charset="-120"/>
-                        </a:rPr>
-                        <a:t>它解决什么问题</a:t>
-                      </a:r>
-                      <a:endParaRPr lang="en-US" sz="1400" dirty="0">
-                        <a:latin typeface="微软雅黑" charset="0"/>
-                        <a:ea typeface="微软雅黑" charset="0"/>
-                        <a:cs typeface="微软雅黑" charset="0"/>
-                      </a:endParaRPr>
-                    </a:p>
-                  </a:txBody>
-                  <a:tcPr marL="91440" marR="91440" marT="45720" marB="45720" anchor="ctr">
-                    <a:lnL w="9525" cap="flat" cmpd="sng" algn="ctr">
-                      <a:solidFill>
-                        <a:srgbClr val="D8DBE0"/>
-                      </a:solidFill>
-                      <a:prstDash val="solid"/>
-                      <a:round/>
-                      <a:headEnd type="none" w="med" len="med"/>
-                      <a:tailEnd type="none" w="med" len="med"/>
-                    </a:lnL>
-                    <a:lnR w="9525" cap="flat" cmpd="sng" algn="ctr">
-                      <a:solidFill>
-                        <a:srgbClr val="D8DBE0"/>
-                      </a:solidFill>
-                      <a:prstDash val="solid"/>
-                      <a:round/>
-                      <a:headEnd type="none" w="med" len="med"/>
-                      <a:tailEnd type="none" w="med" len="med"/>
-                    </a:lnR>
-                    <a:lnT w="9525" cap="flat" cmpd="sng" algn="ctr">
-                      <a:solidFill>
-                        <a:srgbClr val="D8DBE0"/>
-                      </a:solidFill>
-                      <a:prstDash val="solid"/>
-                      <a:round/>
-                      <a:headEnd type="none" w="med" len="med"/>
-                      <a:tailEnd type="none" w="med" len="med"/>
-                    </a:lnT>
-                    <a:lnB w="9525" cap="flat" cmpd="sng" algn="ctr">
-                      <a:solidFill>
-                        <a:srgbClr val="D8DBE0"/>
-                      </a:solidFill>
-                      <a:prstDash val="solid"/>
-                      <a:round/>
-                      <a:headEnd type="none" w="med" len="med"/>
-                      <a:tailEnd type="none" w="med" len="med"/>
-                    </a:lnB>
-                    <a:solidFill>
-                      <a:srgbClr val="F5F6F7"/>
-                    </a:solidFill>
-                  </a:tcPr>
-                </a:tc>
-              </a:tr>
-              <a:tr h="420624">
-                <a:tc>
-                  <a:txBody>
-                    <a:bodyPr/>
-                    <a:lstStyle/>
-                    <a:p>
-                      <a:pPr algn="ctr" indent="0" marL="0">
-                        <a:buNone/>
-                      </a:pPr>
-                      <a:r>
-                        <a:rPr lang="en-US" sz="1400" dirty="0">
-                          <a:solidFill>
-                            <a:srgbClr val="1F2329"/>
-                          </a:solidFill>
-                          <a:latin typeface="微软雅黑" pitchFamily="34" charset="0"/>
-                          <a:ea typeface="微软雅黑" pitchFamily="34" charset="-122"/>
-                          <a:cs typeface="微软雅黑" pitchFamily="34" charset="-120"/>
-                        </a:rPr>
-                        <a:t>1 两套下标基准</a:t>
-                      </a:r>
-                      <a:endParaRPr lang="en-US" sz="1400" dirty="0">
-                        <a:latin typeface="微软雅黑" charset="0"/>
-                        <a:ea typeface="微软雅黑" charset="0"/>
-                        <a:cs typeface="微软雅黑" charset="0"/>
-                      </a:endParaRPr>
-                    </a:p>
-                  </a:txBody>
-                  <a:tcPr marL="91440" marR="91440" marT="45720" marB="45720" anchor="ctr">
-                    <a:lnL w="9525" cap="flat" cmpd="sng" algn="ctr">
-                      <a:solidFill>
-                        <a:srgbClr val="D8DBE0"/>
-                      </a:solidFill>
-                      <a:prstDash val="solid"/>
-                      <a:round/>
-                      <a:headEnd type="none" w="med" len="med"/>
-                      <a:tailEnd type="none" w="med" len="med"/>
-                    </a:lnL>
-                    <a:lnR w="9525" cap="flat" cmpd="sng" algn="ctr">
-                      <a:solidFill>
-                        <a:srgbClr val="D8DBE0"/>
-                      </a:solidFill>
-                      <a:prstDash val="solid"/>
-                      <a:round/>
-                      <a:headEnd type="none" w="med" len="med"/>
-                      <a:tailEnd type="none" w="med" len="med"/>
-                    </a:lnR>
-                    <a:lnT w="9525" cap="flat" cmpd="sng" algn="ctr">
-                      <a:solidFill>
-                        <a:srgbClr val="D8DBE0"/>
-                      </a:solidFill>
-                      <a:prstDash val="solid"/>
-                      <a:round/>
-                      <a:headEnd type="none" w="med" len="med"/>
-                      <a:tailEnd type="none" w="med" len="med"/>
-                    </a:lnT>
-                    <a:lnB w="9525" cap="flat" cmpd="sng" algn="ctr">
-                      <a:solidFill>
-                        <a:srgbClr val="D8DBE0"/>
-                      </a:solidFill>
-                      <a:prstDash val="solid"/>
-                      <a:round/>
-                      <a:headEnd type="none" w="med" len="med"/>
-                      <a:tailEnd type="none" w="med" len="med"/>
-                    </a:lnB>
-                    <a:solidFill>
-                      <a:srgbClr val="FFFFFF"/>
-                    </a:solidFill>
-                  </a:tcPr>
-                </a:tc>
-                <a:tc>
-                  <a:txBody>
-                    <a:bodyPr/>
-                    <a:lstStyle/>
-                    <a:p>
-                      <a:pPr algn="ctr" indent="0" marL="0">
-                        <a:buNone/>
-                      </a:pPr>
-                      <a:r>
-                        <a:rPr lang="en-US" sz="1400" dirty="0">
-                          <a:solidFill>
-                            <a:srgbClr val="1F2329"/>
-                          </a:solidFill>
-                          <a:latin typeface="微软雅黑" pitchFamily="34" charset="0"/>
-                          <a:ea typeface="微软雅黑" pitchFamily="34" charset="-122"/>
-                          <a:cs typeface="微软雅黑" pitchFamily="34" charset="-120"/>
-                        </a:rPr>
-                        <a:t>线性表与查找从0起、排序从1起，避免自相矛盾</a:t>
-                      </a:r>
-                      <a:endParaRPr lang="en-US" sz="1400" dirty="0">
-                        <a:latin typeface="微软雅黑" charset="0"/>
-                        <a:ea typeface="微软雅黑" charset="0"/>
-                        <a:cs typeface="微软雅黑" charset="0"/>
-                      </a:endParaRPr>
-                    </a:p>
-                  </a:txBody>
-                  <a:tcPr marL="91440" marR="91440" marT="45720" marB="45720" anchor="ctr">
-                    <a:lnL w="9525" cap="flat" cmpd="sng" algn="ctr">
-                      <a:solidFill>
-                        <a:srgbClr val="D8DBE0"/>
-                      </a:solidFill>
-                      <a:prstDash val="solid"/>
-                      <a:round/>
-                      <a:headEnd type="none" w="med" len="med"/>
-                      <a:tailEnd type="none" w="med" len="med"/>
-                    </a:lnL>
-                    <a:lnR w="9525" cap="flat" cmpd="sng" algn="ctr">
-                      <a:solidFill>
-                        <a:srgbClr val="D8DBE0"/>
-                      </a:solidFill>
-                      <a:prstDash val="solid"/>
-                      <a:round/>
-                      <a:headEnd type="none" w="med" len="med"/>
-                      <a:tailEnd type="none" w="med" len="med"/>
-                    </a:lnR>
-                    <a:lnT w="9525" cap="flat" cmpd="sng" algn="ctr">
-                      <a:solidFill>
-                        <a:srgbClr val="D8DBE0"/>
-                      </a:solidFill>
-                      <a:prstDash val="solid"/>
-                      <a:round/>
-                      <a:headEnd type="none" w="med" len="med"/>
-                      <a:tailEnd type="none" w="med" len="med"/>
-                    </a:lnT>
-                    <a:lnB w="9525" cap="flat" cmpd="sng" algn="ctr">
-                      <a:solidFill>
-                        <a:srgbClr val="D8DBE0"/>
-                      </a:solidFill>
-                      <a:prstDash val="solid"/>
-                      <a:round/>
-                      <a:headEnd type="none" w="med" len="med"/>
-                      <a:tailEnd type="none" w="med" len="med"/>
-                    </a:lnB>
-                    <a:solidFill>
-                      <a:srgbClr val="FFFFFF"/>
-                    </a:solidFill>
-                  </a:tcPr>
-                </a:tc>
-              </a:tr>
-              <a:tr h="420624">
-                <a:tc>
-                  <a:txBody>
-                    <a:bodyPr/>
-                    <a:lstStyle/>
-                    <a:p>
-                      <a:pPr algn="ctr" indent="0" marL="0">
-                        <a:buNone/>
-                      </a:pPr>
-                      <a:r>
-                        <a:rPr lang="en-US" sz="1400" dirty="0">
-                          <a:solidFill>
-                            <a:srgbClr val="1F2329"/>
-                          </a:solidFill>
-                          <a:latin typeface="微软雅黑" pitchFamily="34" charset="0"/>
-                          <a:ea typeface="微软雅黑" pitchFamily="34" charset="-122"/>
-                          <a:cs typeface="微软雅黑" pitchFamily="34" charset="-120"/>
-                        </a:rPr>
-                        <a:t>2 链表默认带头结点</a:t>
-                      </a:r>
-                      <a:endParaRPr lang="en-US" sz="1400" dirty="0">
-                        <a:latin typeface="微软雅黑" charset="0"/>
-                        <a:ea typeface="微软雅黑" charset="0"/>
-                        <a:cs typeface="微软雅黑" charset="0"/>
-                      </a:endParaRPr>
-                    </a:p>
-                  </a:txBody>
-                  <a:tcPr marL="91440" marR="91440" marT="45720" marB="45720" anchor="ctr">
-                    <a:lnL w="9525" cap="flat" cmpd="sng" algn="ctr">
-                      <a:solidFill>
-                        <a:srgbClr val="D8DBE0"/>
-                      </a:solidFill>
-                      <a:prstDash val="solid"/>
-                      <a:round/>
-                      <a:headEnd type="none" w="med" len="med"/>
-                      <a:tailEnd type="none" w="med" len="med"/>
-                    </a:lnL>
-                    <a:lnR w="9525" cap="flat" cmpd="sng" algn="ctr">
-                      <a:solidFill>
-                        <a:srgbClr val="D8DBE0"/>
-                      </a:solidFill>
-                      <a:prstDash val="solid"/>
-                      <a:round/>
-                      <a:headEnd type="none" w="med" len="med"/>
-                      <a:tailEnd type="none" w="med" len="med"/>
-                    </a:lnR>
-                    <a:lnT w="9525" cap="flat" cmpd="sng" algn="ctr">
-                      <a:solidFill>
-                        <a:srgbClr val="D8DBE0"/>
-                      </a:solidFill>
-                      <a:prstDash val="solid"/>
-                      <a:round/>
-                      <a:headEnd type="none" w="med" len="med"/>
-                      <a:tailEnd type="none" w="med" len="med"/>
-                    </a:lnT>
-                    <a:lnB w="9525" cap="flat" cmpd="sng" algn="ctr">
-                      <a:solidFill>
-                        <a:srgbClr val="D8DBE0"/>
-                      </a:solidFill>
-                      <a:prstDash val="solid"/>
-                      <a:round/>
-                      <a:headEnd type="none" w="med" len="med"/>
-                      <a:tailEnd type="none" w="med" len="med"/>
-                    </a:lnB>
-                    <a:solidFill>
-                      <a:srgbClr val="FFFFFF"/>
-                    </a:solidFill>
-                  </a:tcPr>
-                </a:tc>
-                <a:tc>
-                  <a:txBody>
-                    <a:bodyPr/>
-                    <a:lstStyle/>
-                    <a:p>
-                      <a:pPr algn="ctr" indent="0" marL="0">
-                        <a:buNone/>
-                      </a:pPr>
-                      <a:r>
-                        <a:rPr lang="en-US" sz="1400" dirty="0">
-                          <a:solidFill>
-                            <a:srgbClr val="1F2329"/>
-                          </a:solidFill>
-                          <a:latin typeface="微软雅黑" pitchFamily="34" charset="0"/>
-                          <a:ea typeface="微软雅黑" pitchFamily="34" charset="-122"/>
-                          <a:cs typeface="微软雅黑" pitchFamily="34" charset="-120"/>
-                        </a:rPr>
-                        <a:t>让第一个结点的插删与其他位置统一</a:t>
-                      </a:r>
-                      <a:endParaRPr lang="en-US" sz="1400" dirty="0">
-                        <a:latin typeface="微软雅黑" charset="0"/>
-                        <a:ea typeface="微软雅黑" charset="0"/>
-                        <a:cs typeface="微软雅黑" charset="0"/>
-                      </a:endParaRPr>
-                    </a:p>
-                  </a:txBody>
-                  <a:tcPr marL="91440" marR="91440" marT="45720" marB="45720" anchor="ctr">
-                    <a:lnL w="9525" cap="flat" cmpd="sng" algn="ctr">
-                      <a:solidFill>
-                        <a:srgbClr val="D8DBE0"/>
-                      </a:solidFill>
-                      <a:prstDash val="solid"/>
-                      <a:round/>
-                      <a:headEnd type="none" w="med" len="med"/>
-                      <a:tailEnd type="none" w="med" len="med"/>
-                    </a:lnL>
-                    <a:lnR w="9525" cap="flat" cmpd="sng" algn="ctr">
-                      <a:solidFill>
-                        <a:srgbClr val="D8DBE0"/>
-                      </a:solidFill>
-                      <a:prstDash val="solid"/>
-                      <a:round/>
-                      <a:headEnd type="none" w="med" len="med"/>
-                      <a:tailEnd type="none" w="med" len="med"/>
-                    </a:lnR>
-                    <a:lnT w="9525" cap="flat" cmpd="sng" algn="ctr">
-                      <a:solidFill>
-                        <a:srgbClr val="D8DBE0"/>
-                      </a:solidFill>
-                      <a:prstDash val="solid"/>
-                      <a:round/>
-                      <a:headEnd type="none" w="med" len="med"/>
-                      <a:tailEnd type="none" w="med" len="med"/>
-                    </a:lnT>
-                    <a:lnB w="9525" cap="flat" cmpd="sng" algn="ctr">
-                      <a:solidFill>
-                        <a:srgbClr val="D8DBE0"/>
-                      </a:solidFill>
-                      <a:prstDash val="solid"/>
-                      <a:round/>
-                      <a:headEnd type="none" w="med" len="med"/>
-                      <a:tailEnd type="none" w="med" len="med"/>
-                    </a:lnB>
-                    <a:solidFill>
-                      <a:srgbClr val="FFFFFF"/>
-                    </a:solidFill>
-                  </a:tcPr>
-                </a:tc>
-              </a:tr>
-              <a:tr h="420624">
-                <a:tc>
-                  <a:txBody>
-                    <a:bodyPr/>
-                    <a:lstStyle/>
-                    <a:p>
-                      <a:pPr algn="ctr" indent="0" marL="0">
-                        <a:buNone/>
-                      </a:pPr>
-                      <a:r>
-                        <a:rPr lang="en-US" sz="1400" dirty="0">
-                          <a:solidFill>
-                            <a:srgbClr val="1F2329"/>
-                          </a:solidFill>
-                          <a:latin typeface="微软雅黑" pitchFamily="34" charset="0"/>
-                          <a:ea typeface="微软雅黑" pitchFamily="34" charset="-122"/>
-                          <a:cs typeface="微软雅黑" pitchFamily="34" charset="-120"/>
-                        </a:rPr>
-                        <a:t>3 top=-1、循环队列牺牲一单元</a:t>
-                      </a:r>
-                      <a:endParaRPr lang="en-US" sz="1400" dirty="0">
-                        <a:latin typeface="微软雅黑" charset="0"/>
-                        <a:ea typeface="微软雅黑" charset="0"/>
-                        <a:cs typeface="微软雅黑" charset="0"/>
-                      </a:endParaRPr>
-                    </a:p>
-                  </a:txBody>
-                  <a:tcPr marL="91440" marR="91440" marT="45720" marB="45720" anchor="ctr">
-                    <a:lnL w="9525" cap="flat" cmpd="sng" algn="ctr">
-                      <a:solidFill>
-                        <a:srgbClr val="D8DBE0"/>
-                      </a:solidFill>
-                      <a:prstDash val="solid"/>
-                      <a:round/>
-                      <a:headEnd type="none" w="med" len="med"/>
-                      <a:tailEnd type="none" w="med" len="med"/>
-                    </a:lnL>
-                    <a:lnR w="9525" cap="flat" cmpd="sng" algn="ctr">
-                      <a:solidFill>
-                        <a:srgbClr val="D8DBE0"/>
-                      </a:solidFill>
-                      <a:prstDash val="solid"/>
-                      <a:round/>
-                      <a:headEnd type="none" w="med" len="med"/>
-                      <a:tailEnd type="none" w="med" len="med"/>
-                    </a:lnR>
-                    <a:lnT w="9525" cap="flat" cmpd="sng" algn="ctr">
-                      <a:solidFill>
-                        <a:srgbClr val="D8DBE0"/>
-                      </a:solidFill>
-                      <a:prstDash val="solid"/>
-                      <a:round/>
-                      <a:headEnd type="none" w="med" len="med"/>
-                      <a:tailEnd type="none" w="med" len="med"/>
-                    </a:lnT>
-                    <a:lnB w="9525" cap="flat" cmpd="sng" algn="ctr">
-                      <a:solidFill>
-                        <a:srgbClr val="D8DBE0"/>
-                      </a:solidFill>
-                      <a:prstDash val="solid"/>
-                      <a:round/>
-                      <a:headEnd type="none" w="med" len="med"/>
-                      <a:tailEnd type="none" w="med" len="med"/>
-                    </a:lnB>
-                    <a:solidFill>
-                      <a:srgbClr val="FFFFFF"/>
-                    </a:solidFill>
-                  </a:tcPr>
-                </a:tc>
-                <a:tc>
-                  <a:txBody>
-                    <a:bodyPr/>
-                    <a:lstStyle/>
-                    <a:p>
-                      <a:pPr algn="ctr" indent="0" marL="0">
-                        <a:buNone/>
-                      </a:pPr>
-                      <a:r>
-                        <a:rPr lang="en-US" sz="1400" dirty="0">
-                          <a:solidFill>
-                            <a:srgbClr val="1F2329"/>
-                          </a:solidFill>
-                          <a:latin typeface="微软雅黑" pitchFamily="34" charset="0"/>
-                          <a:ea typeface="微软雅黑" pitchFamily="34" charset="-122"/>
-                          <a:cs typeface="微软雅黑" pitchFamily="34" charset="-120"/>
-                        </a:rPr>
-                        <a:t>定死栈与队列的判空判满式子</a:t>
-                      </a:r>
-                      <a:endParaRPr lang="en-US" sz="1400" dirty="0">
-                        <a:latin typeface="微软雅黑" charset="0"/>
-                        <a:ea typeface="微软雅黑" charset="0"/>
-                        <a:cs typeface="微软雅黑" charset="0"/>
-                      </a:endParaRPr>
-                    </a:p>
-                  </a:txBody>
-                  <a:tcPr marL="91440" marR="91440" marT="45720" marB="45720" anchor="ctr">
-                    <a:lnL w="9525" cap="flat" cmpd="sng" algn="ctr">
-                      <a:solidFill>
-                        <a:srgbClr val="D8DBE0"/>
-                      </a:solidFill>
-                      <a:prstDash val="solid"/>
-                      <a:round/>
-                      <a:headEnd type="none" w="med" len="med"/>
-                      <a:tailEnd type="none" w="med" len="med"/>
-                    </a:lnL>
-                    <a:lnR w="9525" cap="flat" cmpd="sng" algn="ctr">
-                      <a:solidFill>
-                        <a:srgbClr val="D8DBE0"/>
-                      </a:solidFill>
-                      <a:prstDash val="solid"/>
-                      <a:round/>
-                      <a:headEnd type="none" w="med" len="med"/>
-                      <a:tailEnd type="none" w="med" len="med"/>
-                    </a:lnR>
-                    <a:lnT w="9525" cap="flat" cmpd="sng" algn="ctr">
-                      <a:solidFill>
-                        <a:srgbClr val="D8DBE0"/>
-                      </a:solidFill>
-                      <a:prstDash val="solid"/>
-                      <a:round/>
-                      <a:headEnd type="none" w="med" len="med"/>
-                      <a:tailEnd type="none" w="med" len="med"/>
-                    </a:lnT>
-                    <a:lnB w="9525" cap="flat" cmpd="sng" algn="ctr">
-                      <a:solidFill>
-                        <a:srgbClr val="D8DBE0"/>
-                      </a:solidFill>
-                      <a:prstDash val="solid"/>
-                      <a:round/>
-                      <a:headEnd type="none" w="med" len="med"/>
-                      <a:tailEnd type="none" w="med" len="med"/>
-                    </a:lnB>
-                    <a:solidFill>
-                      <a:srgbClr val="FFFFFF"/>
-                    </a:solidFill>
-                  </a:tcPr>
-                </a:tc>
-              </a:tr>
-              <a:tr h="420624">
-                <a:tc>
-                  <a:txBody>
-                    <a:bodyPr/>
-                    <a:lstStyle/>
-                    <a:p>
-                      <a:pPr algn="ctr" indent="0" marL="0">
-                        <a:buNone/>
-                      </a:pPr>
-                      <a:r>
-                        <a:rPr lang="en-US" sz="1400" dirty="0">
-                          <a:solidFill>
-                            <a:srgbClr val="1F2329"/>
-                          </a:solidFill>
-                          <a:latin typeface="微软雅黑" pitchFamily="34" charset="0"/>
-                          <a:ea typeface="微软雅黑" pitchFamily="34" charset="-122"/>
-                          <a:cs typeface="微软雅黑" pitchFamily="34" charset="-120"/>
-                        </a:rPr>
-                        <a:t>4 栈队元素类型按需替换</a:t>
-                      </a:r>
-                      <a:endParaRPr lang="en-US" sz="1400" dirty="0">
-                        <a:latin typeface="微软雅黑" charset="0"/>
-                        <a:ea typeface="微软雅黑" charset="0"/>
-                        <a:cs typeface="微软雅黑" charset="0"/>
-                      </a:endParaRPr>
-                    </a:p>
-                  </a:txBody>
-                  <a:tcPr marL="91440" marR="91440" marT="45720" marB="45720" anchor="ctr">
-                    <a:lnL w="9525" cap="flat" cmpd="sng" algn="ctr">
-                      <a:solidFill>
-                        <a:srgbClr val="D8DBE0"/>
-                      </a:solidFill>
-                      <a:prstDash val="solid"/>
-                      <a:round/>
-                      <a:headEnd type="none" w="med" len="med"/>
-                      <a:tailEnd type="none" w="med" len="med"/>
-                    </a:lnL>
-                    <a:lnR w="9525" cap="flat" cmpd="sng" algn="ctr">
-                      <a:solidFill>
-                        <a:srgbClr val="D8DBE0"/>
-                      </a:solidFill>
-                      <a:prstDash val="solid"/>
-                      <a:round/>
-                      <a:headEnd type="none" w="med" len="med"/>
-                      <a:tailEnd type="none" w="med" len="med"/>
-                    </a:lnR>
-                    <a:lnT w="9525" cap="flat" cmpd="sng" algn="ctr">
-                      <a:solidFill>
-                        <a:srgbClr val="D8DBE0"/>
-                      </a:solidFill>
-                      <a:prstDash val="solid"/>
-                      <a:round/>
-                      <a:headEnd type="none" w="med" len="med"/>
-                      <a:tailEnd type="none" w="med" len="med"/>
-                    </a:lnT>
-                    <a:lnB w="9525" cap="flat" cmpd="sng" algn="ctr">
-                      <a:solidFill>
-                        <a:srgbClr val="D8DBE0"/>
-                      </a:solidFill>
-                      <a:prstDash val="solid"/>
-                      <a:round/>
-                      <a:headEnd type="none" w="med" len="med"/>
-                      <a:tailEnd type="none" w="med" len="med"/>
-                    </a:lnB>
-                    <a:solidFill>
-                      <a:srgbClr val="FFFFFF"/>
-                    </a:solidFill>
-                  </a:tcPr>
-                </a:tc>
-                <a:tc>
-                  <a:txBody>
-                    <a:bodyPr/>
-                    <a:lstStyle/>
-                    <a:p>
-                      <a:pPr algn="ctr" indent="0" marL="0">
-                        <a:buNone/>
-                      </a:pPr>
-                      <a:r>
-                        <a:rPr lang="en-US" sz="1400" dirty="0">
-                          <a:solidFill>
-                            <a:srgbClr val="1F2329"/>
-                          </a:solidFill>
-                          <a:latin typeface="微软雅黑" pitchFamily="34" charset="0"/>
-                          <a:ea typeface="微软雅黑" pitchFamily="34" charset="-122"/>
-                          <a:cs typeface="微软雅黑" pitchFamily="34" charset="-120"/>
-                        </a:rPr>
-                        <a:t>工具栈里可以放结点指针或顶点编号</a:t>
-                      </a:r>
-                      <a:endParaRPr lang="en-US" sz="1400" dirty="0">
-                        <a:latin typeface="微软雅黑" charset="0"/>
-                        <a:ea typeface="微软雅黑" charset="0"/>
-                        <a:cs typeface="微软雅黑" charset="0"/>
-                      </a:endParaRPr>
-                    </a:p>
-                  </a:txBody>
-                  <a:tcPr marL="91440" marR="91440" marT="45720" marB="45720" anchor="ctr">
-                    <a:lnL w="9525" cap="flat" cmpd="sng" algn="ctr">
-                      <a:solidFill>
-                        <a:srgbClr val="D8DBE0"/>
-                      </a:solidFill>
-                      <a:prstDash val="solid"/>
-                      <a:round/>
-                      <a:headEnd type="none" w="med" len="med"/>
-                      <a:tailEnd type="none" w="med" len="med"/>
-                    </a:lnL>
-                    <a:lnR w="9525" cap="flat" cmpd="sng" algn="ctr">
-                      <a:solidFill>
-                        <a:srgbClr val="D8DBE0"/>
-                      </a:solidFill>
-                      <a:prstDash val="solid"/>
-                      <a:round/>
-                      <a:headEnd type="none" w="med" len="med"/>
-                      <a:tailEnd type="none" w="med" len="med"/>
-                    </a:lnR>
-                    <a:lnT w="9525" cap="flat" cmpd="sng" algn="ctr">
-                      <a:solidFill>
-                        <a:srgbClr val="D8DBE0"/>
-                      </a:solidFill>
-                      <a:prstDash val="solid"/>
-                      <a:round/>
-                      <a:headEnd type="none" w="med" len="med"/>
-                      <a:tailEnd type="none" w="med" len="med"/>
-                    </a:lnT>
-                    <a:lnB w="9525" cap="flat" cmpd="sng" algn="ctr">
-                      <a:solidFill>
-                        <a:srgbClr val="D8DBE0"/>
-                      </a:solidFill>
-                      <a:prstDash val="solid"/>
-                      <a:round/>
-                      <a:headEnd type="none" w="med" len="med"/>
-                      <a:tailEnd type="none" w="med" len="med"/>
-                    </a:lnB>
-                    <a:solidFill>
-                      <a:srgbClr val="FFFFFF"/>
-                    </a:solidFill>
-                  </a:tcPr>
-                </a:tc>
-              </a:tr>
-              <a:tr h="420624">
-                <a:tc>
-                  <a:txBody>
-                    <a:bodyPr/>
-                    <a:lstStyle/>
-                    <a:p>
-                      <a:pPr algn="ctr" indent="0" marL="0">
-                        <a:buNone/>
-                      </a:pPr>
-                      <a:r>
-                        <a:rPr lang="en-US" sz="1400" dirty="0">
-                          <a:solidFill>
-                            <a:srgbClr val="1F2329"/>
-                          </a:solidFill>
-                          <a:latin typeface="微软雅黑" pitchFamily="34" charset="0"/>
-                          <a:ea typeface="微软雅黑" pitchFamily="34" charset="-122"/>
-                          <a:cs typeface="微软雅黑" pitchFamily="34" charset="-120"/>
-                        </a:rPr>
-                        <a:t>5 ={0}是简写、{INF}必须写循环</a:t>
-                      </a:r>
-                      <a:endParaRPr lang="en-US" sz="1400" dirty="0">
-                        <a:latin typeface="微软雅黑" charset="0"/>
-                        <a:ea typeface="微软雅黑" charset="0"/>
-                        <a:cs typeface="微软雅黑" charset="0"/>
-                      </a:endParaRPr>
-                    </a:p>
-                  </a:txBody>
-                  <a:tcPr marL="91440" marR="91440" marT="45720" marB="45720" anchor="ctr">
-                    <a:lnL w="9525" cap="flat" cmpd="sng" algn="ctr">
-                      <a:solidFill>
-                        <a:srgbClr val="D8DBE0"/>
-                      </a:solidFill>
-                      <a:prstDash val="solid"/>
-                      <a:round/>
-                      <a:headEnd type="none" w="med" len="med"/>
-                      <a:tailEnd type="none" w="med" len="med"/>
-                    </a:lnL>
-                    <a:lnR w="9525" cap="flat" cmpd="sng" algn="ctr">
-                      <a:solidFill>
-                        <a:srgbClr val="D8DBE0"/>
-                      </a:solidFill>
-                      <a:prstDash val="solid"/>
-                      <a:round/>
-                      <a:headEnd type="none" w="med" len="med"/>
-                      <a:tailEnd type="none" w="med" len="med"/>
-                    </a:lnR>
-                    <a:lnT w="9525" cap="flat" cmpd="sng" algn="ctr">
-                      <a:solidFill>
-                        <a:srgbClr val="D8DBE0"/>
-                      </a:solidFill>
-                      <a:prstDash val="solid"/>
-                      <a:round/>
-                      <a:headEnd type="none" w="med" len="med"/>
-                      <a:tailEnd type="none" w="med" len="med"/>
-                    </a:lnT>
-                    <a:lnB w="9525" cap="flat" cmpd="sng" algn="ctr">
-                      <a:solidFill>
-                        <a:srgbClr val="D8DBE0"/>
-                      </a:solidFill>
-                      <a:prstDash val="solid"/>
-                      <a:round/>
-                      <a:headEnd type="none" w="med" len="med"/>
-                      <a:tailEnd type="none" w="med" len="med"/>
-                    </a:lnB>
-                    <a:solidFill>
-                      <a:srgbClr val="FFFFFF"/>
-                    </a:solidFill>
-                  </a:tcPr>
-                </a:tc>
-                <a:tc>
-                  <a:txBody>
-                    <a:bodyPr/>
-                    <a:lstStyle/>
-                    <a:p>
-                      <a:pPr algn="ctr" indent="0" marL="0">
-                        <a:buNone/>
-                      </a:pPr>
-                      <a:r>
-                        <a:rPr lang="en-US" sz="1400" dirty="0">
-                          <a:solidFill>
-                            <a:srgbClr val="1F2329"/>
-                          </a:solidFill>
-                          <a:latin typeface="微软雅黑" pitchFamily="34" charset="0"/>
-                          <a:ea typeface="微软雅黑" pitchFamily="34" charset="-122"/>
-                          <a:cs typeface="微软雅黑" pitchFamily="34" charset="-120"/>
-                        </a:rPr>
-                        <a:t>避免只初始化第一个元素的错误</a:t>
-                      </a:r>
-                      <a:endParaRPr lang="en-US" sz="1400" dirty="0">
-                        <a:latin typeface="微软雅黑" charset="0"/>
-                        <a:ea typeface="微软雅黑" charset="0"/>
-                        <a:cs typeface="微软雅黑" charset="0"/>
-                      </a:endParaRPr>
-                    </a:p>
-                  </a:txBody>
-                  <a:tcPr marL="91440" marR="91440" marT="45720" marB="45720" anchor="ctr">
-                    <a:lnL w="9525" cap="flat" cmpd="sng" algn="ctr">
-                      <a:solidFill>
-                        <a:srgbClr val="D8DBE0"/>
-                      </a:solidFill>
-                      <a:prstDash val="solid"/>
-                      <a:round/>
-                      <a:headEnd type="none" w="med" len="med"/>
-                      <a:tailEnd type="none" w="med" len="med"/>
-                    </a:lnL>
-                    <a:lnR w="9525" cap="flat" cmpd="sng" algn="ctr">
-                      <a:solidFill>
-                        <a:srgbClr val="D8DBE0"/>
-                      </a:solidFill>
-                      <a:prstDash val="solid"/>
-                      <a:round/>
-                      <a:headEnd type="none" w="med" len="med"/>
-                      <a:tailEnd type="none" w="med" len="med"/>
-                    </a:lnR>
-                    <a:lnT w="9525" cap="flat" cmpd="sng" algn="ctr">
-                      <a:solidFill>
-                        <a:srgbClr val="D8DBE0"/>
-                      </a:solidFill>
-                      <a:prstDash val="solid"/>
-                      <a:round/>
-                      <a:headEnd type="none" w="med" len="med"/>
-                      <a:tailEnd type="none" w="med" len="med"/>
-                    </a:lnT>
-                    <a:lnB w="9525" cap="flat" cmpd="sng" algn="ctr">
-                      <a:solidFill>
-                        <a:srgbClr val="D8DBE0"/>
-                      </a:solidFill>
-                      <a:prstDash val="solid"/>
-                      <a:round/>
-                      <a:headEnd type="none" w="med" len="med"/>
-                      <a:tailEnd type="none" w="med" len="med"/>
-                    </a:lnB>
-                    <a:solidFill>
-                      <a:srgbClr val="FFFFFF"/>
-                    </a:solidFill>
-                  </a:tcPr>
-                </a:tc>
-              </a:tr>
-              <a:tr h="420624">
-                <a:tc>
-                  <a:txBody>
-                    <a:bodyPr/>
-                    <a:lstStyle/>
-                    <a:p>
-                      <a:pPr algn="ctr" indent="0" marL="0">
-                        <a:buNone/>
-                      </a:pPr>
-                      <a:r>
-                        <a:rPr lang="en-US" sz="1400" dirty="0">
-                          <a:solidFill>
-                            <a:srgbClr val="1F2329"/>
-                          </a:solidFill>
-                          <a:latin typeface="微软雅黑" pitchFamily="34" charset="0"/>
-                          <a:ea typeface="微软雅黑" pitchFamily="34" charset="-122"/>
-                          <a:cs typeface="微软雅黑" pitchFamily="34" charset="-120"/>
-                        </a:rPr>
-                        <a:t>6 参数用引用 &amp;</a:t>
-                      </a:r>
-                      <a:endParaRPr lang="en-US" sz="1400" dirty="0">
-                        <a:latin typeface="微软雅黑" charset="0"/>
-                        <a:ea typeface="微软雅黑" charset="0"/>
-                        <a:cs typeface="微软雅黑" charset="0"/>
-                      </a:endParaRPr>
-                    </a:p>
-                  </a:txBody>
-                  <a:tcPr marL="91440" marR="91440" marT="45720" marB="45720" anchor="ctr">
-                    <a:lnL w="9525" cap="flat" cmpd="sng" algn="ctr">
-                      <a:solidFill>
-                        <a:srgbClr val="D8DBE0"/>
-                      </a:solidFill>
-                      <a:prstDash val="solid"/>
-                      <a:round/>
-                      <a:headEnd type="none" w="med" len="med"/>
-                      <a:tailEnd type="none" w="med" len="med"/>
-                    </a:lnL>
-                    <a:lnR w="9525" cap="flat" cmpd="sng" algn="ctr">
-                      <a:solidFill>
-                        <a:srgbClr val="D8DBE0"/>
-                      </a:solidFill>
-                      <a:prstDash val="solid"/>
-                      <a:round/>
-                      <a:headEnd type="none" w="med" len="med"/>
-                      <a:tailEnd type="none" w="med" len="med"/>
-                    </a:lnR>
-                    <a:lnT w="9525" cap="flat" cmpd="sng" algn="ctr">
-                      <a:solidFill>
-                        <a:srgbClr val="D8DBE0"/>
-                      </a:solidFill>
-                      <a:prstDash val="solid"/>
-                      <a:round/>
-                      <a:headEnd type="none" w="med" len="med"/>
-                      <a:tailEnd type="none" w="med" len="med"/>
-                    </a:lnT>
-                    <a:lnB w="9525" cap="flat" cmpd="sng" algn="ctr">
-                      <a:solidFill>
-                        <a:srgbClr val="D8DBE0"/>
-                      </a:solidFill>
-                      <a:prstDash val="solid"/>
-                      <a:round/>
-                      <a:headEnd type="none" w="med" len="med"/>
-                      <a:tailEnd type="none" w="med" len="med"/>
-                    </a:lnB>
-                    <a:solidFill>
-                      <a:srgbClr val="FFFFFF"/>
-                    </a:solidFill>
-                  </a:tcPr>
-                </a:tc>
-                <a:tc>
-                  <a:txBody>
-                    <a:bodyPr/>
-                    <a:lstStyle/>
-                    <a:p>
-                      <a:pPr algn="ctr" indent="0" marL="0">
-                        <a:buNone/>
-                      </a:pPr>
-                      <a:r>
-                        <a:rPr lang="en-US" sz="1400" dirty="0">
-                          <a:solidFill>
-                            <a:srgbClr val="1F2329"/>
-                          </a:solidFill>
-                          <a:latin typeface="微软雅黑" pitchFamily="34" charset="0"/>
-                          <a:ea typeface="微软雅黑" pitchFamily="34" charset="-122"/>
-                          <a:cs typeface="微软雅黑" pitchFamily="34" charset="-120"/>
-                        </a:rPr>
-                        <a:t>让函数改得动调用处的数据</a:t>
-                      </a:r>
-                      <a:endParaRPr lang="en-US" sz="1400" dirty="0">
-                        <a:latin typeface="微软雅黑" charset="0"/>
-                        <a:ea typeface="微软雅黑" charset="0"/>
-                        <a:cs typeface="微软雅黑" charset="0"/>
-                      </a:endParaRPr>
-                    </a:p>
-                  </a:txBody>
-                  <a:tcPr marL="91440" marR="91440" marT="45720" marB="45720" anchor="ctr">
-                    <a:lnL w="9525" cap="flat" cmpd="sng" algn="ctr">
-                      <a:solidFill>
-                        <a:srgbClr val="D8DBE0"/>
-                      </a:solidFill>
-                      <a:prstDash val="solid"/>
-                      <a:round/>
-                      <a:headEnd type="none" w="med" len="med"/>
-                      <a:tailEnd type="none" w="med" len="med"/>
-                    </a:lnL>
-                    <a:lnR w="9525" cap="flat" cmpd="sng" algn="ctr">
-                      <a:solidFill>
-                        <a:srgbClr val="D8DBE0"/>
-                      </a:solidFill>
-                      <a:prstDash val="solid"/>
-                      <a:round/>
-                      <a:headEnd type="none" w="med" len="med"/>
-                      <a:tailEnd type="none" w="med" len="med"/>
-                    </a:lnR>
-                    <a:lnT w="9525" cap="flat" cmpd="sng" algn="ctr">
-                      <a:solidFill>
-                        <a:srgbClr val="D8DBE0"/>
-                      </a:solidFill>
-                      <a:prstDash val="solid"/>
-                      <a:round/>
-                      <a:headEnd type="none" w="med" len="med"/>
-                      <a:tailEnd type="none" w="med" len="med"/>
-                    </a:lnT>
-                    <a:lnB w="9525" cap="flat" cmpd="sng" algn="ctr">
-                      <a:solidFill>
-                        <a:srgbClr val="D8DBE0"/>
-                      </a:solidFill>
-                      <a:prstDash val="solid"/>
-                      <a:round/>
-                      <a:headEnd type="none" w="med" len="med"/>
-                      <a:tailEnd type="none" w="med" len="med"/>
-                    </a:lnB>
-                    <a:solidFill>
-                      <a:srgbClr val="FFFFFF"/>
-                    </a:solidFill>
-                  </a:tcPr>
-                </a:tc>
-              </a:tr>
-            </a:tbl>
-          </a:graphicData>
-        </a:graphic>
-      </p:graphicFrame>
-      <p:sp>
-        <p:nvSpPr>
-          <p:cNvPr id="8" name="Text 5"/>
-          <p:cNvSpPr/>
-          <p:nvPr/>
-        </p:nvSpPr>
-        <p:spPr>
-          <a:xfrm>
-            <a:off x="822960" y="5568696"/>
-            <a:ext cx="10545775" cy="339852"/>
+      <p:sp>
+        <p:nvSpPr>
+          <p:cNvPr id="7" name="Shape 5"/>
+          <p:cNvSpPr/>
+          <p:nvPr/>
+        </p:nvSpPr>
+        <p:spPr>
+          <a:xfrm>
+            <a:off x="822960" y="2395728"/>
+            <a:ext cx="10545775" cy="1984248"/>
+          </a:xfrm>
+          <a:prstGeom prst="rect">
+            <a:avLst/>
+          </a:prstGeom>
+          <a:solidFill>
+            <a:srgbClr val="F7F9FC"/>
+          </a:solidFill>
+          <a:ln/>
+        </p:spPr>
+      </p:sp>
+      <p:sp>
+        <p:nvSpPr>
+          <p:cNvPr id="8" name="Shape 6"/>
+          <p:cNvSpPr/>
+          <p:nvPr/>
+        </p:nvSpPr>
+        <p:spPr>
+          <a:xfrm>
+            <a:off x="822960" y="2395728"/>
+            <a:ext cx="50292" cy="1984248"/>
+          </a:xfrm>
+          <a:prstGeom prst="rect">
+            <a:avLst/>
+          </a:prstGeom>
+          <a:solidFill>
+            <a:srgbClr val="1F4E9C"/>
+          </a:solidFill>
+          <a:ln/>
+        </p:spPr>
+      </p:sp>
+      <p:sp>
+        <p:nvSpPr>
+          <p:cNvPr id="9" name="Text 7"/>
+          <p:cNvSpPr/>
+          <p:nvPr/>
+        </p:nvSpPr>
+        <p:spPr>
+          <a:xfrm>
+            <a:off x="1078992" y="2505456"/>
+            <a:ext cx="10033711" cy="1764792"/>
           </a:xfrm>
           <a:prstGeom prst="rect">
             <a:avLst/>
@@ -11240,20 +9731,197 @@
           <a:lstStyle/>
           <a:p>
             <a:pPr algn="l" indent="0" marL="0">
+              <a:lnSpc>
+                <a:spcPct val="125000"/>
+              </a:lnSpc>
               <a:buNone/>
             </a:pPr>
             <a:r>
               <a:rPr lang="en-US" sz="1400" dirty="0">
                 <a:solidFill>
-                  <a:srgbClr val="8A9099"/>
+                  <a:srgbClr val="1F2329"/>
+                </a:solidFill>
+                <a:latin typeface="Consolas" pitchFamily="34" charset="0"/>
+                <a:ea typeface="Consolas" pitchFamily="34" charset="-122"/>
+                <a:cs typeface="Consolas" pitchFamily="34" charset="-120"/>
+              </a:rPr>
+              <a:t>int countNegative(int a[], int n){
+    int cnt = 0;
+    for(int i = 0; i &lt; n; i++)
+        if(a[i] &lt; 0) cnt++;
+    return cnt;
+}
+</a:t>
+            </a:r>
+            <a:endParaRPr lang="en-US" sz="1400" dirty="0"/>
+          </a:p>
+        </p:txBody>
+      </p:sp>
+      <p:sp>
+        <p:nvSpPr>
+          <p:cNvPr id="10" name="Text 8"/>
+          <p:cNvSpPr/>
+          <p:nvPr/>
+        </p:nvSpPr>
+        <p:spPr>
+          <a:xfrm>
+            <a:off x="896112" y="4581144"/>
+            <a:ext cx="10454335" cy="397764"/>
+          </a:xfrm>
+          <a:prstGeom prst="rect">
+            <a:avLst/>
+          </a:prstGeom>
+          <a:noFill/>
+          <a:ln/>
+        </p:spPr>
+        <p:txBody>
+          <a:bodyPr wrap="square" rtlCol="0" anchor="t"/>
+          <a:lstStyle/>
+          <a:p>
+            <a:pPr algn="l" indent="0" marL="0">
+              <a:lnSpc>
+                <a:spcPct val="115000"/>
+              </a:lnSpc>
+              <a:buNone/>
+            </a:pPr>
+            <a:r>
+              <a:rPr lang="en-US" sz="1800" b="1" dirty="0">
+                <a:solidFill>
+                  <a:srgbClr val="1F4E9C"/>
                 </a:solidFill>
                 <a:latin typeface="微软雅黑" pitchFamily="34" charset="0"/>
                 <a:ea typeface="微软雅黑" pitchFamily="34" charset="-122"/>
                 <a:cs typeface="微软雅黑" pitchFamily="34" charset="-120"/>
               </a:rPr>
-              <a:t>这六条出自代码总结开篇，后面每一节的代码都依赖它们，尤其依赖第1条</a:t>
-            </a:r>
-            <a:endParaRPr lang="en-US" sz="1400" dirty="0"/>
+              <a:t>•  </a:t>
+            </a:r>
+            <a:pPr algn="l" indent="0" marL="0">
+              <a:lnSpc>
+                <a:spcPct val="115000"/>
+              </a:lnSpc>
+              <a:buNone/>
+            </a:pPr>
+            <a:r>
+              <a:rPr lang="en-US" sz="1800" dirty="0">
+                <a:solidFill>
+                  <a:srgbClr val="000000"/>
+                </a:solidFill>
+              </a:rPr>
+              <a:t>不用写 #include 和 main，直接写函数就行，这就是伪代码</a:t>
+            </a:r>
+            <a:endParaRPr lang="en-US" sz="1800" dirty="0"/>
+          </a:p>
+        </p:txBody>
+      </p:sp>
+      <p:sp>
+        <p:nvSpPr>
+          <p:cNvPr id="11" name="Text 9"/>
+          <p:cNvSpPr/>
+          <p:nvPr/>
+        </p:nvSpPr>
+        <p:spPr>
+          <a:xfrm>
+            <a:off x="896112" y="5052060"/>
+            <a:ext cx="10454335" cy="397764"/>
+          </a:xfrm>
+          <a:prstGeom prst="rect">
+            <a:avLst/>
+          </a:prstGeom>
+          <a:noFill/>
+          <a:ln/>
+        </p:spPr>
+        <p:txBody>
+          <a:bodyPr wrap="square" rtlCol="0" anchor="t"/>
+          <a:lstStyle/>
+          <a:p>
+            <a:pPr algn="l" indent="0" marL="0">
+              <a:lnSpc>
+                <a:spcPct val="115000"/>
+              </a:lnSpc>
+              <a:buNone/>
+            </a:pPr>
+            <a:r>
+              <a:rPr lang="en-US" sz="1800" b="1" dirty="0">
+                <a:solidFill>
+                  <a:srgbClr val="1F4E9C"/>
+                </a:solidFill>
+                <a:latin typeface="微软雅黑" pitchFamily="34" charset="0"/>
+                <a:ea typeface="微软雅黑" pitchFamily="34" charset="-122"/>
+                <a:cs typeface="微软雅黑" pitchFamily="34" charset="-120"/>
+              </a:rPr>
+              <a:t>•  </a:t>
+            </a:r>
+            <a:pPr algn="l" indent="0" marL="0">
+              <a:lnSpc>
+                <a:spcPct val="115000"/>
+              </a:lnSpc>
+              <a:buNone/>
+            </a:pPr>
+            <a:r>
+              <a:rPr lang="en-US" sz="1800" dirty="0">
+                <a:solidFill>
+                  <a:srgbClr val="000000"/>
+                </a:solidFill>
+              </a:rPr>
+              <a:t>802 看重思路不抠语法：思路对、边界全，语法上有小错照样给分</a:t>
+            </a:r>
+            <a:endParaRPr lang="en-US" sz="1800" dirty="0"/>
+          </a:p>
+        </p:txBody>
+      </p:sp>
+      <p:sp>
+        <p:nvSpPr>
+          <p:cNvPr id="12" name="Text 10"/>
+          <p:cNvSpPr/>
+          <p:nvPr/>
+        </p:nvSpPr>
+        <p:spPr>
+          <a:xfrm>
+            <a:off x="896112" y="5522976"/>
+            <a:ext cx="10454335" cy="397764"/>
+          </a:xfrm>
+          <a:prstGeom prst="rect">
+            <a:avLst/>
+          </a:prstGeom>
+          <a:noFill/>
+          <a:ln/>
+        </p:spPr>
+        <p:txBody>
+          <a:bodyPr wrap="square" rtlCol="0" anchor="t"/>
+          <a:lstStyle/>
+          <a:p>
+            <a:pPr algn="l" indent="0" marL="0">
+              <a:lnSpc>
+                <a:spcPct val="115000"/>
+              </a:lnSpc>
+              <a:buNone/>
+            </a:pPr>
+            <a:r>
+              <a:rPr lang="en-US" sz="1800" b="1" dirty="0">
+                <a:solidFill>
+                  <a:srgbClr val="1F4E9C"/>
+                </a:solidFill>
+                <a:latin typeface="微软雅黑" pitchFamily="34" charset="0"/>
+                <a:ea typeface="微软雅黑" pitchFamily="34" charset="-122"/>
+                <a:cs typeface="微软雅黑" pitchFamily="34" charset="-120"/>
+              </a:rPr>
+              <a:t>•  </a:t>
+            </a:r>
+            <a:pPr algn="l" indent="0" marL="0">
+              <a:lnSpc>
+                <a:spcPct val="115000"/>
+              </a:lnSpc>
+              <a:buNone/>
+            </a:pPr>
+            <a:r>
+              <a:rPr lang="en-US" sz="1800" dirty="0">
+                <a:solidFill>
+                  <a:srgbClr val="000000"/>
+                </a:solidFill>
+              </a:rPr>
+              <a:t>但结构体定义、函数签名、边界判断这三样必须写完整，它们是评分点</a:t>
+            </a:r>
+            <a:endParaRPr lang="en-US" sz="1800" dirty="0"/>
           </a:p>
         </p:txBody>
       </p:sp>
@@ -11329,7 +9997,7 @@
                 <a:ea typeface="微软雅黑" pitchFamily="34" charset="-122"/>
                 <a:cs typeface="微软雅黑" pitchFamily="34" charset="-120"/>
               </a:rPr>
-              <a:t>7 / 17</a:t>
+              <a:t>7 / 16</a:t>
             </a:r>
             <a:endParaRPr lang="en-US" sz="1000" dirty="0"/>
           </a:p>
@@ -11368,7 +10036,7 @@
                 <a:ea typeface="微软雅黑" pitchFamily="34" charset="-122"/>
                 <a:cs typeface="微软雅黑" pitchFamily="34" charset="-120"/>
               </a:rPr>
-              <a:t>约定1 · 两套下标基准</a:t>
+              <a:t>答题格式</a:t>
             </a:r>
             <a:endParaRPr lang="en-US" sz="1400" dirty="0"/>
           </a:p>
@@ -11407,7 +10075,7 @@
                 <a:ea typeface="微软雅黑" pitchFamily="34" charset="-122"/>
                 <a:cs typeface="微软雅黑" pitchFamily="34" charset="-120"/>
               </a:rPr>
-              <a:t>同一份数据，两种存放（拿纸跟着画）</a:t>
+              <a:t>一道算法题的答案分三件</a:t>
             </a:r>
             <a:endParaRPr lang="en-US" sz="2800" dirty="0"/>
           </a:p>
@@ -11422,7 +10090,7 @@
         <p:spPr>
           <a:xfrm>
             <a:off x="896112" y="2395728"/>
-            <a:ext cx="10454335" cy="626364"/>
+            <a:ext cx="10454335" cy="397764"/>
           </a:xfrm>
           <a:prstGeom prst="rect">
             <a:avLst/>
@@ -11441,7 +10109,7 @@
               <a:buNone/>
             </a:pPr>
             <a:r>
-              <a:rPr lang="en-US" sz="1500" b="1" dirty="0">
+              <a:rPr lang="en-US" sz="1800" b="1" dirty="0">
                 <a:solidFill>
                   <a:srgbClr val="1F4E9C"/>
                 </a:solidFill>
@@ -11458,14 +10126,14 @@
               <a:buNone/>
             </a:pPr>
             <a:r>
-              <a:rPr lang="en-US" sz="1500" dirty="0">
+              <a:rPr lang="en-US" sz="1800" dirty="0">
                 <a:solidFill>
                   <a:srgbClr val="000000"/>
                 </a:solidFill>
               </a:rPr>
-              <a:t>① 左边画 data[0] 到 data[4]，依次存 10、20、30、40、50，这是线性表与查找章节的存法，下标从 0 起</a:t>
-            </a:r>
-            <a:endParaRPr lang="en-US" sz="1500" dirty="0"/>
+              <a:t>第一件，算法思想：用文字说清你打算怎么做，分几步、每步干什么</a:t>
+            </a:r>
+            <a:endParaRPr lang="en-US" sz="1800" dirty="0"/>
           </a:p>
         </p:txBody>
       </p:sp>
@@ -11477,8 +10145,8 @@
         </p:nvSpPr>
         <p:spPr>
           <a:xfrm>
-            <a:off x="896112" y="3095244"/>
-            <a:ext cx="10454335" cy="626364"/>
+            <a:off x="896112" y="2866644"/>
+            <a:ext cx="10454335" cy="397764"/>
           </a:xfrm>
           <a:prstGeom prst="rect">
             <a:avLst/>
@@ -11497,7 +10165,7 @@
               <a:buNone/>
             </a:pPr>
             <a:r>
-              <a:rPr lang="en-US" sz="1500" b="1" dirty="0">
+              <a:rPr lang="en-US" sz="1800" b="1" dirty="0">
                 <a:solidFill>
                   <a:srgbClr val="1F4E9C"/>
                 </a:solidFill>
@@ -11514,14 +10182,14 @@
               <a:buNone/>
             </a:pPr>
             <a:r>
-              <a:rPr lang="en-US" sz="1500" dirty="0">
+              <a:rPr lang="en-US" sz="1800" dirty="0">
                 <a:solidFill>
                   <a:srgbClr val="000000"/>
                 </a:solidFill>
               </a:rPr>
-              <a:t>② 右边画 data[0] 空着当哨兵，data[1] 到 data[5] 存同样这五个数，这是排序章节的存法，下标从 1 起</a:t>
-            </a:r>
-            <a:endParaRPr lang="en-US" sz="1500" dirty="0"/>
+              <a:t>第二件，代码：伪代码就行，结构体定义和边界判断要完整</a:t>
+            </a:r>
+            <a:endParaRPr lang="en-US" sz="1800" dirty="0"/>
           </a:p>
         </p:txBody>
       </p:sp>
@@ -11533,8 +10201,8 @@
         </p:nvSpPr>
         <p:spPr>
           <a:xfrm>
-            <a:off x="896112" y="3794760"/>
-            <a:ext cx="10454335" cy="340614"/>
+            <a:off x="896112" y="3337560"/>
+            <a:ext cx="10454335" cy="397764"/>
           </a:xfrm>
           <a:prstGeom prst="rect">
             <a:avLst/>
@@ -11553,7 +10221,7 @@
               <a:buNone/>
             </a:pPr>
             <a:r>
-              <a:rPr lang="en-US" sz="1500" b="1" dirty="0">
+              <a:rPr lang="en-US" sz="1800" b="1" dirty="0">
                 <a:solidFill>
                   <a:srgbClr val="1F4E9C"/>
                 </a:solidFill>
@@ -11570,106 +10238,53 @@
               <a:buNone/>
             </a:pPr>
             <a:r>
+              <a:rPr lang="en-US" sz="1800" dirty="0">
+                <a:solidFill>
+                  <a:srgbClr val="000000"/>
+                </a:solidFill>
+              </a:rPr>
+              <a:t>第三件，复杂度：时间和空间各给一个结论，再各配一句理由</a:t>
+            </a:r>
+            <a:endParaRPr lang="en-US" sz="1800" dirty="0"/>
+          </a:p>
+        </p:txBody>
+      </p:sp>
+      <p:sp>
+        <p:nvSpPr>
+          <p:cNvPr id="8" name="Text 6"/>
+          <p:cNvSpPr/>
+          <p:nvPr/>
+        </p:nvSpPr>
+        <p:spPr>
+          <a:xfrm>
+            <a:off x="822960" y="3899916"/>
+            <a:ext cx="10545775" cy="358902"/>
+          </a:xfrm>
+          <a:prstGeom prst="rect">
+            <a:avLst/>
+          </a:prstGeom>
+          <a:noFill/>
+          <a:ln/>
+        </p:spPr>
+        <p:txBody>
+          <a:bodyPr wrap="square" rtlCol="0" anchor="t"/>
+          <a:lstStyle/>
+          <a:p>
+            <a:pPr algn="l" indent="0" marL="0">
+              <a:buNone/>
+            </a:pPr>
+            <a:r>
               <a:rPr lang="en-US" sz="1500" dirty="0">
                 <a:solidFill>
-                  <a:srgbClr val="000000"/>
-                </a:solidFill>
-              </a:rPr>
-              <a:t>③ 线性表这套：第 i 个元素是 data[i-1]；排序那套：第 i 个元素就是 data[i]</a:t>
-            </a:r>
-            <a:endParaRPr lang="en-US" sz="1500" dirty="0"/>
-          </a:p>
-        </p:txBody>
-      </p:sp>
-      <p:sp>
-        <p:nvSpPr>
-          <p:cNvPr id="8" name="Text 6"/>
-          <p:cNvSpPr/>
-          <p:nvPr/>
-        </p:nvSpPr>
-        <p:spPr>
-          <a:xfrm>
-            <a:off x="896112" y="4208526"/>
-            <a:ext cx="10454335" cy="626364"/>
-          </a:xfrm>
-          <a:prstGeom prst="rect">
-            <a:avLst/>
-          </a:prstGeom>
-          <a:noFill/>
-          <a:ln/>
-        </p:spPr>
-        <p:txBody>
-          <a:bodyPr wrap="square" rtlCol="0" anchor="t"/>
-          <a:lstStyle/>
-          <a:p>
-            <a:pPr algn="l" indent="0" marL="0">
-              <a:lnSpc>
-                <a:spcPct val="115000"/>
-              </a:lnSpc>
-              <a:buNone/>
-            </a:pPr>
-            <a:r>
-              <a:rPr lang="en-US" sz="1500" b="1" dirty="0">
-                <a:solidFill>
-                  <a:srgbClr val="1F4E9C"/>
+                  <a:srgbClr val="8A9099"/>
                 </a:solidFill>
                 <a:latin typeface="微软雅黑" pitchFamily="34" charset="0"/>
                 <a:ea typeface="微软雅黑" pitchFamily="34" charset="-122"/>
                 <a:cs typeface="微软雅黑" pitchFamily="34" charset="-120"/>
               </a:rPr>
-              <a:t>•  </a:t>
-            </a:r>
-            <a:pPr algn="l" indent="0" marL="0">
-              <a:lnSpc>
-                <a:spcPct val="115000"/>
-              </a:lnSpc>
-              <a:buNone/>
-            </a:pPr>
-            <a:r>
-              <a:rPr lang="en-US" sz="1500" dirty="0">
-                <a:solidFill>
-                  <a:srgbClr val="000000"/>
-                </a:solidFill>
-              </a:rPr>
-              <a:t>④ 排序为什么从 1 起：堆排序要求 2i 是左孩子，从 0 起这个关系就变成 2i+1，教材统一从 1</a:t>
+              <a:t>三件缺一件就扣一件的分；很多人只写代码，思想和复杂度空着，白白丢分</a:t>
             </a:r>
             <a:endParaRPr lang="en-US" sz="1500" dirty="0"/>
-          </a:p>
-        </p:txBody>
-      </p:sp>
-      <p:sp>
-        <p:nvSpPr>
-          <p:cNvPr id="9" name="Text 7"/>
-          <p:cNvSpPr/>
-          <p:nvPr/>
-        </p:nvSpPr>
-        <p:spPr>
-          <a:xfrm>
-            <a:off x="822960" y="4999482"/>
-            <a:ext cx="10545775" cy="358902"/>
-          </a:xfrm>
-          <a:prstGeom prst="rect">
-            <a:avLst/>
-          </a:prstGeom>
-          <a:noFill/>
-          <a:ln/>
-        </p:spPr>
-        <p:txBody>
-          <a:bodyPr wrap="square" rtlCol="0" anchor="t"/>
-          <a:lstStyle/>
-          <a:p>
-            <a:pPr algn="l" indent="0" marL="0">
-              <a:buNone/>
-            </a:pPr>
-            <a:r>
-              <a:rPr lang="en-US" dirty="0">
-                <a:solidFill>
-                  <a:srgbClr val="000000"/>
-                </a:solidFill>
-              </a:rPr>
-              <a:t>答题开头写一句“本题下标从 0 起”或“从 1 起”，阅卷不挑刺；同一道题里前后矛盾才扣分</a:t>
-            </a:r>
-            <a:endParaRPr lang="en-US" dirty="0"/>
           </a:p>
         </p:txBody>
       </p:sp>
@@ -11745,7 +10360,7 @@
                 <a:ea typeface="微软雅黑" pitchFamily="34" charset="-122"/>
                 <a:cs typeface="微软雅黑" pitchFamily="34" charset="-120"/>
               </a:rPr>
-              <a:t>8 / 17</a:t>
+              <a:t>8 / 16</a:t>
             </a:r>
             <a:endParaRPr lang="en-US" sz="1000" dirty="0"/>
           </a:p>
@@ -11784,7 +10399,7 @@
                 <a:ea typeface="微软雅黑" pitchFamily="34" charset="-122"/>
                 <a:cs typeface="微软雅黑" pitchFamily="34" charset="-120"/>
               </a:rPr>
-              <a:t>约定2—4</a:t>
+              <a:t>答题格式 · 样例</a:t>
             </a:r>
             <a:endParaRPr lang="en-US" sz="1400" dirty="0"/>
           </a:p>
@@ -11823,7 +10438,7 @@
                 <a:ea typeface="微软雅黑" pitchFamily="34" charset="-122"/>
                 <a:cs typeface="微软雅黑" pitchFamily="34" charset="-120"/>
               </a:rPr>
-              <a:t>带头结点、top=-1与牺牲一单元、元素类型按需替换</a:t>
+              <a:t>三件套写出来长这样</a:t>
             </a:r>
             <a:endParaRPr lang="en-US" sz="2800" dirty="0"/>
           </a:p>
@@ -11831,14 +10446,54 @@
       </p:sp>
       <p:sp>
         <p:nvSpPr>
-          <p:cNvPr id="5" name="Text 3"/>
-          <p:cNvSpPr/>
-          <p:nvPr/>
-        </p:nvSpPr>
-        <p:spPr>
-          <a:xfrm>
-            <a:off x="896112" y="2395728"/>
-            <a:ext cx="10454335" cy="740664"/>
+          <p:cNvPr id="5" name="Shape 3"/>
+          <p:cNvSpPr/>
+          <p:nvPr/>
+        </p:nvSpPr>
+        <p:spPr>
+          <a:xfrm>
+            <a:off x="822960" y="2395728"/>
+            <a:ext cx="10545775" cy="2459736"/>
+          </a:xfrm>
+          <a:prstGeom prst="rect">
+            <a:avLst/>
+          </a:prstGeom>
+          <a:solidFill>
+            <a:srgbClr val="F7F9FC"/>
+          </a:solidFill>
+          <a:ln/>
+        </p:spPr>
+      </p:sp>
+      <p:sp>
+        <p:nvSpPr>
+          <p:cNvPr id="6" name="Shape 4"/>
+          <p:cNvSpPr/>
+          <p:nvPr/>
+        </p:nvSpPr>
+        <p:spPr>
+          <a:xfrm>
+            <a:off x="822960" y="2395728"/>
+            <a:ext cx="50292" cy="2459736"/>
+          </a:xfrm>
+          <a:prstGeom prst="rect">
+            <a:avLst/>
+          </a:prstGeom>
+          <a:solidFill>
+            <a:srgbClr val="1F4E9C"/>
+          </a:solidFill>
+          <a:ln/>
+        </p:spPr>
+      </p:sp>
+      <p:sp>
+        <p:nvSpPr>
+          <p:cNvPr id="7" name="Text 5"/>
+          <p:cNvSpPr/>
+          <p:nvPr/>
+        </p:nvSpPr>
+        <p:spPr>
+          <a:xfrm>
+            <a:off x="1078992" y="2505456"/>
+            <a:ext cx="10033711" cy="2240280"/>
           </a:xfrm>
           <a:prstGeom prst="rect">
             <a:avLst/>
@@ -11852,185 +10507,67 @@
           <a:p>
             <a:pPr algn="l" indent="0" marL="0">
               <a:lnSpc>
-                <a:spcPct val="115000"/>
+                <a:spcPct val="125000"/>
               </a:lnSpc>
               <a:buNone/>
             </a:pPr>
             <a:r>
-              <a:rPr lang="en-US" sz="1800" b="1" dirty="0">
-                <a:solidFill>
-                  <a:srgbClr val="1F4E9C"/>
+              <a:rPr lang="en-US" sz="1400" dirty="0">
+                <a:solidFill>
+                  <a:srgbClr val="1F2329"/>
+                </a:solidFill>
+                <a:latin typeface="Consolas" pitchFamily="34" charset="0"/>
+                <a:ea typeface="Consolas" pitchFamily="34" charset="-122"/>
+                <a:cs typeface="Consolas" pitchFamily="34" charset="-120"/>
+              </a:rPr>
+              <a:t>// 思想：先假定第一个元素最大，从第二个起逐个比，遇到更大的就换掉
+int findMax(int a[], int n){
+    int max = a[0];
+    for(int i = 1; i &lt; n; i++)
+        if(a[i] &gt; max) max = a[i];
+    return max;
+}
+// 复杂度：时间 O(n) 每个元素比一次；空间 O(1) 只用了 max 一个变量
+</a:t>
+            </a:r>
+            <a:endParaRPr lang="en-US" sz="1400" dirty="0"/>
+          </a:p>
+        </p:txBody>
+      </p:sp>
+      <p:sp>
+        <p:nvSpPr>
+          <p:cNvPr id="8" name="Text 6"/>
+          <p:cNvSpPr/>
+          <p:nvPr/>
+        </p:nvSpPr>
+        <p:spPr>
+          <a:xfrm>
+            <a:off x="822960" y="5056632"/>
+            <a:ext cx="10545775" cy="358902"/>
+          </a:xfrm>
+          <a:prstGeom prst="rect">
+            <a:avLst/>
+          </a:prstGeom>
+          <a:noFill/>
+          <a:ln/>
+        </p:spPr>
+        <p:txBody>
+          <a:bodyPr wrap="square" rtlCol="0" anchor="t"/>
+          <a:lstStyle/>
+          <a:p>
+            <a:pPr algn="l" indent="0" marL="0">
+              <a:buNone/>
+            </a:pPr>
+            <a:r>
+              <a:rPr lang="en-US" sz="1500" dirty="0">
+                <a:solidFill>
+                  <a:srgbClr val="8A9099"/>
                 </a:solidFill>
                 <a:latin typeface="微软雅黑" pitchFamily="34" charset="0"/>
                 <a:ea typeface="微软雅黑" pitchFamily="34" charset="-122"/>
                 <a:cs typeface="微软雅黑" pitchFamily="34" charset="-120"/>
               </a:rPr>
-              <a:t>•  </a:t>
-            </a:r>
-            <a:pPr algn="l" indent="0" marL="0">
-              <a:lnSpc>
-                <a:spcPct val="115000"/>
-              </a:lnSpc>
-              <a:buNone/>
-            </a:pPr>
-            <a:r>
-              <a:rPr lang="en-US" sz="1800" dirty="0">
-                <a:solidFill>
-                  <a:srgbClr val="000000"/>
-                </a:solidFill>
-              </a:rPr>
-              <a:t>约定2 链表默认带头结点：L 指向头结点，L-&gt;next 才是第一个数据结点；头结点让空表与非空表、第一个位置与其他位置用同一套式子（它的价值在第3节展开）</a:t>
-            </a:r>
-            <a:endParaRPr lang="en-US" sz="1800" dirty="0"/>
-          </a:p>
-        </p:txBody>
-      </p:sp>
-      <p:sp>
-        <p:nvSpPr>
-          <p:cNvPr id="6" name="Text 4"/>
-          <p:cNvSpPr/>
-          <p:nvPr/>
-        </p:nvSpPr>
-        <p:spPr>
-          <a:xfrm>
-            <a:off x="896112" y="3209544"/>
-            <a:ext cx="10454335" cy="740664"/>
-          </a:xfrm>
-          <a:prstGeom prst="rect">
-            <a:avLst/>
-          </a:prstGeom>
-          <a:noFill/>
-          <a:ln/>
-        </p:spPr>
-        <p:txBody>
-          <a:bodyPr wrap="square" rtlCol="0" anchor="t"/>
-          <a:lstStyle/>
-          <a:p>
-            <a:pPr algn="l" indent="0" marL="0">
-              <a:lnSpc>
-                <a:spcPct val="115000"/>
-              </a:lnSpc>
-              <a:buNone/>
-            </a:pPr>
-            <a:r>
-              <a:rPr lang="en-US" sz="1800" b="1" dirty="0">
-                <a:solidFill>
-                  <a:srgbClr val="1F4E9C"/>
-                </a:solidFill>
-                <a:latin typeface="微软雅黑" pitchFamily="34" charset="0"/>
-                <a:ea typeface="微软雅黑" pitchFamily="34" charset="-122"/>
-                <a:cs typeface="微软雅黑" pitchFamily="34" charset="-120"/>
-              </a:rPr>
-              <a:t>•  </a:t>
-            </a:r>
-            <a:pPr algn="l" indent="0" marL="0">
-              <a:lnSpc>
-                <a:spcPct val="115000"/>
-              </a:lnSpc>
-              <a:buNone/>
-            </a:pPr>
-            <a:r>
-              <a:rPr lang="en-US" sz="1800" dirty="0">
-                <a:solidFill>
-                  <a:srgbClr val="000000"/>
-                </a:solidFill>
-              </a:rPr>
-              <a:t>约定3 顺序栈 top 初值 -1，入栈写 S.data[++S.top]；循环队列牺牲一个单元判满，条件是 (rear+1)%MaxSize == front</a:t>
-            </a:r>
-            <a:endParaRPr lang="en-US" sz="1800" dirty="0"/>
-          </a:p>
-        </p:txBody>
-      </p:sp>
-      <p:sp>
-        <p:nvSpPr>
-          <p:cNvPr id="7" name="Text 5"/>
-          <p:cNvSpPr/>
-          <p:nvPr/>
-        </p:nvSpPr>
-        <p:spPr>
-          <a:xfrm>
-            <a:off x="896112" y="4023360"/>
-            <a:ext cx="10454335" cy="740664"/>
-          </a:xfrm>
-          <a:prstGeom prst="rect">
-            <a:avLst/>
-          </a:prstGeom>
-          <a:noFill/>
-          <a:ln/>
-        </p:spPr>
-        <p:txBody>
-          <a:bodyPr wrap="square" rtlCol="0" anchor="t"/>
-          <a:lstStyle/>
-          <a:p>
-            <a:pPr algn="l" indent="0" marL="0">
-              <a:lnSpc>
-                <a:spcPct val="115000"/>
-              </a:lnSpc>
-              <a:buNone/>
-            </a:pPr>
-            <a:r>
-              <a:rPr lang="en-US" sz="1800" b="1" dirty="0">
-                <a:solidFill>
-                  <a:srgbClr val="1F4E9C"/>
-                </a:solidFill>
-                <a:latin typeface="微软雅黑" pitchFamily="34" charset="0"/>
-                <a:ea typeface="微软雅黑" pitchFamily="34" charset="-122"/>
-                <a:cs typeface="微软雅黑" pitchFamily="34" charset="-120"/>
-              </a:rPr>
-              <a:t>•  </a:t>
-            </a:r>
-            <a:pPr algn="l" indent="0" marL="0">
-              <a:lnSpc>
-                <a:spcPct val="115000"/>
-              </a:lnSpc>
-              <a:buNone/>
-            </a:pPr>
-            <a:r>
-              <a:rPr lang="en-US" sz="1800" dirty="0">
-                <a:solidFill>
-                  <a:srgbClr val="000000"/>
-                </a:solidFill>
-              </a:rPr>
-              <a:t>约定4 栈与队列当工具用时元素类型按需替换：材料里写成 int，树和图的算法里放的是结点指针或顶点编号</a:t>
-            </a:r>
-            <a:endParaRPr lang="en-US" sz="1800" dirty="0"/>
-          </a:p>
-        </p:txBody>
-      </p:sp>
-      <p:sp>
-        <p:nvSpPr>
-          <p:cNvPr id="8" name="Text 6"/>
-          <p:cNvSpPr/>
-          <p:nvPr/>
-        </p:nvSpPr>
-        <p:spPr>
-          <a:xfrm>
-            <a:off x="822960" y="4928616"/>
-            <a:ext cx="10545775" cy="644652"/>
-          </a:xfrm>
-          <a:prstGeom prst="rect">
-            <a:avLst/>
-          </a:prstGeom>
-          <a:noFill/>
-          <a:ln/>
-        </p:spPr>
-        <p:txBody>
-          <a:bodyPr wrap="square" rtlCol="0" anchor="t"/>
-          <a:lstStyle/>
-          <a:p>
-            <a:pPr algn="l" indent="0" marL="0">
-              <a:buNone/>
-            </a:pPr>
-            <a:r>
-              <a:rPr lang="en-US" sz="1500" dirty="0">
-                <a:solidFill>
-                  <a:srgbClr val="8A9099"/>
-                </a:solidFill>
-                <a:latin typeface="微软雅黑" pitchFamily="34" charset="0"/>
-                <a:ea typeface="微软雅黑" pitchFamily="34" charset="-122"/>
-                <a:cs typeface="微软雅黑" pitchFamily="34" charset="-120"/>
-              </a:rPr>
-              <a:t>考场上直接写 SqStack S; Push(S, p); 不必重新定义，但答题要说明一句“栈中存放结点指针”</a:t>
+              <a:t>写代码的时候顺手把思想和复杂度补上，三件就齐了；真实的题比这难，但骨架就是这个三段式</a:t>
             </a:r>
             <a:endParaRPr lang="en-US" sz="1500" dirty="0"/>
           </a:p>
@@ -12108,7 +10645,7 @@
                 <a:ea typeface="微软雅黑" pitchFamily="34" charset="-122"/>
                 <a:cs typeface="微软雅黑" pitchFamily="34" charset="-120"/>
               </a:rPr>
-              <a:t>9 / 17</a:t>
+              <a:t>9 / 16</a:t>
             </a:r>
             <a:endParaRPr lang="en-US" sz="1000" dirty="0"/>
           </a:p>
@@ -12147,7 +10684,7 @@
                 <a:ea typeface="微软雅黑" pitchFamily="34" charset="-122"/>
                 <a:cs typeface="微软雅黑" pitchFamily="34" charset="-120"/>
               </a:rPr>
-              <a:t>约定5—6</a:t>
+              <a:t>复杂度分析 · 时间</a:t>
             </a:r>
             <a:endParaRPr lang="en-US" sz="1400" dirty="0"/>
           </a:p>
@@ -12186,7 +10723,7 @@
                 <a:ea typeface="微软雅黑" pitchFamily="34" charset="-122"/>
                 <a:cs typeface="微软雅黑" pitchFamily="34" charset="-120"/>
               </a:rPr>
-              <a:t>数组初始化的简写与陷阱、引用 &amp; 的含义</a:t>
+              <a:t>时间复杂度就是数基本操作跑了几次</a:t>
             </a:r>
             <a:endParaRPr lang="en-US" sz="2800" dirty="0"/>
           </a:p>
@@ -12201,7 +10738,7 @@
         <p:spPr>
           <a:xfrm>
             <a:off x="822960" y="2395728"/>
-            <a:ext cx="10545775" cy="1508760"/>
+            <a:ext cx="10545775" cy="1033272"/>
           </a:xfrm>
           <a:prstGeom prst="rect">
             <a:avLst/>
@@ -12221,7 +10758,7 @@
         <p:spPr>
           <a:xfrm>
             <a:off x="822960" y="2395728"/>
-            <a:ext cx="50292" cy="1508760"/>
+            <a:ext cx="50292" cy="1033272"/>
           </a:xfrm>
           <a:prstGeom prst="rect">
             <a:avLst/>
@@ -12241,7 +10778,7 @@
         <p:spPr>
           <a:xfrm>
             <a:off x="1078992" y="2505456"/>
-            <a:ext cx="10033711" cy="1289304"/>
+            <a:ext cx="10033711" cy="813816"/>
           </a:xfrm>
           <a:prstGeom prst="rect">
             <a:avLst/>
@@ -12268,10 +10805,8 @@
                 <a:ea typeface="Consolas" pitchFamily="34" charset="-122"/>
                 <a:cs typeface="Consolas" pitchFamily="34" charset="-120"/>
               </a:rPr>
-              <a:t>int a[n] = {0};              // 伪代码简写：整个数组清零（802允许）
-int dist[n] = {INF};         // 错！只有 dist[0]=INF，其余全是0
-for(int i = 0; i &lt; n; i++)   // 赋非0初值必须写循环
-    dist[i] = INF;
+              <a:t>for(int i = 0; i &lt; n; i++)
+    sum = sum + a[i];      // 基本操作：这句跑了几次？
 </a:t>
             </a:r>
             <a:endParaRPr lang="en-US" sz="1400" dirty="0"/>
@@ -12286,8 +10821,8 @@
         </p:nvSpPr>
         <p:spPr>
           <a:xfrm>
-            <a:off x="896112" y="4105656"/>
-            <a:ext cx="10454335" cy="740664"/>
+            <a:off x="896112" y="3630168"/>
+            <a:ext cx="10454335" cy="397764"/>
           </a:xfrm>
           <a:prstGeom prst="rect">
             <a:avLst/>
@@ -12328,7 +10863,7 @@
                   <a:srgbClr val="000000"/>
                 </a:solidFill>
               </a:rPr>
-              <a:t>约定5：={0}是清零简写；但 {INF} 只初始化第一个元素，赋非0初值必须写循环</a:t>
+              <a:t>基本操作通常是循环最里面那句，数它执行了多少次</a:t>
             </a:r>
             <a:endParaRPr lang="en-US" sz="1800" dirty="0"/>
           </a:p>
@@ -12342,7 +10877,7 @@
         </p:nvSpPr>
         <p:spPr>
           <a:xfrm>
-            <a:off x="896112" y="4919472"/>
+            <a:off x="896112" y="4101084"/>
             <a:ext cx="10454335" cy="397764"/>
           </a:xfrm>
           <a:prstGeom prst="rect">
@@ -12384,7 +10919,7 @@
                   <a:srgbClr val="000000"/>
                 </a:solidFill>
               </a:rPr>
-              <a:t>约定6：参数写引用 &amp; 表示传入传出，等价于C的二级指针，让函数改得动外面的数据</a:t>
+              <a:t>数出来只保留最高阶，系数和低阶项都去掉，写成大 O</a:t>
             </a:r>
             <a:endParaRPr lang="en-US" sz="1800" dirty="0"/>
           </a:p>
@@ -12398,8 +10933,8 @@
         </p:nvSpPr>
         <p:spPr>
           <a:xfrm>
-            <a:off x="822960" y="5481828"/>
-            <a:ext cx="10545775" cy="358902"/>
+            <a:off x="896112" y="4572000"/>
+            <a:ext cx="10454335" cy="397764"/>
           </a:xfrm>
           <a:prstGeom prst="rect">
             <a:avLst/>
@@ -12412,18 +10947,130 @@
           <a:lstStyle/>
           <a:p>
             <a:pPr algn="l" indent="0" marL="0">
-              <a:buNone/>
-            </a:pPr>
-            <a:r>
-              <a:rPr lang="en-US" sz="1500" dirty="0">
-                <a:solidFill>
-                  <a:srgbClr val="8A9099"/>
+              <a:lnSpc>
+                <a:spcPct val="115000"/>
+              </a:lnSpc>
+              <a:buNone/>
+            </a:pPr>
+            <a:r>
+              <a:rPr lang="en-US" sz="1800" b="1" dirty="0">
+                <a:solidFill>
+                  <a:srgbClr val="1F4E9C"/>
                 </a:solidFill>
                 <a:latin typeface="微软雅黑" pitchFamily="34" charset="0"/>
                 <a:ea typeface="微软雅黑" pitchFamily="34" charset="-122"/>
                 <a:cs typeface="微软雅黑" pitchFamily="34" charset="-120"/>
               </a:rPr>
-              <a:t>引用 &amp; 在C语言强化阶段讲过，这里只说清它的作用</a:t>
+              <a:t>•  </a:t>
+            </a:r>
+            <a:pPr algn="l" indent="0" marL="0">
+              <a:lnSpc>
+                <a:spcPct val="115000"/>
+              </a:lnSpc>
+              <a:buNone/>
+            </a:pPr>
+            <a:r>
+              <a:rPr lang="en-US" sz="1800" dirty="0">
+                <a:solidFill>
+                  <a:srgbClr val="000000"/>
+                </a:solidFill>
+              </a:rPr>
+              <a:t>这个例子最里面那句跑了 n 次，所以是 O(n)</a:t>
+            </a:r>
+            <a:endParaRPr lang="en-US" sz="1800" dirty="0"/>
+          </a:p>
+        </p:txBody>
+      </p:sp>
+      <p:sp>
+        <p:nvSpPr>
+          <p:cNvPr id="11" name="Text 9"/>
+          <p:cNvSpPr/>
+          <p:nvPr/>
+        </p:nvSpPr>
+        <p:spPr>
+          <a:xfrm>
+            <a:off x="896112" y="5042916"/>
+            <a:ext cx="10454335" cy="397764"/>
+          </a:xfrm>
+          <a:prstGeom prst="rect">
+            <a:avLst/>
+          </a:prstGeom>
+          <a:noFill/>
+          <a:ln/>
+        </p:spPr>
+        <p:txBody>
+          <a:bodyPr wrap="square" rtlCol="0" anchor="t"/>
+          <a:lstStyle/>
+          <a:p>
+            <a:pPr algn="l" indent="0" marL="0">
+              <a:lnSpc>
+                <a:spcPct val="115000"/>
+              </a:lnSpc>
+              <a:buNone/>
+            </a:pPr>
+            <a:r>
+              <a:rPr lang="en-US" sz="1800" b="1" dirty="0">
+                <a:solidFill>
+                  <a:srgbClr val="1F4E9C"/>
+                </a:solidFill>
+                <a:latin typeface="微软雅黑" pitchFamily="34" charset="0"/>
+                <a:ea typeface="微软雅黑" pitchFamily="34" charset="-122"/>
+                <a:cs typeface="微软雅黑" pitchFamily="34" charset="-120"/>
+              </a:rPr>
+              <a:t>•  </a:t>
+            </a:r>
+            <a:pPr algn="l" indent="0" marL="0">
+              <a:lnSpc>
+                <a:spcPct val="115000"/>
+              </a:lnSpc>
+              <a:buNone/>
+            </a:pPr>
+            <a:r>
+              <a:rPr lang="en-US" sz="1800" dirty="0">
+                <a:solidFill>
+                  <a:srgbClr val="000000"/>
+                </a:solidFill>
+              </a:rPr>
+              <a:t>循环变量翻着倍走（每圈乘2到超过 n），圈数是 logn，就是 O(logn)</a:t>
+            </a:r>
+            <a:endParaRPr lang="en-US" sz="1800" dirty="0"/>
+          </a:p>
+        </p:txBody>
+      </p:sp>
+      <p:sp>
+        <p:nvSpPr>
+          <p:cNvPr id="12" name="Text 10"/>
+          <p:cNvSpPr/>
+          <p:nvPr/>
+        </p:nvSpPr>
+        <p:spPr>
+          <a:xfrm>
+            <a:off x="822960" y="5605272"/>
+            <a:ext cx="10545775" cy="358902"/>
+          </a:xfrm>
+          <a:prstGeom prst="rect">
+            <a:avLst/>
+          </a:prstGeom>
+          <a:noFill/>
+          <a:ln/>
+        </p:spPr>
+        <p:txBody>
+          <a:bodyPr wrap="square" rtlCol="0" anchor="t"/>
+          <a:lstStyle/>
+          <a:p>
+            <a:pPr algn="l" indent="0" marL="0">
+              <a:buNone/>
+            </a:pPr>
+            <a:r>
+              <a:rPr lang="en-US" sz="1500" dirty="0">
+                <a:solidFill>
+                  <a:srgbClr val="8A9099"/>
+                </a:solidFill>
+                <a:latin typeface="微软雅黑" pitchFamily="34" charset="0"/>
+                <a:ea typeface="微软雅黑" pitchFamily="34" charset="-122"/>
+                <a:cs typeface="微软雅黑" pitchFamily="34" charset="-120"/>
+              </a:rPr>
+              <a:t>别一看到循环就套公式，先看最里面那句到底跟着谁变</a:t>
             </a:r>
             <a:endParaRPr lang="en-US" sz="1500" dirty="0"/>
           </a:p>
